--- a/proekt1.pptx
+++ b/proekt1.pptx
@@ -5,7 +5,7 @@
     <p:sldMasterId id="2147483648" r:id="rId1"/>
   </p:sldMasterIdLst>
   <p:notesMasterIdLst>
-    <p:notesMasterId r:id="rId14"/>
+    <p:notesMasterId r:id="rId18"/>
   </p:notesMasterIdLst>
   <p:sldIdLst>
     <p:sldId id="256" r:id="rId2"/>
@@ -18,8 +18,12 @@
     <p:sldId id="271" r:id="rId9"/>
     <p:sldId id="276" r:id="rId10"/>
     <p:sldId id="277" r:id="rId11"/>
-    <p:sldId id="269" r:id="rId12"/>
-    <p:sldId id="270" r:id="rId13"/>
+    <p:sldId id="281" r:id="rId12"/>
+    <p:sldId id="284" r:id="rId13"/>
+    <p:sldId id="282" r:id="rId14"/>
+    <p:sldId id="283" r:id="rId15"/>
+    <p:sldId id="269" r:id="rId16"/>
+    <p:sldId id="270" r:id="rId17"/>
   </p:sldIdLst>
   <p:sldSz cx="12192000" cy="6858000"/>
   <p:notesSz cx="6858000" cy="9144000"/>
@@ -208,7 +212,7 @@
           <a:p>
             <a:fld id="{7EA1C4D5-F194-4005-B60F-B7FB925AC96C}" type="datetimeFigureOut">
               <a:rPr lang="ru-RU" smtClean="0"/>
-              <a:t>05.05.2026</a:t>
+              <a:t>06.05.2026</a:t>
             </a:fld>
             <a:endParaRPr lang="ru-RU"/>
           </a:p>
@@ -583,6 +587,438 @@
 </p:notes>
 </file>
 
+<file path=ppt/notesSlides/notesSlide10.xml><?xml version="1.0" encoding="utf-8"?>
+<p:notes xmlns:a="http://schemas.openxmlformats.org/drawingml/2006/main" xmlns:r="http://schemas.openxmlformats.org/officeDocument/2006/relationships" xmlns:p="http://schemas.openxmlformats.org/presentationml/2006/main">
+  <p:cSld>
+    <p:spTree>
+      <p:nvGrpSpPr>
+        <p:cNvPr id="1" name="">
+          <a:extLst>
+            <a:ext uri="{FF2B5EF4-FFF2-40B4-BE49-F238E27FC236}">
+              <a16:creationId xmlns:a16="http://schemas.microsoft.com/office/drawing/2014/main" id="{6602A03F-A620-3DE9-A6B4-789F663E9FDF}"/>
+            </a:ext>
+          </a:extLst>
+        </p:cNvPr>
+        <p:cNvGrpSpPr/>
+        <p:nvPr/>
+      </p:nvGrpSpPr>
+      <p:grpSpPr>
+        <a:xfrm>
+          <a:off x="0" y="0"/>
+          <a:ext cx="0" cy="0"/>
+          <a:chOff x="0" y="0"/>
+          <a:chExt cx="0" cy="0"/>
+        </a:xfrm>
+      </p:grpSpPr>
+      <p:sp>
+        <p:nvSpPr>
+          <p:cNvPr id="2" name="Образ слайда 1">
+            <a:extLst>
+              <a:ext uri="{FF2B5EF4-FFF2-40B4-BE49-F238E27FC236}">
+                <a16:creationId xmlns:a16="http://schemas.microsoft.com/office/drawing/2014/main" id="{F0057876-1957-596D-03C4-C308B84BE230}"/>
+              </a:ext>
+            </a:extLst>
+          </p:cNvPr>
+          <p:cNvSpPr>
+            <a:spLocks noGrp="1" noRot="1" noChangeAspect="1"/>
+          </p:cNvSpPr>
+          <p:nvPr>
+            <p:ph type="sldImg"/>
+          </p:nvPr>
+        </p:nvSpPr>
+        <p:spPr/>
+      </p:sp>
+      <p:sp>
+        <p:nvSpPr>
+          <p:cNvPr id="3" name="Заметки 2">
+            <a:extLst>
+              <a:ext uri="{FF2B5EF4-FFF2-40B4-BE49-F238E27FC236}">
+                <a16:creationId xmlns:a16="http://schemas.microsoft.com/office/drawing/2014/main" id="{B46DD14B-E6F8-8F5B-DFDD-A9EF33799ECB}"/>
+              </a:ext>
+            </a:extLst>
+          </p:cNvPr>
+          <p:cNvSpPr>
+            <a:spLocks noGrp="1"/>
+          </p:cNvSpPr>
+          <p:nvPr>
+            <p:ph type="body" idx="1"/>
+          </p:nvPr>
+        </p:nvSpPr>
+        <p:spPr/>
+        <p:txBody>
+          <a:bodyPr/>
+          <a:lstStyle/>
+          <a:p>
+            <a:endParaRPr lang="ru-RU" dirty="0"/>
+          </a:p>
+        </p:txBody>
+      </p:sp>
+      <p:sp>
+        <p:nvSpPr>
+          <p:cNvPr id="4" name="Номер слайда 3">
+            <a:extLst>
+              <a:ext uri="{FF2B5EF4-FFF2-40B4-BE49-F238E27FC236}">
+                <a16:creationId xmlns:a16="http://schemas.microsoft.com/office/drawing/2014/main" id="{239FE23F-900B-5810-94AC-379CDAB0BA39}"/>
+              </a:ext>
+            </a:extLst>
+          </p:cNvPr>
+          <p:cNvSpPr>
+            <a:spLocks noGrp="1"/>
+          </p:cNvSpPr>
+          <p:nvPr>
+            <p:ph type="sldNum" sz="quarter" idx="5"/>
+          </p:nvPr>
+        </p:nvSpPr>
+        <p:spPr/>
+        <p:txBody>
+          <a:bodyPr/>
+          <a:lstStyle/>
+          <a:p>
+            <a:fld id="{ACE6951F-430F-4AC5-BEC4-1CC767AF162F}" type="slidenum">
+              <a:rPr lang="ru-RU" smtClean="0"/>
+              <a:t>11</a:t>
+            </a:fld>
+            <a:endParaRPr lang="ru-RU"/>
+          </a:p>
+        </p:txBody>
+      </p:sp>
+    </p:spTree>
+    <p:extLst>
+      <p:ext uri="{BB962C8B-B14F-4D97-AF65-F5344CB8AC3E}">
+        <p14:creationId xmlns:p14="http://schemas.microsoft.com/office/powerpoint/2010/main" val="2436130769"/>
+      </p:ext>
+    </p:extLst>
+  </p:cSld>
+  <p:clrMapOvr>
+    <a:masterClrMapping/>
+  </p:clrMapOvr>
+</p:notes>
+</file>
+
+<file path=ppt/notesSlides/notesSlide11.xml><?xml version="1.0" encoding="utf-8"?>
+<p:notes xmlns:a="http://schemas.openxmlformats.org/drawingml/2006/main" xmlns:r="http://schemas.openxmlformats.org/officeDocument/2006/relationships" xmlns:p="http://schemas.openxmlformats.org/presentationml/2006/main">
+  <p:cSld>
+    <p:spTree>
+      <p:nvGrpSpPr>
+        <p:cNvPr id="1" name="">
+          <a:extLst>
+            <a:ext uri="{FF2B5EF4-FFF2-40B4-BE49-F238E27FC236}">
+              <a16:creationId xmlns:a16="http://schemas.microsoft.com/office/drawing/2014/main" id="{6602A03F-A620-3DE9-A6B4-789F663E9FDF}"/>
+            </a:ext>
+          </a:extLst>
+        </p:cNvPr>
+        <p:cNvGrpSpPr/>
+        <p:nvPr/>
+      </p:nvGrpSpPr>
+      <p:grpSpPr>
+        <a:xfrm>
+          <a:off x="0" y="0"/>
+          <a:ext cx="0" cy="0"/>
+          <a:chOff x="0" y="0"/>
+          <a:chExt cx="0" cy="0"/>
+        </a:xfrm>
+      </p:grpSpPr>
+      <p:sp>
+        <p:nvSpPr>
+          <p:cNvPr id="2" name="Образ слайда 1">
+            <a:extLst>
+              <a:ext uri="{FF2B5EF4-FFF2-40B4-BE49-F238E27FC236}">
+                <a16:creationId xmlns:a16="http://schemas.microsoft.com/office/drawing/2014/main" id="{F0057876-1957-596D-03C4-C308B84BE230}"/>
+              </a:ext>
+            </a:extLst>
+          </p:cNvPr>
+          <p:cNvSpPr>
+            <a:spLocks noGrp="1" noRot="1" noChangeAspect="1"/>
+          </p:cNvSpPr>
+          <p:nvPr>
+            <p:ph type="sldImg"/>
+          </p:nvPr>
+        </p:nvSpPr>
+        <p:spPr/>
+      </p:sp>
+      <p:sp>
+        <p:nvSpPr>
+          <p:cNvPr id="3" name="Заметки 2">
+            <a:extLst>
+              <a:ext uri="{FF2B5EF4-FFF2-40B4-BE49-F238E27FC236}">
+                <a16:creationId xmlns:a16="http://schemas.microsoft.com/office/drawing/2014/main" id="{B46DD14B-E6F8-8F5B-DFDD-A9EF33799ECB}"/>
+              </a:ext>
+            </a:extLst>
+          </p:cNvPr>
+          <p:cNvSpPr>
+            <a:spLocks noGrp="1"/>
+          </p:cNvSpPr>
+          <p:nvPr>
+            <p:ph type="body" idx="1"/>
+          </p:nvPr>
+        </p:nvSpPr>
+        <p:spPr/>
+        <p:txBody>
+          <a:bodyPr/>
+          <a:lstStyle/>
+          <a:p>
+            <a:endParaRPr lang="ru-RU" dirty="0"/>
+          </a:p>
+        </p:txBody>
+      </p:sp>
+      <p:sp>
+        <p:nvSpPr>
+          <p:cNvPr id="4" name="Номер слайда 3">
+            <a:extLst>
+              <a:ext uri="{FF2B5EF4-FFF2-40B4-BE49-F238E27FC236}">
+                <a16:creationId xmlns:a16="http://schemas.microsoft.com/office/drawing/2014/main" id="{239FE23F-900B-5810-94AC-379CDAB0BA39}"/>
+              </a:ext>
+            </a:extLst>
+          </p:cNvPr>
+          <p:cNvSpPr>
+            <a:spLocks noGrp="1"/>
+          </p:cNvSpPr>
+          <p:nvPr>
+            <p:ph type="sldNum" sz="quarter" idx="5"/>
+          </p:nvPr>
+        </p:nvSpPr>
+        <p:spPr/>
+        <p:txBody>
+          <a:bodyPr/>
+          <a:lstStyle/>
+          <a:p>
+            <a:fld id="{ACE6951F-430F-4AC5-BEC4-1CC767AF162F}" type="slidenum">
+              <a:rPr lang="ru-RU" smtClean="0"/>
+              <a:t>12</a:t>
+            </a:fld>
+            <a:endParaRPr lang="ru-RU"/>
+          </a:p>
+        </p:txBody>
+      </p:sp>
+    </p:spTree>
+    <p:extLst>
+      <p:ext uri="{BB962C8B-B14F-4D97-AF65-F5344CB8AC3E}">
+        <p14:creationId xmlns:p14="http://schemas.microsoft.com/office/powerpoint/2010/main" val="2512215706"/>
+      </p:ext>
+    </p:extLst>
+  </p:cSld>
+  <p:clrMapOvr>
+    <a:masterClrMapping/>
+  </p:clrMapOvr>
+</p:notes>
+</file>
+
+<file path=ppt/notesSlides/notesSlide12.xml><?xml version="1.0" encoding="utf-8"?>
+<p:notes xmlns:a="http://schemas.openxmlformats.org/drawingml/2006/main" xmlns:r="http://schemas.openxmlformats.org/officeDocument/2006/relationships" xmlns:p="http://schemas.openxmlformats.org/presentationml/2006/main">
+  <p:cSld>
+    <p:spTree>
+      <p:nvGrpSpPr>
+        <p:cNvPr id="1" name="">
+          <a:extLst>
+            <a:ext uri="{FF2B5EF4-FFF2-40B4-BE49-F238E27FC236}">
+              <a16:creationId xmlns:a16="http://schemas.microsoft.com/office/drawing/2014/main" id="{6602A03F-A620-3DE9-A6B4-789F663E9FDF}"/>
+            </a:ext>
+          </a:extLst>
+        </p:cNvPr>
+        <p:cNvGrpSpPr/>
+        <p:nvPr/>
+      </p:nvGrpSpPr>
+      <p:grpSpPr>
+        <a:xfrm>
+          <a:off x="0" y="0"/>
+          <a:ext cx="0" cy="0"/>
+          <a:chOff x="0" y="0"/>
+          <a:chExt cx="0" cy="0"/>
+        </a:xfrm>
+      </p:grpSpPr>
+      <p:sp>
+        <p:nvSpPr>
+          <p:cNvPr id="2" name="Образ слайда 1">
+            <a:extLst>
+              <a:ext uri="{FF2B5EF4-FFF2-40B4-BE49-F238E27FC236}">
+                <a16:creationId xmlns:a16="http://schemas.microsoft.com/office/drawing/2014/main" id="{F0057876-1957-596D-03C4-C308B84BE230}"/>
+              </a:ext>
+            </a:extLst>
+          </p:cNvPr>
+          <p:cNvSpPr>
+            <a:spLocks noGrp="1" noRot="1" noChangeAspect="1"/>
+          </p:cNvSpPr>
+          <p:nvPr>
+            <p:ph type="sldImg"/>
+          </p:nvPr>
+        </p:nvSpPr>
+        <p:spPr/>
+      </p:sp>
+      <p:sp>
+        <p:nvSpPr>
+          <p:cNvPr id="3" name="Заметки 2">
+            <a:extLst>
+              <a:ext uri="{FF2B5EF4-FFF2-40B4-BE49-F238E27FC236}">
+                <a16:creationId xmlns:a16="http://schemas.microsoft.com/office/drawing/2014/main" id="{B46DD14B-E6F8-8F5B-DFDD-A9EF33799ECB}"/>
+              </a:ext>
+            </a:extLst>
+          </p:cNvPr>
+          <p:cNvSpPr>
+            <a:spLocks noGrp="1"/>
+          </p:cNvSpPr>
+          <p:nvPr>
+            <p:ph type="body" idx="1"/>
+          </p:nvPr>
+        </p:nvSpPr>
+        <p:spPr/>
+        <p:txBody>
+          <a:bodyPr/>
+          <a:lstStyle/>
+          <a:p>
+            <a:endParaRPr lang="ru-RU" dirty="0"/>
+          </a:p>
+        </p:txBody>
+      </p:sp>
+      <p:sp>
+        <p:nvSpPr>
+          <p:cNvPr id="4" name="Номер слайда 3">
+            <a:extLst>
+              <a:ext uri="{FF2B5EF4-FFF2-40B4-BE49-F238E27FC236}">
+                <a16:creationId xmlns:a16="http://schemas.microsoft.com/office/drawing/2014/main" id="{239FE23F-900B-5810-94AC-379CDAB0BA39}"/>
+              </a:ext>
+            </a:extLst>
+          </p:cNvPr>
+          <p:cNvSpPr>
+            <a:spLocks noGrp="1"/>
+          </p:cNvSpPr>
+          <p:nvPr>
+            <p:ph type="sldNum" sz="quarter" idx="5"/>
+          </p:nvPr>
+        </p:nvSpPr>
+        <p:spPr/>
+        <p:txBody>
+          <a:bodyPr/>
+          <a:lstStyle/>
+          <a:p>
+            <a:fld id="{ACE6951F-430F-4AC5-BEC4-1CC767AF162F}" type="slidenum">
+              <a:rPr lang="ru-RU" smtClean="0"/>
+              <a:t>13</a:t>
+            </a:fld>
+            <a:endParaRPr lang="ru-RU"/>
+          </a:p>
+        </p:txBody>
+      </p:sp>
+    </p:spTree>
+    <p:extLst>
+      <p:ext uri="{BB962C8B-B14F-4D97-AF65-F5344CB8AC3E}">
+        <p14:creationId xmlns:p14="http://schemas.microsoft.com/office/powerpoint/2010/main" val="1971267516"/>
+      </p:ext>
+    </p:extLst>
+  </p:cSld>
+  <p:clrMapOvr>
+    <a:masterClrMapping/>
+  </p:clrMapOvr>
+</p:notes>
+</file>
+
+<file path=ppt/notesSlides/notesSlide13.xml><?xml version="1.0" encoding="utf-8"?>
+<p:notes xmlns:a="http://schemas.openxmlformats.org/drawingml/2006/main" xmlns:r="http://schemas.openxmlformats.org/officeDocument/2006/relationships" xmlns:p="http://schemas.openxmlformats.org/presentationml/2006/main">
+  <p:cSld>
+    <p:spTree>
+      <p:nvGrpSpPr>
+        <p:cNvPr id="1" name="">
+          <a:extLst>
+            <a:ext uri="{FF2B5EF4-FFF2-40B4-BE49-F238E27FC236}">
+              <a16:creationId xmlns:a16="http://schemas.microsoft.com/office/drawing/2014/main" id="{6602A03F-A620-3DE9-A6B4-789F663E9FDF}"/>
+            </a:ext>
+          </a:extLst>
+        </p:cNvPr>
+        <p:cNvGrpSpPr/>
+        <p:nvPr/>
+      </p:nvGrpSpPr>
+      <p:grpSpPr>
+        <a:xfrm>
+          <a:off x="0" y="0"/>
+          <a:ext cx="0" cy="0"/>
+          <a:chOff x="0" y="0"/>
+          <a:chExt cx="0" cy="0"/>
+        </a:xfrm>
+      </p:grpSpPr>
+      <p:sp>
+        <p:nvSpPr>
+          <p:cNvPr id="2" name="Образ слайда 1">
+            <a:extLst>
+              <a:ext uri="{FF2B5EF4-FFF2-40B4-BE49-F238E27FC236}">
+                <a16:creationId xmlns:a16="http://schemas.microsoft.com/office/drawing/2014/main" id="{F0057876-1957-596D-03C4-C308B84BE230}"/>
+              </a:ext>
+            </a:extLst>
+          </p:cNvPr>
+          <p:cNvSpPr>
+            <a:spLocks noGrp="1" noRot="1" noChangeAspect="1"/>
+          </p:cNvSpPr>
+          <p:nvPr>
+            <p:ph type="sldImg"/>
+          </p:nvPr>
+        </p:nvSpPr>
+        <p:spPr/>
+      </p:sp>
+      <p:sp>
+        <p:nvSpPr>
+          <p:cNvPr id="3" name="Заметки 2">
+            <a:extLst>
+              <a:ext uri="{FF2B5EF4-FFF2-40B4-BE49-F238E27FC236}">
+                <a16:creationId xmlns:a16="http://schemas.microsoft.com/office/drawing/2014/main" id="{B46DD14B-E6F8-8F5B-DFDD-A9EF33799ECB}"/>
+              </a:ext>
+            </a:extLst>
+          </p:cNvPr>
+          <p:cNvSpPr>
+            <a:spLocks noGrp="1"/>
+          </p:cNvSpPr>
+          <p:nvPr>
+            <p:ph type="body" idx="1"/>
+          </p:nvPr>
+        </p:nvSpPr>
+        <p:spPr/>
+        <p:txBody>
+          <a:bodyPr/>
+          <a:lstStyle/>
+          <a:p>
+            <a:endParaRPr lang="ru-RU" dirty="0"/>
+          </a:p>
+        </p:txBody>
+      </p:sp>
+      <p:sp>
+        <p:nvSpPr>
+          <p:cNvPr id="4" name="Номер слайда 3">
+            <a:extLst>
+              <a:ext uri="{FF2B5EF4-FFF2-40B4-BE49-F238E27FC236}">
+                <a16:creationId xmlns:a16="http://schemas.microsoft.com/office/drawing/2014/main" id="{239FE23F-900B-5810-94AC-379CDAB0BA39}"/>
+              </a:ext>
+            </a:extLst>
+          </p:cNvPr>
+          <p:cNvSpPr>
+            <a:spLocks noGrp="1"/>
+          </p:cNvSpPr>
+          <p:nvPr>
+            <p:ph type="sldNum" sz="quarter" idx="5"/>
+          </p:nvPr>
+        </p:nvSpPr>
+        <p:spPr/>
+        <p:txBody>
+          <a:bodyPr/>
+          <a:lstStyle/>
+          <a:p>
+            <a:fld id="{ACE6951F-430F-4AC5-BEC4-1CC767AF162F}" type="slidenum">
+              <a:rPr lang="ru-RU" smtClean="0"/>
+              <a:t>14</a:t>
+            </a:fld>
+            <a:endParaRPr lang="ru-RU"/>
+          </a:p>
+        </p:txBody>
+      </p:sp>
+    </p:spTree>
+    <p:extLst>
+      <p:ext uri="{BB962C8B-B14F-4D97-AF65-F5344CB8AC3E}">
+        <p14:creationId xmlns:p14="http://schemas.microsoft.com/office/powerpoint/2010/main" val="3961335182"/>
+      </p:ext>
+    </p:extLst>
+  </p:cSld>
+  <p:clrMapOvr>
+    <a:masterClrMapping/>
+  </p:clrMapOvr>
+</p:notes>
+</file>
+
 <file path=ppt/notesSlides/notesSlide2.xml><?xml version="1.0" encoding="utf-8"?>
 <p:notes xmlns:a="http://schemas.openxmlformats.org/drawingml/2006/main" xmlns:r="http://schemas.openxmlformats.org/officeDocument/2006/relationships" xmlns:p="http://schemas.openxmlformats.org/presentationml/2006/main">
   <p:cSld>
@@ -1570,7 +2006,7 @@
           <a:p>
             <a:fld id="{76A2016E-951E-4276-9CFA-C491F5BC6E95}" type="datetimeFigureOut">
               <a:rPr lang="ru-RU" smtClean="0"/>
-              <a:t>05.05.2026</a:t>
+              <a:t>06.05.2026</a:t>
             </a:fld>
             <a:endParaRPr lang="ru-RU"/>
           </a:p>
@@ -1768,7 +2204,7 @@
           <a:p>
             <a:fld id="{76A2016E-951E-4276-9CFA-C491F5BC6E95}" type="datetimeFigureOut">
               <a:rPr lang="ru-RU" smtClean="0"/>
-              <a:t>05.05.2026</a:t>
+              <a:t>06.05.2026</a:t>
             </a:fld>
             <a:endParaRPr lang="ru-RU"/>
           </a:p>
@@ -1976,7 +2412,7 @@
           <a:p>
             <a:fld id="{76A2016E-951E-4276-9CFA-C491F5BC6E95}" type="datetimeFigureOut">
               <a:rPr lang="ru-RU" smtClean="0"/>
-              <a:t>05.05.2026</a:t>
+              <a:t>06.05.2026</a:t>
             </a:fld>
             <a:endParaRPr lang="ru-RU"/>
           </a:p>
@@ -2174,7 +2610,7 @@
           <a:p>
             <a:fld id="{76A2016E-951E-4276-9CFA-C491F5BC6E95}" type="datetimeFigureOut">
               <a:rPr lang="ru-RU" smtClean="0"/>
-              <a:t>05.05.2026</a:t>
+              <a:t>06.05.2026</a:t>
             </a:fld>
             <a:endParaRPr lang="ru-RU"/>
           </a:p>
@@ -2449,7 +2885,7 @@
           <a:p>
             <a:fld id="{76A2016E-951E-4276-9CFA-C491F5BC6E95}" type="datetimeFigureOut">
               <a:rPr lang="ru-RU" smtClean="0"/>
-              <a:t>05.05.2026</a:t>
+              <a:t>06.05.2026</a:t>
             </a:fld>
             <a:endParaRPr lang="ru-RU"/>
           </a:p>
@@ -2714,7 +3150,7 @@
           <a:p>
             <a:fld id="{76A2016E-951E-4276-9CFA-C491F5BC6E95}" type="datetimeFigureOut">
               <a:rPr lang="ru-RU" smtClean="0"/>
-              <a:t>05.05.2026</a:t>
+              <a:t>06.05.2026</a:t>
             </a:fld>
             <a:endParaRPr lang="ru-RU"/>
           </a:p>
@@ -3126,7 +3562,7 @@
           <a:p>
             <a:fld id="{76A2016E-951E-4276-9CFA-C491F5BC6E95}" type="datetimeFigureOut">
               <a:rPr lang="ru-RU" smtClean="0"/>
-              <a:t>05.05.2026</a:t>
+              <a:t>06.05.2026</a:t>
             </a:fld>
             <a:endParaRPr lang="ru-RU"/>
           </a:p>
@@ -3267,7 +3703,7 @@
           <a:p>
             <a:fld id="{76A2016E-951E-4276-9CFA-C491F5BC6E95}" type="datetimeFigureOut">
               <a:rPr lang="ru-RU" smtClean="0"/>
-              <a:t>05.05.2026</a:t>
+              <a:t>06.05.2026</a:t>
             </a:fld>
             <a:endParaRPr lang="ru-RU"/>
           </a:p>
@@ -3380,7 +3816,7 @@
           <a:p>
             <a:fld id="{76A2016E-951E-4276-9CFA-C491F5BC6E95}" type="datetimeFigureOut">
               <a:rPr lang="ru-RU" smtClean="0"/>
-              <a:t>05.05.2026</a:t>
+              <a:t>06.05.2026</a:t>
             </a:fld>
             <a:endParaRPr lang="ru-RU"/>
           </a:p>
@@ -3691,7 +4127,7 @@
           <a:p>
             <a:fld id="{76A2016E-951E-4276-9CFA-C491F5BC6E95}" type="datetimeFigureOut">
               <a:rPr lang="ru-RU" smtClean="0"/>
-              <a:t>05.05.2026</a:t>
+              <a:t>06.05.2026</a:t>
             </a:fld>
             <a:endParaRPr lang="ru-RU"/>
           </a:p>
@@ -3979,7 +4415,7 @@
           <a:p>
             <a:fld id="{76A2016E-951E-4276-9CFA-C491F5BC6E95}" type="datetimeFigureOut">
               <a:rPr lang="ru-RU" smtClean="0"/>
-              <a:t>05.05.2026</a:t>
+              <a:t>06.05.2026</a:t>
             </a:fld>
             <a:endParaRPr lang="ru-RU"/>
           </a:p>
@@ -4220,7 +4656,7 @@
           <a:p>
             <a:fld id="{76A2016E-951E-4276-9CFA-C491F5BC6E95}" type="datetimeFigureOut">
               <a:rPr lang="ru-RU" smtClean="0"/>
-              <a:t>05.05.2026</a:t>
+              <a:t>06.05.2026</a:t>
             </a:fld>
             <a:endParaRPr lang="ru-RU"/>
           </a:p>
@@ -5137,6 +5573,2901 @@
         <p:cNvPr id="1" name="">
           <a:extLst>
             <a:ext uri="{FF2B5EF4-FFF2-40B4-BE49-F238E27FC236}">
+              <a16:creationId xmlns:a16="http://schemas.microsoft.com/office/drawing/2014/main" id="{6B1EA241-3A0B-F48D-DF24-41203B41C8FD}"/>
+            </a:ext>
+          </a:extLst>
+        </p:cNvPr>
+        <p:cNvGrpSpPr/>
+        <p:nvPr/>
+      </p:nvGrpSpPr>
+      <p:grpSpPr>
+        <a:xfrm>
+          <a:off x="0" y="0"/>
+          <a:ext cx="0" cy="0"/>
+          <a:chOff x="0" y="0"/>
+          <a:chExt cx="0" cy="0"/>
+        </a:xfrm>
+      </p:grpSpPr>
+      <p:pic>
+        <p:nvPicPr>
+          <p:cNvPr id="6" name="Объект 5">
+            <a:extLst>
+              <a:ext uri="{FF2B5EF4-FFF2-40B4-BE49-F238E27FC236}">
+                <a16:creationId xmlns:a16="http://schemas.microsoft.com/office/drawing/2014/main" id="{678B5A6C-C803-EEE4-2B91-BA56A4CFAD53}"/>
+              </a:ext>
+            </a:extLst>
+          </p:cNvPr>
+          <p:cNvPicPr>
+            <a:picLocks noGrp="1"/>
+          </p:cNvPicPr>
+          <p:nvPr>
+            <p:ph idx="1"/>
+          </p:nvPr>
+        </p:nvPicPr>
+        <p:blipFill>
+          <a:blip r:embed="rId3">
+            <a:extLst>
+              <a:ext uri="{28A0092B-C50C-407E-A947-70E740481C1C}">
+                <a14:useLocalDpi xmlns:a14="http://schemas.microsoft.com/office/drawing/2010/main" val="0"/>
+              </a:ext>
+            </a:extLst>
+          </a:blip>
+          <a:stretch>
+            <a:fillRect/>
+          </a:stretch>
+        </p:blipFill>
+        <p:spPr>
+          <a:xfrm>
+            <a:off x="0" y="0"/>
+            <a:ext cx="12192000" cy="6934200"/>
+          </a:xfrm>
+        </p:spPr>
+      </p:pic>
+      <p:sp>
+        <p:nvSpPr>
+          <p:cNvPr id="3" name="Заголовок 1">
+            <a:extLst>
+              <a:ext uri="{FF2B5EF4-FFF2-40B4-BE49-F238E27FC236}">
+                <a16:creationId xmlns:a16="http://schemas.microsoft.com/office/drawing/2014/main" id="{6212C54A-A273-C375-0141-AEA49448614B}"/>
+              </a:ext>
+            </a:extLst>
+          </p:cNvPr>
+          <p:cNvSpPr txBox="1">
+            <a:spLocks/>
+          </p:cNvSpPr>
+          <p:nvPr/>
+        </p:nvSpPr>
+        <p:spPr>
+          <a:xfrm>
+            <a:off x="838200" y="469994"/>
+            <a:ext cx="10515600" cy="358775"/>
+          </a:xfrm>
+          <a:prstGeom prst="rect">
+            <a:avLst/>
+          </a:prstGeom>
+        </p:spPr>
+        <p:txBody>
+          <a:bodyPr vert="horz" lIns="91440" tIns="45720" rIns="91440" bIns="45720" rtlCol="0" anchor="ctr">
+            <a:noAutofit/>
+          </a:bodyPr>
+          <a:lstStyle>
+            <a:lvl1pPr algn="l" defTabSz="914400" rtl="0" eaLnBrk="1" latinLnBrk="0" hangingPunct="1">
+              <a:lnSpc>
+                <a:spcPct val="90000"/>
+              </a:lnSpc>
+              <a:spcBef>
+                <a:spcPct val="0"/>
+              </a:spcBef>
+              <a:buNone/>
+              <a:defRPr sz="4400" kern="1200">
+                <a:solidFill>
+                  <a:schemeClr val="tx1"/>
+                </a:solidFill>
+                <a:latin typeface="+mj-lt"/>
+                <a:ea typeface="+mj-ea"/>
+                <a:cs typeface="+mj-cs"/>
+              </a:defRPr>
+            </a:lvl1pPr>
+          </a:lstStyle>
+          <a:p>
+            <a:pPr algn="ctr"/>
+            <a:r>
+              <a:rPr lang="ru-RU" sz="4800" dirty="0">
+                <a:solidFill>
+                  <a:schemeClr val="bg1"/>
+                </a:solidFill>
+              </a:rPr>
+              <a:t>Структура программы</a:t>
+            </a:r>
+          </a:p>
+        </p:txBody>
+      </p:sp>
+      <p:sp>
+        <p:nvSpPr>
+          <p:cNvPr id="8" name="Заголовок 4">
+            <a:extLst>
+              <a:ext uri="{FF2B5EF4-FFF2-40B4-BE49-F238E27FC236}">
+                <a16:creationId xmlns:a16="http://schemas.microsoft.com/office/drawing/2014/main" id="{C302C663-4600-B640-F601-07992A726ED0}"/>
+              </a:ext>
+            </a:extLst>
+          </p:cNvPr>
+          <p:cNvSpPr txBox="1">
+            <a:spLocks/>
+          </p:cNvSpPr>
+          <p:nvPr/>
+        </p:nvSpPr>
+        <p:spPr>
+          <a:xfrm>
+            <a:off x="883192" y="1910831"/>
+            <a:ext cx="5981194" cy="2960138"/>
+          </a:xfrm>
+          <a:prstGeom prst="rect">
+            <a:avLst/>
+          </a:prstGeom>
+        </p:spPr>
+        <p:txBody>
+          <a:bodyPr vert="horz" lIns="91440" tIns="45720" rIns="91440" bIns="45720" rtlCol="0" anchor="ctr">
+            <a:noAutofit/>
+          </a:bodyPr>
+          <a:lstStyle>
+            <a:lvl1pPr algn="l" defTabSz="914400" rtl="0" eaLnBrk="1" latinLnBrk="0" hangingPunct="1">
+              <a:lnSpc>
+                <a:spcPct val="90000"/>
+              </a:lnSpc>
+              <a:spcBef>
+                <a:spcPct val="0"/>
+              </a:spcBef>
+              <a:buNone/>
+              <a:defRPr sz="4400" kern="1200">
+                <a:solidFill>
+                  <a:schemeClr val="tx1"/>
+                </a:solidFill>
+                <a:latin typeface="+mj-lt"/>
+                <a:ea typeface="+mj-ea"/>
+                <a:cs typeface="+mj-cs"/>
+              </a:defRPr>
+            </a:lvl1pPr>
+          </a:lstStyle>
+          <a:p>
+            <a:endParaRPr lang="ru-RU" sz="2800" dirty="0">
+              <a:solidFill>
+                <a:schemeClr val="bg1"/>
+              </a:solidFill>
+            </a:endParaRPr>
+          </a:p>
+        </p:txBody>
+      </p:sp>
+      <p:sp>
+        <p:nvSpPr>
+          <p:cNvPr id="10" name="TextBox 9">
+            <a:extLst>
+              <a:ext uri="{FF2B5EF4-FFF2-40B4-BE49-F238E27FC236}">
+                <a16:creationId xmlns:a16="http://schemas.microsoft.com/office/drawing/2014/main" id="{ACBC5EE2-E8A3-B76E-2A0C-30C9E610ED57}"/>
+              </a:ext>
+            </a:extLst>
+          </p:cNvPr>
+          <p:cNvSpPr txBox="1"/>
+          <p:nvPr/>
+        </p:nvSpPr>
+        <p:spPr>
+          <a:xfrm>
+            <a:off x="2859506" y="1374963"/>
+            <a:ext cx="6472988" cy="4031873"/>
+          </a:xfrm>
+          <a:prstGeom prst="rect">
+            <a:avLst/>
+          </a:prstGeom>
+          <a:noFill/>
+        </p:spPr>
+        <p:txBody>
+          <a:bodyPr wrap="square">
+            <a:spAutoFit/>
+          </a:bodyPr>
+          <a:lstStyle/>
+          <a:p>
+            <a:r>
+              <a:rPr lang="ru-RU" sz="3200" dirty="0">
+                <a:solidFill>
+                  <a:schemeClr val="bg1"/>
+                </a:solidFill>
+              </a:rPr>
+              <a:t>Программа реализована по архитектуре MVC:</a:t>
+            </a:r>
+          </a:p>
+          <a:p>
+            <a:pPr>
+              <a:buFont typeface="Arial" panose="020B0604020202020204" pitchFamily="34" charset="0"/>
+              <a:buChar char="•"/>
+            </a:pPr>
+            <a:r>
+              <a:rPr lang="ru-RU" sz="3200" b="1" dirty="0">
+                <a:solidFill>
+                  <a:schemeClr val="bg1"/>
+                </a:solidFill>
+              </a:rPr>
+              <a:t>Model</a:t>
+            </a:r>
+            <a:r>
+              <a:rPr lang="ru-RU" sz="3200" dirty="0">
+                <a:solidFill>
+                  <a:schemeClr val="bg1"/>
+                </a:solidFill>
+              </a:rPr>
+              <a:t> — хранение данных </a:t>
+            </a:r>
+          </a:p>
+          <a:p>
+            <a:pPr>
+              <a:buFont typeface="Arial" panose="020B0604020202020204" pitchFamily="34" charset="0"/>
+              <a:buChar char="•"/>
+            </a:pPr>
+            <a:r>
+              <a:rPr lang="ru-RU" sz="3200" b="1" dirty="0">
+                <a:solidFill>
+                  <a:schemeClr val="bg1"/>
+                </a:solidFill>
+              </a:rPr>
+              <a:t>View</a:t>
+            </a:r>
+            <a:r>
+              <a:rPr lang="ru-RU" sz="3200" dirty="0">
+                <a:solidFill>
+                  <a:schemeClr val="bg1"/>
+                </a:solidFill>
+              </a:rPr>
+              <a:t> — пользовательский интерфейс </a:t>
+            </a:r>
+          </a:p>
+          <a:p>
+            <a:pPr>
+              <a:buFont typeface="Arial" panose="020B0604020202020204" pitchFamily="34" charset="0"/>
+              <a:buChar char="•"/>
+            </a:pPr>
+            <a:r>
+              <a:rPr lang="ru-RU" sz="3200" b="1" dirty="0" err="1">
+                <a:solidFill>
+                  <a:schemeClr val="bg1"/>
+                </a:solidFill>
+              </a:rPr>
+              <a:t>Controller</a:t>
+            </a:r>
+            <a:r>
+              <a:rPr lang="ru-RU" sz="3200" dirty="0">
+                <a:solidFill>
+                  <a:schemeClr val="bg1"/>
+                </a:solidFill>
+              </a:rPr>
+              <a:t> — обработка логики </a:t>
+            </a:r>
+          </a:p>
+          <a:p>
+            <a:r>
+              <a:rPr lang="ru-RU" sz="3200" dirty="0">
+                <a:solidFill>
+                  <a:schemeClr val="bg1"/>
+                </a:solidFill>
+              </a:rPr>
+              <a:t>Алгоритм шифрования вынесен в отдельный модуль.</a:t>
+            </a:r>
+          </a:p>
+        </p:txBody>
+      </p:sp>
+    </p:spTree>
+    <p:extLst>
+      <p:ext uri="{BB962C8B-B14F-4D97-AF65-F5344CB8AC3E}">
+        <p14:creationId xmlns:p14="http://schemas.microsoft.com/office/powerpoint/2010/main" val="1418041473"/>
+      </p:ext>
+    </p:extLst>
+  </p:cSld>
+  <p:clrMapOvr>
+    <a:masterClrMapping/>
+  </p:clrMapOvr>
+</p:sld>
+</file>
+
+<file path=ppt/slides/slide12.xml><?xml version="1.0" encoding="utf-8"?>
+<p:sld xmlns:a="http://schemas.openxmlformats.org/drawingml/2006/main" xmlns:r="http://schemas.openxmlformats.org/officeDocument/2006/relationships" xmlns:p="http://schemas.openxmlformats.org/presentationml/2006/main">
+  <p:cSld>
+    <p:spTree>
+      <p:nvGrpSpPr>
+        <p:cNvPr id="1" name="">
+          <a:extLst>
+            <a:ext uri="{FF2B5EF4-FFF2-40B4-BE49-F238E27FC236}">
+              <a16:creationId xmlns:a16="http://schemas.microsoft.com/office/drawing/2014/main" id="{6B1EA241-3A0B-F48D-DF24-41203B41C8FD}"/>
+            </a:ext>
+          </a:extLst>
+        </p:cNvPr>
+        <p:cNvGrpSpPr/>
+        <p:nvPr/>
+      </p:nvGrpSpPr>
+      <p:grpSpPr>
+        <a:xfrm>
+          <a:off x="0" y="0"/>
+          <a:ext cx="0" cy="0"/>
+          <a:chOff x="0" y="0"/>
+          <a:chExt cx="0" cy="0"/>
+        </a:xfrm>
+      </p:grpSpPr>
+      <p:pic>
+        <p:nvPicPr>
+          <p:cNvPr id="6" name="Объект 5">
+            <a:extLst>
+              <a:ext uri="{FF2B5EF4-FFF2-40B4-BE49-F238E27FC236}">
+                <a16:creationId xmlns:a16="http://schemas.microsoft.com/office/drawing/2014/main" id="{678B5A6C-C803-EEE4-2B91-BA56A4CFAD53}"/>
+              </a:ext>
+            </a:extLst>
+          </p:cNvPr>
+          <p:cNvPicPr>
+            <a:picLocks noGrp="1"/>
+          </p:cNvPicPr>
+          <p:nvPr>
+            <p:ph idx="1"/>
+          </p:nvPr>
+        </p:nvPicPr>
+        <p:blipFill>
+          <a:blip r:embed="rId3">
+            <a:extLst>
+              <a:ext uri="{28A0092B-C50C-407E-A947-70E740481C1C}">
+                <a14:useLocalDpi xmlns:a14="http://schemas.microsoft.com/office/drawing/2010/main" val="0"/>
+              </a:ext>
+            </a:extLst>
+          </a:blip>
+          <a:stretch>
+            <a:fillRect/>
+          </a:stretch>
+        </p:blipFill>
+        <p:spPr>
+          <a:xfrm>
+            <a:off x="0" y="0"/>
+            <a:ext cx="12192000" cy="6934200"/>
+          </a:xfrm>
+        </p:spPr>
+      </p:pic>
+      <p:sp>
+        <p:nvSpPr>
+          <p:cNvPr id="3" name="Заголовок 1">
+            <a:extLst>
+              <a:ext uri="{FF2B5EF4-FFF2-40B4-BE49-F238E27FC236}">
+                <a16:creationId xmlns:a16="http://schemas.microsoft.com/office/drawing/2014/main" id="{6212C54A-A273-C375-0141-AEA49448614B}"/>
+              </a:ext>
+            </a:extLst>
+          </p:cNvPr>
+          <p:cNvSpPr txBox="1">
+            <a:spLocks/>
+          </p:cNvSpPr>
+          <p:nvPr/>
+        </p:nvSpPr>
+        <p:spPr>
+          <a:xfrm>
+            <a:off x="838200" y="469994"/>
+            <a:ext cx="10515600" cy="358775"/>
+          </a:xfrm>
+          <a:prstGeom prst="rect">
+            <a:avLst/>
+          </a:prstGeom>
+        </p:spPr>
+        <p:txBody>
+          <a:bodyPr vert="horz" lIns="91440" tIns="45720" rIns="91440" bIns="45720" rtlCol="0" anchor="ctr">
+            <a:noAutofit/>
+          </a:bodyPr>
+          <a:lstStyle>
+            <a:lvl1pPr algn="l" defTabSz="914400" rtl="0" eaLnBrk="1" latinLnBrk="0" hangingPunct="1">
+              <a:lnSpc>
+                <a:spcPct val="90000"/>
+              </a:lnSpc>
+              <a:spcBef>
+                <a:spcPct val="0"/>
+              </a:spcBef>
+              <a:buNone/>
+              <a:defRPr sz="4400" kern="1200">
+                <a:solidFill>
+                  <a:schemeClr val="tx1"/>
+                </a:solidFill>
+                <a:latin typeface="+mj-lt"/>
+                <a:ea typeface="+mj-ea"/>
+                <a:cs typeface="+mj-cs"/>
+              </a:defRPr>
+            </a:lvl1pPr>
+          </a:lstStyle>
+          <a:p>
+            <a:pPr algn="ctr"/>
+            <a:r>
+              <a:rPr lang="ru-RU" sz="4800" dirty="0">
+                <a:solidFill>
+                  <a:schemeClr val="bg1"/>
+                </a:solidFill>
+              </a:rPr>
+              <a:t>Структура программы</a:t>
+            </a:r>
+          </a:p>
+        </p:txBody>
+      </p:sp>
+      <p:sp>
+        <p:nvSpPr>
+          <p:cNvPr id="8" name="Заголовок 4">
+            <a:extLst>
+              <a:ext uri="{FF2B5EF4-FFF2-40B4-BE49-F238E27FC236}">
+                <a16:creationId xmlns:a16="http://schemas.microsoft.com/office/drawing/2014/main" id="{C302C663-4600-B640-F601-07992A726ED0}"/>
+              </a:ext>
+            </a:extLst>
+          </p:cNvPr>
+          <p:cNvSpPr txBox="1">
+            <a:spLocks/>
+          </p:cNvSpPr>
+          <p:nvPr/>
+        </p:nvSpPr>
+        <p:spPr>
+          <a:xfrm>
+            <a:off x="883192" y="1910831"/>
+            <a:ext cx="5981194" cy="2960138"/>
+          </a:xfrm>
+          <a:prstGeom prst="rect">
+            <a:avLst/>
+          </a:prstGeom>
+        </p:spPr>
+        <p:txBody>
+          <a:bodyPr vert="horz" lIns="91440" tIns="45720" rIns="91440" bIns="45720" rtlCol="0" anchor="ctr">
+            <a:noAutofit/>
+          </a:bodyPr>
+          <a:lstStyle>
+            <a:lvl1pPr algn="l" defTabSz="914400" rtl="0" eaLnBrk="1" latinLnBrk="0" hangingPunct="1">
+              <a:lnSpc>
+                <a:spcPct val="90000"/>
+              </a:lnSpc>
+              <a:spcBef>
+                <a:spcPct val="0"/>
+              </a:spcBef>
+              <a:buNone/>
+              <a:defRPr sz="4400" kern="1200">
+                <a:solidFill>
+                  <a:schemeClr val="tx1"/>
+                </a:solidFill>
+                <a:latin typeface="+mj-lt"/>
+                <a:ea typeface="+mj-ea"/>
+                <a:cs typeface="+mj-cs"/>
+              </a:defRPr>
+            </a:lvl1pPr>
+          </a:lstStyle>
+          <a:p>
+            <a:endParaRPr lang="ru-RU" sz="2800" dirty="0">
+              <a:solidFill>
+                <a:schemeClr val="bg1"/>
+              </a:solidFill>
+            </a:endParaRPr>
+          </a:p>
+        </p:txBody>
+      </p:sp>
+      <p:graphicFrame>
+        <p:nvGraphicFramePr>
+          <p:cNvPr id="2" name="Таблица 1">
+            <a:extLst>
+              <a:ext uri="{FF2B5EF4-FFF2-40B4-BE49-F238E27FC236}">
+                <a16:creationId xmlns:a16="http://schemas.microsoft.com/office/drawing/2014/main" id="{AE772410-A960-54BE-AFDB-729696E03867}"/>
+              </a:ext>
+            </a:extLst>
+          </p:cNvPr>
+          <p:cNvGraphicFramePr>
+            <a:graphicFrameLocks noGrp="1"/>
+          </p:cNvGraphicFramePr>
+          <p:nvPr>
+            <p:extLst>
+              <p:ext uri="{D42A27DB-BD31-4B8C-83A1-F6EECF244321}">
+                <p14:modId xmlns:p14="http://schemas.microsoft.com/office/powerpoint/2010/main" val="1897251301"/>
+              </p:ext>
+            </p:extLst>
+          </p:nvPr>
+        </p:nvGraphicFramePr>
+        <p:xfrm>
+          <a:off x="2032000" y="927923"/>
+          <a:ext cx="2475832" cy="1280160"/>
+        </p:xfrm>
+        <a:graphic>
+          <a:graphicData uri="http://schemas.openxmlformats.org/drawingml/2006/table">
+            <a:tbl>
+              <a:tblPr firstRow="1" bandRow="1">
+                <a:tableStyleId>{5C22544A-7EE6-4342-B048-85BDC9FD1C3A}</a:tableStyleId>
+              </a:tblPr>
+              <a:tblGrid>
+                <a:gridCol w="2475832">
+                  <a:extLst>
+                    <a:ext uri="{9D8B030D-6E8A-4147-A177-3AD203B41FA5}">
+                      <a16:colId xmlns:a16="http://schemas.microsoft.com/office/drawing/2014/main" val="3082848916"/>
+                    </a:ext>
+                  </a:extLst>
+                </a:gridCol>
+              </a:tblGrid>
+              <a:tr h="378249">
+                <a:tc>
+                  <a:txBody>
+                    <a:bodyPr/>
+                    <a:lstStyle/>
+                    <a:p>
+                      <a:r>
+                        <a:rPr lang="en-US" dirty="0"/>
+                        <a:t>Cipher</a:t>
+                      </a:r>
+                      <a:r>
+                        <a:rPr lang="ru-RU" dirty="0"/>
+                        <a:t>(абстрактный класс)</a:t>
+                      </a:r>
+                    </a:p>
+                  </a:txBody>
+                  <a:tcPr/>
+                </a:tc>
+                <a:extLst>
+                  <a:ext uri="{0D108BD9-81ED-4DB2-BD59-A6C34878D82A}">
+                    <a16:rowId xmlns:a16="http://schemas.microsoft.com/office/drawing/2014/main" val="1697048612"/>
+                  </a:ext>
+                </a:extLst>
+              </a:tr>
+              <a:tr h="378249">
+                <a:tc>
+                  <a:txBody>
+                    <a:bodyPr/>
+                    <a:lstStyle/>
+                    <a:p>
+                      <a:r>
+                        <a:rPr lang="en-US" sz="1800" b="0" i="0" kern="1200" dirty="0">
+                          <a:solidFill>
+                            <a:schemeClr val="tx1">
+                              <a:lumMod val="95000"/>
+                              <a:lumOff val="5000"/>
+                            </a:schemeClr>
+                          </a:solidFill>
+                          <a:effectLst/>
+                          <a:latin typeface="+mn-lt"/>
+                          <a:ea typeface="+mn-ea"/>
+                          <a:cs typeface="+mn-cs"/>
+                        </a:rPr>
+                        <a:t>process(text: str, key: str)</a:t>
+                      </a:r>
+                      <a:r>
+                        <a:rPr lang="ru-RU" sz="1800" b="0" i="0" kern="1200" dirty="0">
+                          <a:solidFill>
+                            <a:schemeClr val="tx1">
+                              <a:lumMod val="95000"/>
+                              <a:lumOff val="5000"/>
+                            </a:schemeClr>
+                          </a:solidFill>
+                          <a:effectLst/>
+                          <a:latin typeface="+mn-lt"/>
+                          <a:ea typeface="+mn-ea"/>
+                          <a:cs typeface="+mn-cs"/>
+                        </a:rPr>
+                        <a:t>-</a:t>
+                      </a:r>
+                      <a:r>
+                        <a:rPr lang="en-US" sz="1800" b="0" i="0" kern="1200" dirty="0">
+                          <a:solidFill>
+                            <a:schemeClr val="tx1">
+                              <a:lumMod val="95000"/>
+                              <a:lumOff val="5000"/>
+                            </a:schemeClr>
+                          </a:solidFill>
+                          <a:effectLst/>
+                          <a:latin typeface="+mn-lt"/>
+                          <a:ea typeface="+mn-ea"/>
+                          <a:cs typeface="+mn-cs"/>
+                        </a:rPr>
+                        <a:t>&gt;str</a:t>
+                      </a:r>
+                      <a:endParaRPr lang="ru-RU" dirty="0">
+                        <a:solidFill>
+                          <a:schemeClr val="tx1">
+                            <a:lumMod val="95000"/>
+                            <a:lumOff val="5000"/>
+                          </a:schemeClr>
+                        </a:solidFill>
+                      </a:endParaRPr>
+                    </a:p>
+                  </a:txBody>
+                  <a:tcPr/>
+                </a:tc>
+                <a:extLst>
+                  <a:ext uri="{0D108BD9-81ED-4DB2-BD59-A6C34878D82A}">
+                    <a16:rowId xmlns:a16="http://schemas.microsoft.com/office/drawing/2014/main" val="523633106"/>
+                  </a:ext>
+                </a:extLst>
+              </a:tr>
+            </a:tbl>
+          </a:graphicData>
+        </a:graphic>
+      </p:graphicFrame>
+      <p:graphicFrame>
+        <p:nvGraphicFramePr>
+          <p:cNvPr id="4" name="Таблица 3">
+            <a:extLst>
+              <a:ext uri="{FF2B5EF4-FFF2-40B4-BE49-F238E27FC236}">
+                <a16:creationId xmlns:a16="http://schemas.microsoft.com/office/drawing/2014/main" id="{DD6553EA-42F7-5E1E-5A8C-170C1F3822B6}"/>
+              </a:ext>
+            </a:extLst>
+          </p:cNvPr>
+          <p:cNvGraphicFramePr>
+            <a:graphicFrameLocks noGrp="1"/>
+          </p:cNvGraphicFramePr>
+          <p:nvPr>
+            <p:extLst>
+              <p:ext uri="{D42A27DB-BD31-4B8C-83A1-F6EECF244321}">
+                <p14:modId xmlns:p14="http://schemas.microsoft.com/office/powerpoint/2010/main" val="2004377738"/>
+              </p:ext>
+            </p:extLst>
+          </p:nvPr>
+        </p:nvGraphicFramePr>
+        <p:xfrm>
+          <a:off x="5271746" y="1058838"/>
+          <a:ext cx="2475832" cy="1018329"/>
+        </p:xfrm>
+        <a:graphic>
+          <a:graphicData uri="http://schemas.openxmlformats.org/drawingml/2006/table">
+            <a:tbl>
+              <a:tblPr firstRow="1" bandRow="1">
+                <a:tableStyleId>{21E4AEA4-8DFA-4A89-87EB-49C32662AFE0}</a:tableStyleId>
+              </a:tblPr>
+              <a:tblGrid>
+                <a:gridCol w="2475832">
+                  <a:extLst>
+                    <a:ext uri="{9D8B030D-6E8A-4147-A177-3AD203B41FA5}">
+                      <a16:colId xmlns:a16="http://schemas.microsoft.com/office/drawing/2014/main" val="3082848916"/>
+                    </a:ext>
+                  </a:extLst>
+                </a:gridCol>
+              </a:tblGrid>
+              <a:tr h="378249">
+                <a:tc>
+                  <a:txBody>
+                    <a:bodyPr/>
+                    <a:lstStyle/>
+                    <a:p>
+                      <a:r>
+                        <a:rPr lang="en-US" sz="1800" b="0" i="0" kern="1200" dirty="0" err="1">
+                          <a:solidFill>
+                            <a:schemeClr val="lt1"/>
+                          </a:solidFill>
+                          <a:effectLst/>
+                          <a:latin typeface="+mn-lt"/>
+                          <a:ea typeface="+mn-ea"/>
+                          <a:cs typeface="+mn-cs"/>
+                        </a:rPr>
+                        <a:t>VernamCipher</a:t>
+                      </a:r>
+                      <a:r>
+                        <a:rPr lang="en-US" sz="1800" b="0" i="0" kern="1200" dirty="0">
+                          <a:solidFill>
+                            <a:schemeClr val="lt1"/>
+                          </a:solidFill>
+                          <a:effectLst/>
+                          <a:latin typeface="+mn-lt"/>
+                          <a:ea typeface="+mn-ea"/>
+                          <a:cs typeface="+mn-cs"/>
+                        </a:rPr>
+                        <a:t>(</a:t>
+                      </a:r>
+                      <a:r>
+                        <a:rPr lang="ru-RU" sz="1800" b="0" i="0" kern="1200" dirty="0">
+                          <a:solidFill>
+                            <a:schemeClr val="lt1"/>
+                          </a:solidFill>
+                          <a:effectLst/>
+                          <a:latin typeface="+mn-lt"/>
+                          <a:ea typeface="+mn-ea"/>
+                          <a:cs typeface="+mn-cs"/>
+                        </a:rPr>
+                        <a:t>класс наследник</a:t>
+                      </a:r>
+                      <a:r>
+                        <a:rPr lang="en-US" sz="1800" b="0" i="0" kern="1200" dirty="0">
+                          <a:solidFill>
+                            <a:schemeClr val="lt1"/>
+                          </a:solidFill>
+                          <a:effectLst/>
+                          <a:latin typeface="+mn-lt"/>
+                          <a:ea typeface="+mn-ea"/>
+                          <a:cs typeface="+mn-cs"/>
+                        </a:rPr>
+                        <a:t>)</a:t>
+                      </a:r>
+                      <a:endParaRPr lang="ru-RU" dirty="0"/>
+                    </a:p>
+                  </a:txBody>
+                  <a:tcPr/>
+                </a:tc>
+                <a:extLst>
+                  <a:ext uri="{0D108BD9-81ED-4DB2-BD59-A6C34878D82A}">
+                    <a16:rowId xmlns:a16="http://schemas.microsoft.com/office/drawing/2014/main" val="1697048612"/>
+                  </a:ext>
+                </a:extLst>
+              </a:tr>
+              <a:tr h="378249">
+                <a:tc>
+                  <a:txBody>
+                    <a:bodyPr/>
+                    <a:lstStyle/>
+                    <a:p>
+                      <a:r>
+                        <a:rPr lang="en-US" sz="1800" b="0" i="0" kern="1200" dirty="0">
+                          <a:solidFill>
+                            <a:schemeClr val="dk1"/>
+                          </a:solidFill>
+                          <a:effectLst/>
+                          <a:latin typeface="+mn-lt"/>
+                          <a:ea typeface="+mn-ea"/>
+                          <a:cs typeface="+mn-cs"/>
+                        </a:rPr>
+                        <a:t>process(text, key)</a:t>
+                      </a:r>
+                      <a:endParaRPr lang="ru-RU" dirty="0"/>
+                    </a:p>
+                  </a:txBody>
+                  <a:tcPr/>
+                </a:tc>
+                <a:extLst>
+                  <a:ext uri="{0D108BD9-81ED-4DB2-BD59-A6C34878D82A}">
+                    <a16:rowId xmlns:a16="http://schemas.microsoft.com/office/drawing/2014/main" val="523633106"/>
+                  </a:ext>
+                </a:extLst>
+              </a:tr>
+            </a:tbl>
+          </a:graphicData>
+        </a:graphic>
+      </p:graphicFrame>
+      <p:cxnSp>
+        <p:nvCxnSpPr>
+          <p:cNvPr id="7" name="Прямая со стрелкой 6">
+            <a:extLst>
+              <a:ext uri="{FF2B5EF4-FFF2-40B4-BE49-F238E27FC236}">
+                <a16:creationId xmlns:a16="http://schemas.microsoft.com/office/drawing/2014/main" id="{DF55FF0D-84E7-F3A5-761A-79638AC5E022}"/>
+              </a:ext>
+            </a:extLst>
+          </p:cNvPr>
+          <p:cNvCxnSpPr>
+            <a:cxnSpLocks/>
+            <a:stCxn id="2" idx="3"/>
+            <a:endCxn id="4" idx="1"/>
+          </p:cNvCxnSpPr>
+          <p:nvPr/>
+        </p:nvCxnSpPr>
+        <p:spPr>
+          <a:xfrm flipV="1">
+            <a:off x="4507832" y="1568002"/>
+            <a:ext cx="763914" cy="1"/>
+          </a:xfrm>
+          <a:prstGeom prst="straightConnector1">
+            <a:avLst/>
+          </a:prstGeom>
+          <a:ln w="57150">
+            <a:tailEnd type="triangle"/>
+          </a:ln>
+        </p:spPr>
+        <p:style>
+          <a:lnRef idx="1">
+            <a:schemeClr val="accent1"/>
+          </a:lnRef>
+          <a:fillRef idx="0">
+            <a:schemeClr val="accent1"/>
+          </a:fillRef>
+          <a:effectRef idx="0">
+            <a:schemeClr val="accent1"/>
+          </a:effectRef>
+          <a:fontRef idx="minor">
+            <a:schemeClr val="tx1"/>
+          </a:fontRef>
+        </p:style>
+      </p:cxnSp>
+      <p:graphicFrame>
+        <p:nvGraphicFramePr>
+          <p:cNvPr id="13" name="Таблица 12">
+            <a:extLst>
+              <a:ext uri="{FF2B5EF4-FFF2-40B4-BE49-F238E27FC236}">
+                <a16:creationId xmlns:a16="http://schemas.microsoft.com/office/drawing/2014/main" id="{0C5EF2F8-5430-B7A9-3709-0865161F7289}"/>
+              </a:ext>
+            </a:extLst>
+          </p:cNvPr>
+          <p:cNvGraphicFramePr>
+            <a:graphicFrameLocks noGrp="1"/>
+          </p:cNvGraphicFramePr>
+          <p:nvPr>
+            <p:extLst>
+              <p:ext uri="{D42A27DB-BD31-4B8C-83A1-F6EECF244321}">
+                <p14:modId xmlns:p14="http://schemas.microsoft.com/office/powerpoint/2010/main" val="1976503812"/>
+              </p:ext>
+            </p:extLst>
+          </p:nvPr>
+        </p:nvGraphicFramePr>
+        <p:xfrm>
+          <a:off x="2032000" y="2780981"/>
+          <a:ext cx="2475832" cy="1149244"/>
+        </p:xfrm>
+        <a:graphic>
+          <a:graphicData uri="http://schemas.openxmlformats.org/drawingml/2006/table">
+            <a:tbl>
+              <a:tblPr firstRow="1" bandRow="1">
+                <a:tableStyleId>{5C22544A-7EE6-4342-B048-85BDC9FD1C3A}</a:tableStyleId>
+              </a:tblPr>
+              <a:tblGrid>
+                <a:gridCol w="2475832">
+                  <a:extLst>
+                    <a:ext uri="{9D8B030D-6E8A-4147-A177-3AD203B41FA5}">
+                      <a16:colId xmlns:a16="http://schemas.microsoft.com/office/drawing/2014/main" val="2176576737"/>
+                    </a:ext>
+                  </a:extLst>
+                </a:gridCol>
+              </a:tblGrid>
+              <a:tr h="509164">
+                <a:tc>
+                  <a:txBody>
+                    <a:bodyPr/>
+                    <a:lstStyle/>
+                    <a:p>
+                      <a:endParaRPr lang="ru-RU" dirty="0"/>
+                    </a:p>
+                  </a:txBody>
+                  <a:tcPr/>
+                </a:tc>
+                <a:extLst>
+                  <a:ext uri="{0D108BD9-81ED-4DB2-BD59-A6C34878D82A}">
+                    <a16:rowId xmlns:a16="http://schemas.microsoft.com/office/drawing/2014/main" val="1604015232"/>
+                  </a:ext>
+                </a:extLst>
+              </a:tr>
+              <a:tr h="509164">
+                <a:tc>
+                  <a:txBody>
+                    <a:bodyPr/>
+                    <a:lstStyle/>
+                    <a:p>
+                      <a:r>
+                        <a:rPr lang="en-US" sz="1800" b="0" i="0" kern="1200" dirty="0" err="1">
+                          <a:solidFill>
+                            <a:schemeClr val="dk1"/>
+                          </a:solidFill>
+                          <a:effectLst/>
+                          <a:latin typeface="+mn-lt"/>
+                          <a:ea typeface="+mn-ea"/>
+                          <a:cs typeface="+mn-cs"/>
+                        </a:rPr>
+                        <a:t>set_text</a:t>
+                      </a:r>
+                      <a:r>
+                        <a:rPr lang="en-US" sz="1800" b="0" i="0" kern="1200" dirty="0">
+                          <a:solidFill>
+                            <a:schemeClr val="dk1"/>
+                          </a:solidFill>
+                          <a:effectLst/>
+                          <a:latin typeface="+mn-lt"/>
+                          <a:ea typeface="+mn-ea"/>
+                          <a:cs typeface="+mn-cs"/>
+                        </a:rPr>
+                        <a:t>(text: str)</a:t>
+                      </a:r>
+                      <a:br>
+                        <a:rPr lang="ru-RU" dirty="0"/>
+                      </a:br>
+                      <a:r>
+                        <a:rPr lang="en-US" sz="1800" b="0" i="0" kern="1200" dirty="0" err="1">
+                          <a:solidFill>
+                            <a:schemeClr val="dk1"/>
+                          </a:solidFill>
+                          <a:effectLst/>
+                          <a:latin typeface="+mn-lt"/>
+                          <a:ea typeface="+mn-ea"/>
+                          <a:cs typeface="+mn-cs"/>
+                        </a:rPr>
+                        <a:t>get_text</a:t>
+                      </a:r>
+                      <a:r>
+                        <a:rPr lang="en-US" sz="1800" b="0" i="0" kern="1200" dirty="0">
+                          <a:solidFill>
+                            <a:schemeClr val="dk1"/>
+                          </a:solidFill>
+                          <a:effectLst/>
+                          <a:latin typeface="+mn-lt"/>
+                          <a:ea typeface="+mn-ea"/>
+                          <a:cs typeface="+mn-cs"/>
+                        </a:rPr>
+                        <a:t>() -&gt; str</a:t>
+                      </a:r>
+                      <a:endParaRPr lang="ru-RU" dirty="0">
+                        <a:solidFill>
+                          <a:schemeClr val="bg1"/>
+                        </a:solidFill>
+                      </a:endParaRPr>
+                    </a:p>
+                  </a:txBody>
+                  <a:tcPr/>
+                </a:tc>
+                <a:extLst>
+                  <a:ext uri="{0D108BD9-81ED-4DB2-BD59-A6C34878D82A}">
+                    <a16:rowId xmlns:a16="http://schemas.microsoft.com/office/drawing/2014/main" val="4206840605"/>
+                  </a:ext>
+                </a:extLst>
+              </a:tr>
+            </a:tbl>
+          </a:graphicData>
+        </a:graphic>
+      </p:graphicFrame>
+      <p:graphicFrame>
+        <p:nvGraphicFramePr>
+          <p:cNvPr id="14" name="Таблица 13">
+            <a:extLst>
+              <a:ext uri="{FF2B5EF4-FFF2-40B4-BE49-F238E27FC236}">
+                <a16:creationId xmlns:a16="http://schemas.microsoft.com/office/drawing/2014/main" id="{34D543CF-4823-0901-FA7F-5D1EDAF9BC27}"/>
+              </a:ext>
+            </a:extLst>
+          </p:cNvPr>
+          <p:cNvGraphicFramePr>
+            <a:graphicFrameLocks noGrp="1"/>
+          </p:cNvGraphicFramePr>
+          <p:nvPr>
+            <p:extLst>
+              <p:ext uri="{D42A27DB-BD31-4B8C-83A1-F6EECF244321}">
+                <p14:modId xmlns:p14="http://schemas.microsoft.com/office/powerpoint/2010/main" val="1763512986"/>
+              </p:ext>
+            </p:extLst>
+          </p:nvPr>
+        </p:nvGraphicFramePr>
+        <p:xfrm>
+          <a:off x="2032000" y="2502848"/>
+          <a:ext cx="2475832" cy="756498"/>
+        </p:xfrm>
+        <a:graphic>
+          <a:graphicData uri="http://schemas.openxmlformats.org/drawingml/2006/table">
+            <a:tbl>
+              <a:tblPr firstRow="1" bandRow="1">
+                <a:tableStyleId>{21E4AEA4-8DFA-4A89-87EB-49C32662AFE0}</a:tableStyleId>
+              </a:tblPr>
+              <a:tblGrid>
+                <a:gridCol w="2475832">
+                  <a:extLst>
+                    <a:ext uri="{9D8B030D-6E8A-4147-A177-3AD203B41FA5}">
+                      <a16:colId xmlns:a16="http://schemas.microsoft.com/office/drawing/2014/main" val="3082848916"/>
+                    </a:ext>
+                  </a:extLst>
+                </a:gridCol>
+              </a:tblGrid>
+              <a:tr h="378249">
+                <a:tc>
+                  <a:txBody>
+                    <a:bodyPr/>
+                    <a:lstStyle/>
+                    <a:p>
+                      <a:r>
+                        <a:rPr lang="en-US" sz="1800" b="0" i="0" kern="1200" dirty="0" err="1">
+                          <a:solidFill>
+                            <a:schemeClr val="lt1"/>
+                          </a:solidFill>
+                          <a:effectLst/>
+                          <a:latin typeface="+mn-lt"/>
+                          <a:ea typeface="+mn-ea"/>
+                          <a:cs typeface="+mn-cs"/>
+                        </a:rPr>
+                        <a:t>TextModel</a:t>
+                      </a:r>
+                      <a:endParaRPr lang="ru-RU" dirty="0"/>
+                    </a:p>
+                  </a:txBody>
+                  <a:tcPr/>
+                </a:tc>
+                <a:extLst>
+                  <a:ext uri="{0D108BD9-81ED-4DB2-BD59-A6C34878D82A}">
+                    <a16:rowId xmlns:a16="http://schemas.microsoft.com/office/drawing/2014/main" val="1697048612"/>
+                  </a:ext>
+                </a:extLst>
+              </a:tr>
+              <a:tr h="378249">
+                <a:tc>
+                  <a:txBody>
+                    <a:bodyPr/>
+                    <a:lstStyle/>
+                    <a:p>
+                      <a:r>
+                        <a:rPr lang="en-US" sz="1800" b="0" i="0" kern="1200" dirty="0">
+                          <a:solidFill>
+                            <a:schemeClr val="bg1"/>
+                          </a:solidFill>
+                          <a:effectLst/>
+                          <a:latin typeface="+mn-lt"/>
+                          <a:ea typeface="+mn-ea"/>
+                          <a:cs typeface="+mn-cs"/>
+                        </a:rPr>
+                        <a:t>_text: str</a:t>
+                      </a:r>
+                      <a:endParaRPr lang="ru-RU" dirty="0">
+                        <a:solidFill>
+                          <a:schemeClr val="bg1"/>
+                        </a:solidFill>
+                      </a:endParaRPr>
+                    </a:p>
+                  </a:txBody>
+                  <a:tcPr/>
+                </a:tc>
+                <a:extLst>
+                  <a:ext uri="{0D108BD9-81ED-4DB2-BD59-A6C34878D82A}">
+                    <a16:rowId xmlns:a16="http://schemas.microsoft.com/office/drawing/2014/main" val="523633106"/>
+                  </a:ext>
+                </a:extLst>
+              </a:tr>
+            </a:tbl>
+          </a:graphicData>
+        </a:graphic>
+      </p:graphicFrame>
+      <p:cxnSp>
+        <p:nvCxnSpPr>
+          <p:cNvPr id="15" name="Прямая со стрелкой 14">
+            <a:extLst>
+              <a:ext uri="{FF2B5EF4-FFF2-40B4-BE49-F238E27FC236}">
+                <a16:creationId xmlns:a16="http://schemas.microsoft.com/office/drawing/2014/main" id="{6DF0F27D-3720-C650-CCA0-C9DFE9252EE5}"/>
+              </a:ext>
+            </a:extLst>
+          </p:cNvPr>
+          <p:cNvCxnSpPr>
+            <a:cxnSpLocks/>
+          </p:cNvCxnSpPr>
+          <p:nvPr/>
+        </p:nvCxnSpPr>
+        <p:spPr>
+          <a:xfrm flipV="1">
+            <a:off x="4507832" y="3257284"/>
+            <a:ext cx="763914" cy="1"/>
+          </a:xfrm>
+          <a:prstGeom prst="straightConnector1">
+            <a:avLst/>
+          </a:prstGeom>
+          <a:ln w="57150">
+            <a:tailEnd type="triangle"/>
+          </a:ln>
+        </p:spPr>
+        <p:style>
+          <a:lnRef idx="1">
+            <a:schemeClr val="accent1"/>
+          </a:lnRef>
+          <a:fillRef idx="0">
+            <a:schemeClr val="accent1"/>
+          </a:fillRef>
+          <a:effectRef idx="0">
+            <a:schemeClr val="accent1"/>
+          </a:effectRef>
+          <a:fontRef idx="minor">
+            <a:schemeClr val="tx1"/>
+          </a:fontRef>
+        </p:style>
+      </p:cxnSp>
+      <p:graphicFrame>
+        <p:nvGraphicFramePr>
+          <p:cNvPr id="16" name="Таблица 15">
+            <a:extLst>
+              <a:ext uri="{FF2B5EF4-FFF2-40B4-BE49-F238E27FC236}">
+                <a16:creationId xmlns:a16="http://schemas.microsoft.com/office/drawing/2014/main" id="{50AAE223-D8E6-4D6F-F619-D3E0F840AD96}"/>
+              </a:ext>
+            </a:extLst>
+          </p:cNvPr>
+          <p:cNvGraphicFramePr>
+            <a:graphicFrameLocks noGrp="1"/>
+          </p:cNvGraphicFramePr>
+          <p:nvPr>
+            <p:extLst>
+              <p:ext uri="{D42A27DB-BD31-4B8C-83A1-F6EECF244321}">
+                <p14:modId xmlns:p14="http://schemas.microsoft.com/office/powerpoint/2010/main" val="2663386434"/>
+              </p:ext>
+            </p:extLst>
+          </p:nvPr>
+        </p:nvGraphicFramePr>
+        <p:xfrm>
+          <a:off x="5271746" y="3033392"/>
+          <a:ext cx="2475832" cy="1018328"/>
+        </p:xfrm>
+        <a:graphic>
+          <a:graphicData uri="http://schemas.openxmlformats.org/drawingml/2006/table">
+            <a:tbl>
+              <a:tblPr firstRow="1" bandRow="1">
+                <a:tableStyleId>{5C22544A-7EE6-4342-B048-85BDC9FD1C3A}</a:tableStyleId>
+              </a:tblPr>
+              <a:tblGrid>
+                <a:gridCol w="2475832">
+                  <a:extLst>
+                    <a:ext uri="{9D8B030D-6E8A-4147-A177-3AD203B41FA5}">
+                      <a16:colId xmlns:a16="http://schemas.microsoft.com/office/drawing/2014/main" val="2176576737"/>
+                    </a:ext>
+                  </a:extLst>
+                </a:gridCol>
+              </a:tblGrid>
+              <a:tr h="509164">
+                <a:tc>
+                  <a:txBody>
+                    <a:bodyPr/>
+                    <a:lstStyle/>
+                    <a:p>
+                      <a:endParaRPr lang="ru-RU" dirty="0"/>
+                    </a:p>
+                  </a:txBody>
+                  <a:tcPr/>
+                </a:tc>
+                <a:extLst>
+                  <a:ext uri="{0D108BD9-81ED-4DB2-BD59-A6C34878D82A}">
+                    <a16:rowId xmlns:a16="http://schemas.microsoft.com/office/drawing/2014/main" val="1604015232"/>
+                  </a:ext>
+                </a:extLst>
+              </a:tr>
+              <a:tr h="509164">
+                <a:tc>
+                  <a:txBody>
+                    <a:bodyPr/>
+                    <a:lstStyle/>
+                    <a:p>
+                      <a:r>
+                        <a:rPr lang="en-US" sz="1800" b="0" i="0" kern="1200" dirty="0">
+                          <a:solidFill>
+                            <a:schemeClr val="dk1"/>
+                          </a:solidFill>
+                          <a:effectLst/>
+                          <a:latin typeface="+mn-lt"/>
+                          <a:ea typeface="+mn-ea"/>
+                          <a:cs typeface="+mn-cs"/>
+                        </a:rPr>
+                        <a:t>encrypt(key: str) -&gt; str </a:t>
+                      </a:r>
+                      <a:endParaRPr lang="ru-RU" dirty="0">
+                        <a:solidFill>
+                          <a:schemeClr val="bg1"/>
+                        </a:solidFill>
+                      </a:endParaRPr>
+                    </a:p>
+                  </a:txBody>
+                  <a:tcPr/>
+                </a:tc>
+                <a:extLst>
+                  <a:ext uri="{0D108BD9-81ED-4DB2-BD59-A6C34878D82A}">
+                    <a16:rowId xmlns:a16="http://schemas.microsoft.com/office/drawing/2014/main" val="4206840605"/>
+                  </a:ext>
+                </a:extLst>
+              </a:tr>
+            </a:tbl>
+          </a:graphicData>
+        </a:graphic>
+      </p:graphicFrame>
+      <p:graphicFrame>
+        <p:nvGraphicFramePr>
+          <p:cNvPr id="17" name="Таблица 16">
+            <a:extLst>
+              <a:ext uri="{FF2B5EF4-FFF2-40B4-BE49-F238E27FC236}">
+                <a16:creationId xmlns:a16="http://schemas.microsoft.com/office/drawing/2014/main" id="{06AF8AAD-7821-E13E-956F-6AD682140683}"/>
+              </a:ext>
+            </a:extLst>
+          </p:cNvPr>
+          <p:cNvGraphicFramePr>
+            <a:graphicFrameLocks noGrp="1"/>
+          </p:cNvGraphicFramePr>
+          <p:nvPr>
+            <p:extLst>
+              <p:ext uri="{D42A27DB-BD31-4B8C-83A1-F6EECF244321}">
+                <p14:modId xmlns:p14="http://schemas.microsoft.com/office/powerpoint/2010/main" val="760336020"/>
+              </p:ext>
+            </p:extLst>
+          </p:nvPr>
+        </p:nvGraphicFramePr>
+        <p:xfrm>
+          <a:off x="5271746" y="2524228"/>
+          <a:ext cx="2475832" cy="1018329"/>
+        </p:xfrm>
+        <a:graphic>
+          <a:graphicData uri="http://schemas.openxmlformats.org/drawingml/2006/table">
+            <a:tbl>
+              <a:tblPr firstRow="1" bandRow="1">
+                <a:tableStyleId>{21E4AEA4-8DFA-4A89-87EB-49C32662AFE0}</a:tableStyleId>
+              </a:tblPr>
+              <a:tblGrid>
+                <a:gridCol w="2475832">
+                  <a:extLst>
+                    <a:ext uri="{9D8B030D-6E8A-4147-A177-3AD203B41FA5}">
+                      <a16:colId xmlns:a16="http://schemas.microsoft.com/office/drawing/2014/main" val="3082848916"/>
+                    </a:ext>
+                  </a:extLst>
+                </a:gridCol>
+              </a:tblGrid>
+              <a:tr h="378249">
+                <a:tc>
+                  <a:txBody>
+                    <a:bodyPr/>
+                    <a:lstStyle/>
+                    <a:p>
+                      <a:r>
+                        <a:rPr lang="en-US" dirty="0" err="1"/>
+                        <a:t>CipherController</a:t>
+                      </a:r>
+                      <a:endParaRPr lang="ru-RU" dirty="0"/>
+                    </a:p>
+                  </a:txBody>
+                  <a:tcPr/>
+                </a:tc>
+                <a:extLst>
+                  <a:ext uri="{0D108BD9-81ED-4DB2-BD59-A6C34878D82A}">
+                    <a16:rowId xmlns:a16="http://schemas.microsoft.com/office/drawing/2014/main" val="1697048612"/>
+                  </a:ext>
+                </a:extLst>
+              </a:tr>
+              <a:tr h="378249">
+                <a:tc>
+                  <a:txBody>
+                    <a:bodyPr/>
+                    <a:lstStyle/>
+                    <a:p>
+                      <a:r>
+                        <a:rPr lang="en-US" sz="1800" b="0" i="0" kern="1200" dirty="0">
+                          <a:solidFill>
+                            <a:schemeClr val="bg1"/>
+                          </a:solidFill>
+                          <a:effectLst/>
+                          <a:latin typeface="+mn-lt"/>
+                          <a:ea typeface="+mn-ea"/>
+                          <a:cs typeface="+mn-cs"/>
+                        </a:rPr>
+                        <a:t>_cipher: Cipher</a:t>
+                      </a:r>
+                      <a:br>
+                        <a:rPr lang="ru-RU" dirty="0">
+                          <a:solidFill>
+                            <a:schemeClr val="bg1"/>
+                          </a:solidFill>
+                        </a:rPr>
+                      </a:br>
+                      <a:r>
+                        <a:rPr lang="ru-RU" sz="1800" b="0" i="0" kern="1200" dirty="0">
+                          <a:solidFill>
+                            <a:schemeClr val="bg1"/>
+                          </a:solidFill>
+                          <a:effectLst/>
+                          <a:latin typeface="+mn-lt"/>
+                          <a:ea typeface="+mn-ea"/>
+                          <a:cs typeface="+mn-cs"/>
+                        </a:rPr>
+                        <a:t>_</a:t>
+                      </a:r>
+                      <a:r>
+                        <a:rPr lang="en-US" sz="1800" b="0" i="0" kern="1200" dirty="0">
+                          <a:solidFill>
+                            <a:schemeClr val="bg1"/>
+                          </a:solidFill>
+                          <a:effectLst/>
+                          <a:latin typeface="+mn-lt"/>
+                          <a:ea typeface="+mn-ea"/>
+                          <a:cs typeface="+mn-cs"/>
+                        </a:rPr>
+                        <a:t>model: </a:t>
+                      </a:r>
+                      <a:r>
+                        <a:rPr lang="en-US" sz="1800" b="0" i="0" kern="1200" dirty="0" err="1">
+                          <a:solidFill>
+                            <a:schemeClr val="bg1"/>
+                          </a:solidFill>
+                          <a:effectLst/>
+                          <a:latin typeface="+mn-lt"/>
+                          <a:ea typeface="+mn-ea"/>
+                          <a:cs typeface="+mn-cs"/>
+                        </a:rPr>
+                        <a:t>TextModel</a:t>
+                      </a:r>
+                      <a:endParaRPr lang="ru-RU" dirty="0">
+                        <a:solidFill>
+                          <a:schemeClr val="bg1"/>
+                        </a:solidFill>
+                      </a:endParaRPr>
+                    </a:p>
+                  </a:txBody>
+                  <a:tcPr/>
+                </a:tc>
+                <a:extLst>
+                  <a:ext uri="{0D108BD9-81ED-4DB2-BD59-A6C34878D82A}">
+                    <a16:rowId xmlns:a16="http://schemas.microsoft.com/office/drawing/2014/main" val="523633106"/>
+                  </a:ext>
+                </a:extLst>
+              </a:tr>
+            </a:tbl>
+          </a:graphicData>
+        </a:graphic>
+      </p:graphicFrame>
+      <p:graphicFrame>
+        <p:nvGraphicFramePr>
+          <p:cNvPr id="18" name="Таблица 17">
+            <a:extLst>
+              <a:ext uri="{FF2B5EF4-FFF2-40B4-BE49-F238E27FC236}">
+                <a16:creationId xmlns:a16="http://schemas.microsoft.com/office/drawing/2014/main" id="{AD80B560-DB85-5B38-9C9A-C3152B4F0181}"/>
+              </a:ext>
+            </a:extLst>
+          </p:cNvPr>
+          <p:cNvGraphicFramePr>
+            <a:graphicFrameLocks noGrp="1"/>
+          </p:cNvGraphicFramePr>
+          <p:nvPr>
+            <p:extLst>
+              <p:ext uri="{D42A27DB-BD31-4B8C-83A1-F6EECF244321}">
+                <p14:modId xmlns:p14="http://schemas.microsoft.com/office/powerpoint/2010/main" val="174791311"/>
+              </p:ext>
+            </p:extLst>
+          </p:nvPr>
+        </p:nvGraphicFramePr>
+        <p:xfrm>
+          <a:off x="8740173" y="3042889"/>
+          <a:ext cx="2475832" cy="1018328"/>
+        </p:xfrm>
+        <a:graphic>
+          <a:graphicData uri="http://schemas.openxmlformats.org/drawingml/2006/table">
+            <a:tbl>
+              <a:tblPr firstRow="1" bandRow="1">
+                <a:tableStyleId>{5C22544A-7EE6-4342-B048-85BDC9FD1C3A}</a:tableStyleId>
+              </a:tblPr>
+              <a:tblGrid>
+                <a:gridCol w="2475832">
+                  <a:extLst>
+                    <a:ext uri="{9D8B030D-6E8A-4147-A177-3AD203B41FA5}">
+                      <a16:colId xmlns:a16="http://schemas.microsoft.com/office/drawing/2014/main" val="2176576737"/>
+                    </a:ext>
+                  </a:extLst>
+                </a:gridCol>
+              </a:tblGrid>
+              <a:tr h="509164">
+                <a:tc>
+                  <a:txBody>
+                    <a:bodyPr/>
+                    <a:lstStyle/>
+                    <a:p>
+                      <a:endParaRPr lang="ru-RU" dirty="0"/>
+                    </a:p>
+                  </a:txBody>
+                  <a:tcPr/>
+                </a:tc>
+                <a:extLst>
+                  <a:ext uri="{0D108BD9-81ED-4DB2-BD59-A6C34878D82A}">
+                    <a16:rowId xmlns:a16="http://schemas.microsoft.com/office/drawing/2014/main" val="1604015232"/>
+                  </a:ext>
+                </a:extLst>
+              </a:tr>
+              <a:tr h="509164">
+                <a:tc>
+                  <a:txBody>
+                    <a:bodyPr/>
+                    <a:lstStyle/>
+                    <a:p>
+                      <a:r>
+                        <a:rPr lang="en-US" sz="1800" b="0" i="0" kern="1200" dirty="0" err="1">
+                          <a:solidFill>
+                            <a:schemeClr val="dk1"/>
+                          </a:solidFill>
+                          <a:effectLst/>
+                          <a:latin typeface="+mn-lt"/>
+                          <a:ea typeface="+mn-ea"/>
+                          <a:cs typeface="+mn-cs"/>
+                        </a:rPr>
+                        <a:t>generate_random</a:t>
+                      </a:r>
+                      <a:r>
+                        <a:rPr lang="en-US" sz="1800" b="0" i="0" kern="1200" dirty="0">
+                          <a:solidFill>
+                            <a:schemeClr val="dk1"/>
+                          </a:solidFill>
+                          <a:effectLst/>
+                          <a:latin typeface="+mn-lt"/>
+                          <a:ea typeface="+mn-ea"/>
+                          <a:cs typeface="+mn-cs"/>
+                        </a:rPr>
+                        <a:t>()</a:t>
+                      </a:r>
+                      <a:endParaRPr lang="ru-RU" dirty="0">
+                        <a:solidFill>
+                          <a:schemeClr val="bg1"/>
+                        </a:solidFill>
+                      </a:endParaRPr>
+                    </a:p>
+                  </a:txBody>
+                  <a:tcPr/>
+                </a:tc>
+                <a:extLst>
+                  <a:ext uri="{0D108BD9-81ED-4DB2-BD59-A6C34878D82A}">
+                    <a16:rowId xmlns:a16="http://schemas.microsoft.com/office/drawing/2014/main" val="4206840605"/>
+                  </a:ext>
+                </a:extLst>
+              </a:tr>
+            </a:tbl>
+          </a:graphicData>
+        </a:graphic>
+      </p:graphicFrame>
+      <p:graphicFrame>
+        <p:nvGraphicFramePr>
+          <p:cNvPr id="19" name="Таблица 18">
+            <a:extLst>
+              <a:ext uri="{FF2B5EF4-FFF2-40B4-BE49-F238E27FC236}">
+                <a16:creationId xmlns:a16="http://schemas.microsoft.com/office/drawing/2014/main" id="{703B4481-C3C4-7E18-1437-B1FB0FAB6451}"/>
+              </a:ext>
+            </a:extLst>
+          </p:cNvPr>
+          <p:cNvGraphicFramePr>
+            <a:graphicFrameLocks noGrp="1"/>
+          </p:cNvGraphicFramePr>
+          <p:nvPr>
+            <p:extLst>
+              <p:ext uri="{D42A27DB-BD31-4B8C-83A1-F6EECF244321}">
+                <p14:modId xmlns:p14="http://schemas.microsoft.com/office/powerpoint/2010/main" val="2056447407"/>
+              </p:ext>
+            </p:extLst>
+          </p:nvPr>
+        </p:nvGraphicFramePr>
+        <p:xfrm>
+          <a:off x="8740173" y="2533725"/>
+          <a:ext cx="2475832" cy="1018329"/>
+        </p:xfrm>
+        <a:graphic>
+          <a:graphicData uri="http://schemas.openxmlformats.org/drawingml/2006/table">
+            <a:tbl>
+              <a:tblPr firstRow="1" bandRow="1">
+                <a:tableStyleId>{21E4AEA4-8DFA-4A89-87EB-49C32662AFE0}</a:tableStyleId>
+              </a:tblPr>
+              <a:tblGrid>
+                <a:gridCol w="2475832">
+                  <a:extLst>
+                    <a:ext uri="{9D8B030D-6E8A-4147-A177-3AD203B41FA5}">
+                      <a16:colId xmlns:a16="http://schemas.microsoft.com/office/drawing/2014/main" val="3082848916"/>
+                    </a:ext>
+                  </a:extLst>
+                </a:gridCol>
+              </a:tblGrid>
+              <a:tr h="378249">
+                <a:tc>
+                  <a:txBody>
+                    <a:bodyPr/>
+                    <a:lstStyle/>
+                    <a:p>
+                      <a:r>
+                        <a:rPr lang="en-US" sz="1800" b="0" i="0" kern="1200" dirty="0" err="1">
+                          <a:solidFill>
+                            <a:schemeClr val="lt1"/>
+                          </a:solidFill>
+                          <a:effectLst/>
+                          <a:latin typeface="+mn-lt"/>
+                          <a:ea typeface="+mn-ea"/>
+                          <a:cs typeface="+mn-cs"/>
+                        </a:rPr>
+                        <a:t>OptionsFrame</a:t>
+                      </a:r>
+                      <a:endParaRPr lang="ru-RU" dirty="0"/>
+                    </a:p>
+                  </a:txBody>
+                  <a:tcPr/>
+                </a:tc>
+                <a:extLst>
+                  <a:ext uri="{0D108BD9-81ED-4DB2-BD59-A6C34878D82A}">
+                    <a16:rowId xmlns:a16="http://schemas.microsoft.com/office/drawing/2014/main" val="1697048612"/>
+                  </a:ext>
+                </a:extLst>
+              </a:tr>
+              <a:tr h="378249">
+                <a:tc>
+                  <a:txBody>
+                    <a:bodyPr/>
+                    <a:lstStyle/>
+                    <a:p>
+                      <a:r>
+                        <a:rPr lang="ru-RU" sz="1800" b="0" i="0" kern="1200" dirty="0" err="1">
+                          <a:solidFill>
+                            <a:schemeClr val="bg1"/>
+                          </a:solidFill>
+                          <a:effectLst/>
+                          <a:latin typeface="+mn-lt"/>
+                          <a:ea typeface="+mn-ea"/>
+                          <a:cs typeface="+mn-cs"/>
+                        </a:rPr>
+                        <a:t>key_field</a:t>
+                      </a:r>
+                      <a:r>
+                        <a:rPr lang="ru-RU" sz="1800" b="0" i="0" kern="1200" dirty="0">
+                          <a:solidFill>
+                            <a:schemeClr val="bg1"/>
+                          </a:solidFill>
+                          <a:effectLst/>
+                          <a:latin typeface="+mn-lt"/>
+                          <a:ea typeface="+mn-ea"/>
+                          <a:cs typeface="+mn-cs"/>
+                        </a:rPr>
+                        <a:t> </a:t>
+                      </a:r>
+                    </a:p>
+                    <a:p>
+                      <a:r>
+                        <a:rPr lang="ru-RU" sz="1800" b="0" i="0" kern="1200" dirty="0" err="1">
+                          <a:solidFill>
+                            <a:schemeClr val="bg1"/>
+                          </a:solidFill>
+                          <a:effectLst/>
+                          <a:latin typeface="+mn-lt"/>
+                          <a:ea typeface="+mn-ea"/>
+                          <a:cs typeface="+mn-cs"/>
+                        </a:rPr>
+                        <a:t>random_btn</a:t>
+                      </a:r>
+                      <a:endParaRPr lang="ru-RU" dirty="0">
+                        <a:solidFill>
+                          <a:schemeClr val="bg1"/>
+                        </a:solidFill>
+                      </a:endParaRPr>
+                    </a:p>
+                  </a:txBody>
+                  <a:tcPr/>
+                </a:tc>
+                <a:extLst>
+                  <a:ext uri="{0D108BD9-81ED-4DB2-BD59-A6C34878D82A}">
+                    <a16:rowId xmlns:a16="http://schemas.microsoft.com/office/drawing/2014/main" val="523633106"/>
+                  </a:ext>
+                </a:extLst>
+              </a:tr>
+            </a:tbl>
+          </a:graphicData>
+        </a:graphic>
+      </p:graphicFrame>
+      <p:cxnSp>
+        <p:nvCxnSpPr>
+          <p:cNvPr id="20" name="Прямая со стрелкой 19">
+            <a:extLst>
+              <a:ext uri="{FF2B5EF4-FFF2-40B4-BE49-F238E27FC236}">
+                <a16:creationId xmlns:a16="http://schemas.microsoft.com/office/drawing/2014/main" id="{CBDEF11A-2044-5B90-48FA-D71F649D2E0D}"/>
+              </a:ext>
+            </a:extLst>
+          </p:cNvPr>
+          <p:cNvCxnSpPr>
+            <a:cxnSpLocks/>
+          </p:cNvCxnSpPr>
+          <p:nvPr/>
+        </p:nvCxnSpPr>
+        <p:spPr>
+          <a:xfrm flipV="1">
+            <a:off x="7764178" y="3257284"/>
+            <a:ext cx="940462" cy="15037"/>
+          </a:xfrm>
+          <a:prstGeom prst="straightConnector1">
+            <a:avLst/>
+          </a:prstGeom>
+          <a:ln w="57150">
+            <a:tailEnd type="triangle"/>
+          </a:ln>
+        </p:spPr>
+        <p:style>
+          <a:lnRef idx="1">
+            <a:schemeClr val="accent1"/>
+          </a:lnRef>
+          <a:fillRef idx="0">
+            <a:schemeClr val="accent1"/>
+          </a:fillRef>
+          <a:effectRef idx="0">
+            <a:schemeClr val="accent1"/>
+          </a:effectRef>
+          <a:fontRef idx="minor">
+            <a:schemeClr val="tx1"/>
+          </a:fontRef>
+        </p:style>
+      </p:cxnSp>
+      <p:graphicFrame>
+        <p:nvGraphicFramePr>
+          <p:cNvPr id="22" name="Таблица 21">
+            <a:extLst>
+              <a:ext uri="{FF2B5EF4-FFF2-40B4-BE49-F238E27FC236}">
+                <a16:creationId xmlns:a16="http://schemas.microsoft.com/office/drawing/2014/main" id="{E3F1C0E8-D5F0-A33B-1E07-78D2ADAC6BD8}"/>
+              </a:ext>
+            </a:extLst>
+          </p:cNvPr>
+          <p:cNvGraphicFramePr>
+            <a:graphicFrameLocks noGrp="1"/>
+          </p:cNvGraphicFramePr>
+          <p:nvPr>
+            <p:extLst>
+              <p:ext uri="{D42A27DB-BD31-4B8C-83A1-F6EECF244321}">
+                <p14:modId xmlns:p14="http://schemas.microsoft.com/office/powerpoint/2010/main" val="7761754"/>
+              </p:ext>
+            </p:extLst>
+          </p:nvPr>
+        </p:nvGraphicFramePr>
+        <p:xfrm>
+          <a:off x="1935426" y="5647235"/>
+          <a:ext cx="2475832" cy="1149244"/>
+        </p:xfrm>
+        <a:graphic>
+          <a:graphicData uri="http://schemas.openxmlformats.org/drawingml/2006/table">
+            <a:tbl>
+              <a:tblPr firstRow="1" bandRow="1">
+                <a:tableStyleId>{5C22544A-7EE6-4342-B048-85BDC9FD1C3A}</a:tableStyleId>
+              </a:tblPr>
+              <a:tblGrid>
+                <a:gridCol w="2475832">
+                  <a:extLst>
+                    <a:ext uri="{9D8B030D-6E8A-4147-A177-3AD203B41FA5}">
+                      <a16:colId xmlns:a16="http://schemas.microsoft.com/office/drawing/2014/main" val="2176576737"/>
+                    </a:ext>
+                  </a:extLst>
+                </a:gridCol>
+              </a:tblGrid>
+              <a:tr h="509164">
+                <a:tc>
+                  <a:txBody>
+                    <a:bodyPr/>
+                    <a:lstStyle/>
+                    <a:p>
+                      <a:endParaRPr lang="ru-RU" dirty="0"/>
+                    </a:p>
+                  </a:txBody>
+                  <a:tcPr/>
+                </a:tc>
+                <a:extLst>
+                  <a:ext uri="{0D108BD9-81ED-4DB2-BD59-A6C34878D82A}">
+                    <a16:rowId xmlns:a16="http://schemas.microsoft.com/office/drawing/2014/main" val="1604015232"/>
+                  </a:ext>
+                </a:extLst>
+              </a:tr>
+              <a:tr h="509164">
+                <a:tc>
+                  <a:txBody>
+                    <a:bodyPr/>
+                    <a:lstStyle/>
+                    <a:p>
+                      <a:r>
+                        <a:rPr lang="en-US" sz="1800" b="0" i="0" kern="1200" dirty="0" err="1">
+                          <a:solidFill>
+                            <a:schemeClr val="dk1"/>
+                          </a:solidFill>
+                          <a:effectLst/>
+                          <a:latin typeface="+mn-lt"/>
+                          <a:ea typeface="+mn-ea"/>
+                          <a:cs typeface="+mn-cs"/>
+                        </a:rPr>
+                        <a:t>init_ui</a:t>
+                      </a:r>
+                      <a:r>
+                        <a:rPr lang="en-US" sz="1800" b="0" i="0" kern="1200" dirty="0">
+                          <a:solidFill>
+                            <a:schemeClr val="dk1"/>
+                          </a:solidFill>
+                          <a:effectLst/>
+                          <a:latin typeface="+mn-lt"/>
+                          <a:ea typeface="+mn-ea"/>
+                          <a:cs typeface="+mn-cs"/>
+                        </a:rPr>
+                        <a:t>()</a:t>
+                      </a:r>
+                      <a:br>
+                        <a:rPr lang="ru-RU" dirty="0"/>
+                      </a:br>
+                      <a:r>
+                        <a:rPr lang="en-US" sz="1800" b="0" i="0" kern="1200" dirty="0" err="1">
+                          <a:solidFill>
+                            <a:schemeClr val="dk1"/>
+                          </a:solidFill>
+                          <a:effectLst/>
+                          <a:latin typeface="+mn-lt"/>
+                          <a:ea typeface="+mn-ea"/>
+                          <a:cs typeface="+mn-cs"/>
+                        </a:rPr>
+                        <a:t>handle_encrypt</a:t>
+                      </a:r>
+                      <a:r>
+                        <a:rPr lang="en-US" sz="1800" b="0" i="0" kern="1200" dirty="0">
+                          <a:solidFill>
+                            <a:schemeClr val="dk1"/>
+                          </a:solidFill>
+                          <a:effectLst/>
+                          <a:latin typeface="+mn-lt"/>
+                          <a:ea typeface="+mn-ea"/>
+                          <a:cs typeface="+mn-cs"/>
+                        </a:rPr>
+                        <a:t>()</a:t>
+                      </a:r>
+                      <a:endParaRPr lang="ru-RU" dirty="0">
+                        <a:solidFill>
+                          <a:schemeClr val="bg1"/>
+                        </a:solidFill>
+                      </a:endParaRPr>
+                    </a:p>
+                  </a:txBody>
+                  <a:tcPr/>
+                </a:tc>
+                <a:extLst>
+                  <a:ext uri="{0D108BD9-81ED-4DB2-BD59-A6C34878D82A}">
+                    <a16:rowId xmlns:a16="http://schemas.microsoft.com/office/drawing/2014/main" val="4206840605"/>
+                  </a:ext>
+                </a:extLst>
+              </a:tr>
+            </a:tbl>
+          </a:graphicData>
+        </a:graphic>
+      </p:graphicFrame>
+      <p:graphicFrame>
+        <p:nvGraphicFramePr>
+          <p:cNvPr id="23" name="Таблица 22">
+            <a:extLst>
+              <a:ext uri="{FF2B5EF4-FFF2-40B4-BE49-F238E27FC236}">
+                <a16:creationId xmlns:a16="http://schemas.microsoft.com/office/drawing/2014/main" id="{743654AF-27D4-E438-4E5C-7D6BC6B0603C}"/>
+              </a:ext>
+            </a:extLst>
+          </p:cNvPr>
+          <p:cNvGraphicFramePr>
+            <a:graphicFrameLocks noGrp="1"/>
+          </p:cNvGraphicFramePr>
+          <p:nvPr>
+            <p:extLst>
+              <p:ext uri="{D42A27DB-BD31-4B8C-83A1-F6EECF244321}">
+                <p14:modId xmlns:p14="http://schemas.microsoft.com/office/powerpoint/2010/main" val="2241496038"/>
+              </p:ext>
+            </p:extLst>
+          </p:nvPr>
+        </p:nvGraphicFramePr>
+        <p:xfrm>
+          <a:off x="1935426" y="4029446"/>
+          <a:ext cx="2475832" cy="2182914"/>
+        </p:xfrm>
+        <a:graphic>
+          <a:graphicData uri="http://schemas.openxmlformats.org/drawingml/2006/table">
+            <a:tbl>
+              <a:tblPr firstRow="1" bandRow="1">
+                <a:tableStyleId>{21E4AEA4-8DFA-4A89-87EB-49C32662AFE0}</a:tableStyleId>
+              </a:tblPr>
+              <a:tblGrid>
+                <a:gridCol w="2475832">
+                  <a:extLst>
+                    <a:ext uri="{9D8B030D-6E8A-4147-A177-3AD203B41FA5}">
+                      <a16:colId xmlns:a16="http://schemas.microsoft.com/office/drawing/2014/main" val="3082848916"/>
+                    </a:ext>
+                  </a:extLst>
+                </a:gridCol>
+              </a:tblGrid>
+              <a:tr h="329877">
+                <a:tc>
+                  <a:txBody>
+                    <a:bodyPr/>
+                    <a:lstStyle/>
+                    <a:p>
+                      <a:r>
+                        <a:rPr lang="en-US" dirty="0" err="1"/>
+                        <a:t>CipherApp</a:t>
+                      </a:r>
+                      <a:endParaRPr lang="ru-RU" dirty="0"/>
+                    </a:p>
+                  </a:txBody>
+                  <a:tcPr/>
+                </a:tc>
+                <a:extLst>
+                  <a:ext uri="{0D108BD9-81ED-4DB2-BD59-A6C34878D82A}">
+                    <a16:rowId xmlns:a16="http://schemas.microsoft.com/office/drawing/2014/main" val="1697048612"/>
+                  </a:ext>
+                </a:extLst>
+              </a:tr>
+              <a:tr h="1817154">
+                <a:tc>
+                  <a:txBody>
+                    <a:bodyPr/>
+                    <a:lstStyle/>
+                    <a:p>
+                      <a:r>
+                        <a:rPr lang="en-US" sz="1600" b="0" i="0" kern="1200" dirty="0">
+                          <a:solidFill>
+                            <a:schemeClr val="bg1"/>
+                          </a:solidFill>
+                          <a:effectLst/>
+                          <a:latin typeface="+mn-lt"/>
+                          <a:ea typeface="+mn-ea"/>
+                          <a:cs typeface="+mn-cs"/>
+                        </a:rPr>
+                        <a:t>model: </a:t>
+                      </a:r>
+                      <a:r>
+                        <a:rPr lang="en-US" sz="1600" b="0" i="0" kern="1200" dirty="0" err="1">
+                          <a:solidFill>
+                            <a:schemeClr val="bg1"/>
+                          </a:solidFill>
+                          <a:effectLst/>
+                          <a:latin typeface="+mn-lt"/>
+                          <a:ea typeface="+mn-ea"/>
+                          <a:cs typeface="+mn-cs"/>
+                        </a:rPr>
+                        <a:t>TextModel</a:t>
+                      </a:r>
+                      <a:br>
+                        <a:rPr lang="en-US" sz="1600" dirty="0">
+                          <a:solidFill>
+                            <a:schemeClr val="bg1"/>
+                          </a:solidFill>
+                        </a:rPr>
+                      </a:br>
+                      <a:r>
+                        <a:rPr lang="en-US" sz="1600" b="0" i="0" kern="1200" dirty="0">
+                          <a:solidFill>
+                            <a:schemeClr val="bg1"/>
+                          </a:solidFill>
+                          <a:effectLst/>
+                          <a:latin typeface="+mn-lt"/>
+                          <a:ea typeface="+mn-ea"/>
+                          <a:cs typeface="+mn-cs"/>
+                        </a:rPr>
+                        <a:t>cipher: Cipher</a:t>
+                      </a:r>
+                      <a:br>
+                        <a:rPr lang="en-US" sz="1600" dirty="0">
+                          <a:solidFill>
+                            <a:schemeClr val="bg1"/>
+                          </a:solidFill>
+                        </a:rPr>
+                      </a:br>
+                      <a:r>
+                        <a:rPr lang="en-US" sz="1600" b="0" i="0" kern="1200" dirty="0">
+                          <a:solidFill>
+                            <a:schemeClr val="bg1"/>
+                          </a:solidFill>
+                          <a:effectLst/>
+                          <a:latin typeface="+mn-lt"/>
+                          <a:ea typeface="+mn-ea"/>
+                          <a:cs typeface="+mn-cs"/>
+                        </a:rPr>
+                        <a:t>controller: </a:t>
+                      </a:r>
+                      <a:r>
+                        <a:rPr lang="en-US" sz="1600" b="0" i="0" kern="1200" dirty="0" err="1">
+                          <a:solidFill>
+                            <a:schemeClr val="bg1"/>
+                          </a:solidFill>
+                          <a:effectLst/>
+                          <a:latin typeface="+mn-lt"/>
+                          <a:ea typeface="+mn-ea"/>
+                          <a:cs typeface="+mn-cs"/>
+                        </a:rPr>
+                        <a:t>CipherController</a:t>
+                      </a:r>
+                      <a:br>
+                        <a:rPr lang="en-US" sz="1600" dirty="0">
+                          <a:solidFill>
+                            <a:schemeClr val="bg1"/>
+                          </a:solidFill>
+                        </a:rPr>
+                      </a:br>
+                      <a:r>
+                        <a:rPr lang="en-US" sz="1600" b="0" i="0" kern="1200" dirty="0" err="1">
+                          <a:solidFill>
+                            <a:schemeClr val="bg1"/>
+                          </a:solidFill>
+                          <a:effectLst/>
+                          <a:latin typeface="+mn-lt"/>
+                          <a:ea typeface="+mn-ea"/>
+                          <a:cs typeface="+mn-cs"/>
+                        </a:rPr>
+                        <a:t>input_text</a:t>
+                      </a:r>
+                      <a:br>
+                        <a:rPr lang="ru-RU" sz="1600" dirty="0">
+                          <a:solidFill>
+                            <a:schemeClr val="bg1"/>
+                          </a:solidFill>
+                        </a:rPr>
+                      </a:br>
+                      <a:r>
+                        <a:rPr lang="en-US" sz="1600" b="0" i="0" kern="1200" dirty="0" err="1">
+                          <a:solidFill>
+                            <a:schemeClr val="bg1"/>
+                          </a:solidFill>
+                          <a:effectLst/>
+                          <a:latin typeface="+mn-lt"/>
+                          <a:ea typeface="+mn-ea"/>
+                          <a:cs typeface="+mn-cs"/>
+                        </a:rPr>
+                        <a:t>output_text</a:t>
+                      </a:r>
+                      <a:r>
+                        <a:rPr lang="en-US" sz="1600" b="0" i="0" kern="1200" dirty="0">
+                          <a:solidFill>
+                            <a:schemeClr val="bg1"/>
+                          </a:solidFill>
+                          <a:effectLst/>
+                          <a:latin typeface="+mn-lt"/>
+                          <a:ea typeface="+mn-ea"/>
+                          <a:cs typeface="+mn-cs"/>
+                        </a:rPr>
+                        <a:t> </a:t>
+                      </a:r>
+                      <a:br>
+                        <a:rPr lang="ru-RU" sz="1600" dirty="0">
+                          <a:solidFill>
+                            <a:schemeClr val="bg1"/>
+                          </a:solidFill>
+                        </a:rPr>
+                      </a:br>
+                      <a:r>
+                        <a:rPr lang="en-US" sz="1600" b="0" i="0" kern="1200" dirty="0">
+                          <a:solidFill>
+                            <a:schemeClr val="bg1"/>
+                          </a:solidFill>
+                          <a:effectLst/>
+                          <a:latin typeface="+mn-lt"/>
+                          <a:ea typeface="+mn-ea"/>
+                          <a:cs typeface="+mn-cs"/>
+                        </a:rPr>
+                        <a:t>options: </a:t>
+                      </a:r>
+                      <a:r>
+                        <a:rPr lang="en-US" sz="1600" b="0" i="0" kern="1200" dirty="0" err="1">
+                          <a:solidFill>
+                            <a:schemeClr val="bg1"/>
+                          </a:solidFill>
+                          <a:effectLst/>
+                          <a:latin typeface="+mn-lt"/>
+                          <a:ea typeface="+mn-ea"/>
+                          <a:cs typeface="+mn-cs"/>
+                        </a:rPr>
+                        <a:t>OptionsFrame</a:t>
+                      </a:r>
+                      <a:br>
+                        <a:rPr lang="en-US" sz="1600" dirty="0">
+                          <a:solidFill>
+                            <a:schemeClr val="bg1"/>
+                          </a:solidFill>
+                        </a:rPr>
+                      </a:br>
+                      <a:r>
+                        <a:rPr lang="en-US" sz="1600" b="0" i="0" kern="1200" dirty="0" err="1">
+                          <a:solidFill>
+                            <a:schemeClr val="bg1"/>
+                          </a:solidFill>
+                          <a:effectLst/>
+                          <a:latin typeface="+mn-lt"/>
+                          <a:ea typeface="+mn-ea"/>
+                          <a:cs typeface="+mn-cs"/>
+                        </a:rPr>
+                        <a:t>encrypt_btn</a:t>
+                      </a:r>
+                      <a:r>
+                        <a:rPr lang="en-US" sz="1600" b="0" i="0" kern="1200" dirty="0">
+                          <a:solidFill>
+                            <a:schemeClr val="bg1"/>
+                          </a:solidFill>
+                          <a:effectLst/>
+                          <a:latin typeface="+mn-lt"/>
+                          <a:ea typeface="+mn-ea"/>
+                          <a:cs typeface="+mn-cs"/>
+                        </a:rPr>
+                        <a:t> </a:t>
+                      </a:r>
+                      <a:endParaRPr lang="ru-RU" sz="1600" dirty="0">
+                        <a:solidFill>
+                          <a:schemeClr val="bg1"/>
+                        </a:solidFill>
+                      </a:endParaRPr>
+                    </a:p>
+                  </a:txBody>
+                  <a:tcPr/>
+                </a:tc>
+                <a:extLst>
+                  <a:ext uri="{0D108BD9-81ED-4DB2-BD59-A6C34878D82A}">
+                    <a16:rowId xmlns:a16="http://schemas.microsoft.com/office/drawing/2014/main" val="523633106"/>
+                  </a:ext>
+                </a:extLst>
+              </a:tr>
+            </a:tbl>
+          </a:graphicData>
+        </a:graphic>
+      </p:graphicFrame>
+      <p:cxnSp>
+        <p:nvCxnSpPr>
+          <p:cNvPr id="24" name="Прямая со стрелкой 23">
+            <a:extLst>
+              <a:ext uri="{FF2B5EF4-FFF2-40B4-BE49-F238E27FC236}">
+                <a16:creationId xmlns:a16="http://schemas.microsoft.com/office/drawing/2014/main" id="{EAE3DBA3-6559-8CF2-00BC-5962F2EED3A5}"/>
+              </a:ext>
+            </a:extLst>
+          </p:cNvPr>
+          <p:cNvCxnSpPr>
+            <a:cxnSpLocks/>
+          </p:cNvCxnSpPr>
+          <p:nvPr/>
+        </p:nvCxnSpPr>
+        <p:spPr>
+          <a:xfrm flipH="1">
+            <a:off x="4411258" y="4061217"/>
+            <a:ext cx="4328915" cy="1661745"/>
+          </a:xfrm>
+          <a:prstGeom prst="straightConnector1">
+            <a:avLst/>
+          </a:prstGeom>
+          <a:ln w="57150">
+            <a:tailEnd type="triangle"/>
+          </a:ln>
+        </p:spPr>
+        <p:style>
+          <a:lnRef idx="1">
+            <a:schemeClr val="accent1"/>
+          </a:lnRef>
+          <a:fillRef idx="0">
+            <a:schemeClr val="accent1"/>
+          </a:fillRef>
+          <a:effectRef idx="0">
+            <a:schemeClr val="accent1"/>
+          </a:effectRef>
+          <a:fontRef idx="minor">
+            <a:schemeClr val="tx1"/>
+          </a:fontRef>
+        </p:style>
+      </p:cxnSp>
+    </p:spTree>
+    <p:extLst>
+      <p:ext uri="{BB962C8B-B14F-4D97-AF65-F5344CB8AC3E}">
+        <p14:creationId xmlns:p14="http://schemas.microsoft.com/office/powerpoint/2010/main" val="131092587"/>
+      </p:ext>
+    </p:extLst>
+  </p:cSld>
+  <p:clrMapOvr>
+    <a:masterClrMapping/>
+  </p:clrMapOvr>
+</p:sld>
+</file>
+
+<file path=ppt/slides/slide13.xml><?xml version="1.0" encoding="utf-8"?>
+<p:sld xmlns:a="http://schemas.openxmlformats.org/drawingml/2006/main" xmlns:r="http://schemas.openxmlformats.org/officeDocument/2006/relationships" xmlns:p="http://schemas.openxmlformats.org/presentationml/2006/main">
+  <p:cSld>
+    <p:spTree>
+      <p:nvGrpSpPr>
+        <p:cNvPr id="1" name="">
+          <a:extLst>
+            <a:ext uri="{FF2B5EF4-FFF2-40B4-BE49-F238E27FC236}">
+              <a16:creationId xmlns:a16="http://schemas.microsoft.com/office/drawing/2014/main" id="{6B1EA241-3A0B-F48D-DF24-41203B41C8FD}"/>
+            </a:ext>
+          </a:extLst>
+        </p:cNvPr>
+        <p:cNvGrpSpPr/>
+        <p:nvPr/>
+      </p:nvGrpSpPr>
+      <p:grpSpPr>
+        <a:xfrm>
+          <a:off x="0" y="0"/>
+          <a:ext cx="0" cy="0"/>
+          <a:chOff x="0" y="0"/>
+          <a:chExt cx="0" cy="0"/>
+        </a:xfrm>
+      </p:grpSpPr>
+      <p:pic>
+        <p:nvPicPr>
+          <p:cNvPr id="6" name="Объект 5">
+            <a:extLst>
+              <a:ext uri="{FF2B5EF4-FFF2-40B4-BE49-F238E27FC236}">
+                <a16:creationId xmlns:a16="http://schemas.microsoft.com/office/drawing/2014/main" id="{678B5A6C-C803-EEE4-2B91-BA56A4CFAD53}"/>
+              </a:ext>
+            </a:extLst>
+          </p:cNvPr>
+          <p:cNvPicPr>
+            <a:picLocks noGrp="1"/>
+          </p:cNvPicPr>
+          <p:nvPr>
+            <p:ph idx="1"/>
+          </p:nvPr>
+        </p:nvPicPr>
+        <p:blipFill>
+          <a:blip r:embed="rId3">
+            <a:extLst>
+              <a:ext uri="{28A0092B-C50C-407E-A947-70E740481C1C}">
+                <a14:useLocalDpi xmlns:a14="http://schemas.microsoft.com/office/drawing/2010/main" val="0"/>
+              </a:ext>
+            </a:extLst>
+          </a:blip>
+          <a:stretch>
+            <a:fillRect/>
+          </a:stretch>
+        </p:blipFill>
+        <p:spPr>
+          <a:xfrm>
+            <a:off x="0" y="0"/>
+            <a:ext cx="12192000" cy="6934200"/>
+          </a:xfrm>
+        </p:spPr>
+      </p:pic>
+      <p:sp>
+        <p:nvSpPr>
+          <p:cNvPr id="3" name="Заголовок 1">
+            <a:extLst>
+              <a:ext uri="{FF2B5EF4-FFF2-40B4-BE49-F238E27FC236}">
+                <a16:creationId xmlns:a16="http://schemas.microsoft.com/office/drawing/2014/main" id="{6212C54A-A273-C375-0141-AEA49448614B}"/>
+              </a:ext>
+            </a:extLst>
+          </p:cNvPr>
+          <p:cNvSpPr txBox="1">
+            <a:spLocks/>
+          </p:cNvSpPr>
+          <p:nvPr/>
+        </p:nvSpPr>
+        <p:spPr>
+          <a:xfrm>
+            <a:off x="883192" y="449660"/>
+            <a:ext cx="10515600" cy="358775"/>
+          </a:xfrm>
+          <a:prstGeom prst="rect">
+            <a:avLst/>
+          </a:prstGeom>
+        </p:spPr>
+        <p:txBody>
+          <a:bodyPr vert="horz" lIns="91440" tIns="45720" rIns="91440" bIns="45720" rtlCol="0" anchor="ctr">
+            <a:noAutofit/>
+          </a:bodyPr>
+          <a:lstStyle>
+            <a:lvl1pPr algn="l" defTabSz="914400" rtl="0" eaLnBrk="1" latinLnBrk="0" hangingPunct="1">
+              <a:lnSpc>
+                <a:spcPct val="90000"/>
+              </a:lnSpc>
+              <a:spcBef>
+                <a:spcPct val="0"/>
+              </a:spcBef>
+              <a:buNone/>
+              <a:defRPr sz="4400" kern="1200">
+                <a:solidFill>
+                  <a:schemeClr val="tx1"/>
+                </a:solidFill>
+                <a:latin typeface="+mj-lt"/>
+                <a:ea typeface="+mj-ea"/>
+                <a:cs typeface="+mj-cs"/>
+              </a:defRPr>
+            </a:lvl1pPr>
+          </a:lstStyle>
+          <a:p>
+            <a:pPr algn="ctr"/>
+            <a:r>
+              <a:rPr lang="ru-RU" sz="7200" b="1" dirty="0">
+                <a:solidFill>
+                  <a:schemeClr val="bg1"/>
+                </a:solidFill>
+              </a:rPr>
+              <a:t>Основные классы</a:t>
+            </a:r>
+          </a:p>
+        </p:txBody>
+      </p:sp>
+      <p:sp>
+        <p:nvSpPr>
+          <p:cNvPr id="8" name="Заголовок 4">
+            <a:extLst>
+              <a:ext uri="{FF2B5EF4-FFF2-40B4-BE49-F238E27FC236}">
+                <a16:creationId xmlns:a16="http://schemas.microsoft.com/office/drawing/2014/main" id="{C302C663-4600-B640-F601-07992A726ED0}"/>
+              </a:ext>
+            </a:extLst>
+          </p:cNvPr>
+          <p:cNvSpPr txBox="1">
+            <a:spLocks/>
+          </p:cNvSpPr>
+          <p:nvPr/>
+        </p:nvSpPr>
+        <p:spPr>
+          <a:xfrm>
+            <a:off x="883192" y="1910831"/>
+            <a:ext cx="5981194" cy="2960138"/>
+          </a:xfrm>
+          <a:prstGeom prst="rect">
+            <a:avLst/>
+          </a:prstGeom>
+        </p:spPr>
+        <p:txBody>
+          <a:bodyPr vert="horz" lIns="91440" tIns="45720" rIns="91440" bIns="45720" rtlCol="0" anchor="ctr">
+            <a:noAutofit/>
+          </a:bodyPr>
+          <a:lstStyle>
+            <a:lvl1pPr algn="l" defTabSz="914400" rtl="0" eaLnBrk="1" latinLnBrk="0" hangingPunct="1">
+              <a:lnSpc>
+                <a:spcPct val="90000"/>
+              </a:lnSpc>
+              <a:spcBef>
+                <a:spcPct val="0"/>
+              </a:spcBef>
+              <a:buNone/>
+              <a:defRPr sz="4400" kern="1200">
+                <a:solidFill>
+                  <a:schemeClr val="tx1"/>
+                </a:solidFill>
+                <a:latin typeface="+mj-lt"/>
+                <a:ea typeface="+mj-ea"/>
+                <a:cs typeface="+mj-cs"/>
+              </a:defRPr>
+            </a:lvl1pPr>
+          </a:lstStyle>
+          <a:p>
+            <a:endParaRPr lang="ru-RU" sz="2800" dirty="0">
+              <a:solidFill>
+                <a:schemeClr val="bg1"/>
+              </a:solidFill>
+            </a:endParaRPr>
+          </a:p>
+        </p:txBody>
+      </p:sp>
+      <p:sp>
+        <p:nvSpPr>
+          <p:cNvPr id="10" name="TextBox 9">
+            <a:extLst>
+              <a:ext uri="{FF2B5EF4-FFF2-40B4-BE49-F238E27FC236}">
+                <a16:creationId xmlns:a16="http://schemas.microsoft.com/office/drawing/2014/main" id="{ACBC5EE2-E8A3-B76E-2A0C-30C9E610ED57}"/>
+              </a:ext>
+            </a:extLst>
+          </p:cNvPr>
+          <p:cNvSpPr txBox="1"/>
+          <p:nvPr/>
+        </p:nvSpPr>
+        <p:spPr>
+          <a:xfrm>
+            <a:off x="2904498" y="1145361"/>
+            <a:ext cx="6472988" cy="5262979"/>
+          </a:xfrm>
+          <a:prstGeom prst="rect">
+            <a:avLst/>
+          </a:prstGeom>
+          <a:noFill/>
+        </p:spPr>
+        <p:txBody>
+          <a:bodyPr wrap="square">
+            <a:spAutoFit/>
+          </a:bodyPr>
+          <a:lstStyle/>
+          <a:p>
+            <a:r>
+              <a:rPr lang="en-US" sz="2800" dirty="0">
+                <a:solidFill>
+                  <a:schemeClr val="bg1"/>
+                </a:solidFill>
+              </a:rPr>
+              <a:t>Cipher — </a:t>
+            </a:r>
+            <a:r>
+              <a:rPr lang="ru-RU" sz="2800" dirty="0">
+                <a:solidFill>
+                  <a:schemeClr val="bg1"/>
+                </a:solidFill>
+              </a:rPr>
+              <a:t>абстрактный класс, задаёт интерфейс метода </a:t>
+            </a:r>
+            <a:r>
+              <a:rPr lang="en-US" sz="2800" dirty="0">
+                <a:solidFill>
+                  <a:schemeClr val="bg1"/>
+                </a:solidFill>
+              </a:rPr>
+              <a:t>process()</a:t>
+            </a:r>
+            <a:endParaRPr lang="ru-RU" sz="2800" dirty="0">
+              <a:solidFill>
+                <a:schemeClr val="bg1"/>
+              </a:solidFill>
+            </a:endParaRPr>
+          </a:p>
+          <a:p>
+            <a:r>
+              <a:rPr lang="en-US" sz="2800" dirty="0" err="1">
+                <a:solidFill>
+                  <a:schemeClr val="bg1"/>
+                </a:solidFill>
+              </a:rPr>
+              <a:t>VernamCipher</a:t>
+            </a:r>
+            <a:r>
+              <a:rPr lang="en-US" sz="2800" dirty="0">
+                <a:solidFill>
+                  <a:schemeClr val="bg1"/>
+                </a:solidFill>
+              </a:rPr>
+              <a:t> — </a:t>
+            </a:r>
+            <a:r>
+              <a:rPr lang="ru-RU" sz="2800" dirty="0">
+                <a:solidFill>
+                  <a:schemeClr val="bg1"/>
+                </a:solidFill>
+              </a:rPr>
+              <a:t>реализует алгоритм шифрования (</a:t>
+            </a:r>
+            <a:r>
+              <a:rPr lang="en-US" sz="2800" dirty="0">
+                <a:solidFill>
+                  <a:schemeClr val="bg1"/>
+                </a:solidFill>
+              </a:rPr>
+              <a:t>XOR/</a:t>
+            </a:r>
+            <a:r>
+              <a:rPr lang="ru-RU" sz="2800" dirty="0">
+                <a:solidFill>
+                  <a:schemeClr val="bg1"/>
+                </a:solidFill>
+              </a:rPr>
+              <a:t>Вернам)</a:t>
+            </a:r>
+          </a:p>
+          <a:p>
+            <a:r>
+              <a:rPr lang="en-US" sz="2800" dirty="0" err="1">
+                <a:solidFill>
+                  <a:schemeClr val="bg1"/>
+                </a:solidFill>
+              </a:rPr>
+              <a:t>TextModel</a:t>
+            </a:r>
+            <a:r>
+              <a:rPr lang="en-US" sz="2800" dirty="0">
+                <a:solidFill>
+                  <a:schemeClr val="bg1"/>
+                </a:solidFill>
+              </a:rPr>
+              <a:t> — </a:t>
+            </a:r>
+            <a:r>
+              <a:rPr lang="ru-RU" sz="2800" dirty="0">
+                <a:solidFill>
+                  <a:schemeClr val="bg1"/>
+                </a:solidFill>
+              </a:rPr>
+              <a:t>хранит текст (</a:t>
+            </a:r>
+            <a:r>
+              <a:rPr lang="en-US" sz="2800" dirty="0" err="1">
+                <a:solidFill>
+                  <a:schemeClr val="bg1"/>
+                </a:solidFill>
+              </a:rPr>
+              <a:t>set_text</a:t>
+            </a:r>
+            <a:r>
+              <a:rPr lang="en-US" sz="2800" dirty="0">
+                <a:solidFill>
+                  <a:schemeClr val="bg1"/>
+                </a:solidFill>
+              </a:rPr>
+              <a:t>, </a:t>
+            </a:r>
+            <a:r>
+              <a:rPr lang="en-US" sz="2800" dirty="0" err="1">
+                <a:solidFill>
+                  <a:schemeClr val="bg1"/>
+                </a:solidFill>
+              </a:rPr>
+              <a:t>get_text</a:t>
+            </a:r>
+            <a:r>
+              <a:rPr lang="en-US" sz="2800" dirty="0">
+                <a:solidFill>
+                  <a:schemeClr val="bg1"/>
+                </a:solidFill>
+              </a:rPr>
+              <a:t>)</a:t>
+            </a:r>
+            <a:endParaRPr lang="ru-RU" sz="2800" dirty="0">
+              <a:solidFill>
+                <a:schemeClr val="bg1"/>
+              </a:solidFill>
+            </a:endParaRPr>
+          </a:p>
+          <a:p>
+            <a:r>
+              <a:rPr lang="en-US" sz="2800" dirty="0" err="1">
+                <a:solidFill>
+                  <a:schemeClr val="bg1"/>
+                </a:solidFill>
+              </a:rPr>
+              <a:t>CipherController</a:t>
+            </a:r>
+            <a:r>
+              <a:rPr lang="en-US" sz="2800" dirty="0">
+                <a:solidFill>
+                  <a:schemeClr val="bg1"/>
+                </a:solidFill>
+              </a:rPr>
+              <a:t> — </a:t>
+            </a:r>
+            <a:r>
+              <a:rPr lang="ru-RU" sz="2800" dirty="0">
+                <a:solidFill>
+                  <a:schemeClr val="bg1"/>
+                </a:solidFill>
+              </a:rPr>
+              <a:t>связывает модель и алгоритм (</a:t>
+            </a:r>
+            <a:r>
+              <a:rPr lang="en-US" sz="2800" dirty="0">
+                <a:solidFill>
+                  <a:schemeClr val="bg1"/>
+                </a:solidFill>
+              </a:rPr>
+              <a:t>encrypt)</a:t>
+            </a:r>
+            <a:endParaRPr lang="ru-RU" sz="2800" dirty="0">
+              <a:solidFill>
+                <a:schemeClr val="bg1"/>
+              </a:solidFill>
+            </a:endParaRPr>
+          </a:p>
+          <a:p>
+            <a:r>
+              <a:rPr lang="en-US" sz="2800" dirty="0" err="1">
+                <a:solidFill>
+                  <a:schemeClr val="bg1"/>
+                </a:solidFill>
+              </a:rPr>
+              <a:t>OptionsFrame</a:t>
+            </a:r>
+            <a:r>
+              <a:rPr lang="en-US" sz="2800" dirty="0">
+                <a:solidFill>
+                  <a:schemeClr val="bg1"/>
+                </a:solidFill>
+              </a:rPr>
+              <a:t> — </a:t>
+            </a:r>
+            <a:r>
+              <a:rPr lang="ru-RU" sz="2800" dirty="0">
+                <a:solidFill>
+                  <a:schemeClr val="bg1"/>
+                </a:solidFill>
+              </a:rPr>
+              <a:t>отвечает за ввод и генерацию ключа</a:t>
+            </a:r>
+          </a:p>
+          <a:p>
+            <a:r>
+              <a:rPr lang="en-US" sz="2800" dirty="0" err="1">
+                <a:solidFill>
+                  <a:schemeClr val="bg1"/>
+                </a:solidFill>
+              </a:rPr>
+              <a:t>CipherApp</a:t>
+            </a:r>
+            <a:r>
+              <a:rPr lang="en-US" sz="2800" dirty="0">
+                <a:solidFill>
+                  <a:schemeClr val="bg1"/>
+                </a:solidFill>
+              </a:rPr>
+              <a:t> — </a:t>
+            </a:r>
+            <a:r>
+              <a:rPr lang="ru-RU" sz="2800" dirty="0">
+                <a:solidFill>
+                  <a:schemeClr val="bg1"/>
+                </a:solidFill>
+              </a:rPr>
+              <a:t>главный класс, объединяет все компоненты</a:t>
+            </a:r>
+          </a:p>
+        </p:txBody>
+      </p:sp>
+    </p:spTree>
+    <p:extLst>
+      <p:ext uri="{BB962C8B-B14F-4D97-AF65-F5344CB8AC3E}">
+        <p14:creationId xmlns:p14="http://schemas.microsoft.com/office/powerpoint/2010/main" val="2603616649"/>
+      </p:ext>
+    </p:extLst>
+  </p:cSld>
+  <p:clrMapOvr>
+    <a:masterClrMapping/>
+  </p:clrMapOvr>
+</p:sld>
+</file>
+
+<file path=ppt/slides/slide14.xml><?xml version="1.0" encoding="utf-8"?>
+<p:sld xmlns:a="http://schemas.openxmlformats.org/drawingml/2006/main" xmlns:r="http://schemas.openxmlformats.org/officeDocument/2006/relationships" xmlns:p="http://schemas.openxmlformats.org/presentationml/2006/main">
+  <p:cSld>
+    <p:spTree>
+      <p:nvGrpSpPr>
+        <p:cNvPr id="1" name="">
+          <a:extLst>
+            <a:ext uri="{FF2B5EF4-FFF2-40B4-BE49-F238E27FC236}">
+              <a16:creationId xmlns:a16="http://schemas.microsoft.com/office/drawing/2014/main" id="{6B1EA241-3A0B-F48D-DF24-41203B41C8FD}"/>
+            </a:ext>
+          </a:extLst>
+        </p:cNvPr>
+        <p:cNvGrpSpPr/>
+        <p:nvPr/>
+      </p:nvGrpSpPr>
+      <p:grpSpPr>
+        <a:xfrm>
+          <a:off x="0" y="0"/>
+          <a:ext cx="0" cy="0"/>
+          <a:chOff x="0" y="0"/>
+          <a:chExt cx="0" cy="0"/>
+        </a:xfrm>
+      </p:grpSpPr>
+      <p:pic>
+        <p:nvPicPr>
+          <p:cNvPr id="6" name="Объект 5">
+            <a:extLst>
+              <a:ext uri="{FF2B5EF4-FFF2-40B4-BE49-F238E27FC236}">
+                <a16:creationId xmlns:a16="http://schemas.microsoft.com/office/drawing/2014/main" id="{678B5A6C-C803-EEE4-2B91-BA56A4CFAD53}"/>
+              </a:ext>
+            </a:extLst>
+          </p:cNvPr>
+          <p:cNvPicPr>
+            <a:picLocks noGrp="1"/>
+          </p:cNvPicPr>
+          <p:nvPr>
+            <p:ph idx="1"/>
+          </p:nvPr>
+        </p:nvPicPr>
+        <p:blipFill>
+          <a:blip r:embed="rId3">
+            <a:extLst>
+              <a:ext uri="{28A0092B-C50C-407E-A947-70E740481C1C}">
+                <a14:useLocalDpi xmlns:a14="http://schemas.microsoft.com/office/drawing/2010/main" val="0"/>
+              </a:ext>
+            </a:extLst>
+          </a:blip>
+          <a:stretch>
+            <a:fillRect/>
+          </a:stretch>
+        </p:blipFill>
+        <p:spPr>
+          <a:xfrm>
+            <a:off x="0" y="0"/>
+            <a:ext cx="12192000" cy="6934200"/>
+          </a:xfrm>
+        </p:spPr>
+      </p:pic>
+      <p:sp>
+        <p:nvSpPr>
+          <p:cNvPr id="3" name="Заголовок 1">
+            <a:extLst>
+              <a:ext uri="{FF2B5EF4-FFF2-40B4-BE49-F238E27FC236}">
+                <a16:creationId xmlns:a16="http://schemas.microsoft.com/office/drawing/2014/main" id="{6212C54A-A273-C375-0141-AEA49448614B}"/>
+              </a:ext>
+            </a:extLst>
+          </p:cNvPr>
+          <p:cNvSpPr txBox="1">
+            <a:spLocks/>
+          </p:cNvSpPr>
+          <p:nvPr/>
+        </p:nvSpPr>
+        <p:spPr>
+          <a:xfrm>
+            <a:off x="838200" y="469994"/>
+            <a:ext cx="10515600" cy="358775"/>
+          </a:xfrm>
+          <a:prstGeom prst="rect">
+            <a:avLst/>
+          </a:prstGeom>
+        </p:spPr>
+        <p:txBody>
+          <a:bodyPr vert="horz" lIns="91440" tIns="45720" rIns="91440" bIns="45720" rtlCol="0" anchor="ctr">
+            <a:noAutofit/>
+          </a:bodyPr>
+          <a:lstStyle>
+            <a:lvl1pPr algn="l" defTabSz="914400" rtl="0" eaLnBrk="1" latinLnBrk="0" hangingPunct="1">
+              <a:lnSpc>
+                <a:spcPct val="90000"/>
+              </a:lnSpc>
+              <a:spcBef>
+                <a:spcPct val="0"/>
+              </a:spcBef>
+              <a:buNone/>
+              <a:defRPr sz="4400" kern="1200">
+                <a:solidFill>
+                  <a:schemeClr val="tx1"/>
+                </a:solidFill>
+                <a:latin typeface="+mj-lt"/>
+                <a:ea typeface="+mj-ea"/>
+                <a:cs typeface="+mj-cs"/>
+              </a:defRPr>
+            </a:lvl1pPr>
+          </a:lstStyle>
+          <a:p>
+            <a:pPr algn="ctr"/>
+            <a:r>
+              <a:rPr lang="ru-RU" sz="7200" dirty="0">
+                <a:solidFill>
+                  <a:schemeClr val="bg1"/>
+                </a:solidFill>
+              </a:rPr>
+              <a:t>Связи между классами</a:t>
+            </a:r>
+          </a:p>
+        </p:txBody>
+      </p:sp>
+      <p:sp>
+        <p:nvSpPr>
+          <p:cNvPr id="8" name="Заголовок 4">
+            <a:extLst>
+              <a:ext uri="{FF2B5EF4-FFF2-40B4-BE49-F238E27FC236}">
+                <a16:creationId xmlns:a16="http://schemas.microsoft.com/office/drawing/2014/main" id="{C302C663-4600-B640-F601-07992A726ED0}"/>
+              </a:ext>
+            </a:extLst>
+          </p:cNvPr>
+          <p:cNvSpPr txBox="1">
+            <a:spLocks/>
+          </p:cNvSpPr>
+          <p:nvPr/>
+        </p:nvSpPr>
+        <p:spPr>
+          <a:xfrm>
+            <a:off x="883192" y="1910831"/>
+            <a:ext cx="5981194" cy="2960138"/>
+          </a:xfrm>
+          <a:prstGeom prst="rect">
+            <a:avLst/>
+          </a:prstGeom>
+        </p:spPr>
+        <p:txBody>
+          <a:bodyPr vert="horz" lIns="91440" tIns="45720" rIns="91440" bIns="45720" rtlCol="0" anchor="ctr">
+            <a:noAutofit/>
+          </a:bodyPr>
+          <a:lstStyle>
+            <a:lvl1pPr algn="l" defTabSz="914400" rtl="0" eaLnBrk="1" latinLnBrk="0" hangingPunct="1">
+              <a:lnSpc>
+                <a:spcPct val="90000"/>
+              </a:lnSpc>
+              <a:spcBef>
+                <a:spcPct val="0"/>
+              </a:spcBef>
+              <a:buNone/>
+              <a:defRPr sz="4400" kern="1200">
+                <a:solidFill>
+                  <a:schemeClr val="tx1"/>
+                </a:solidFill>
+                <a:latin typeface="+mj-lt"/>
+                <a:ea typeface="+mj-ea"/>
+                <a:cs typeface="+mj-cs"/>
+              </a:defRPr>
+            </a:lvl1pPr>
+          </a:lstStyle>
+          <a:p>
+            <a:endParaRPr lang="ru-RU" sz="2800" dirty="0">
+              <a:solidFill>
+                <a:schemeClr val="bg1"/>
+              </a:solidFill>
+            </a:endParaRPr>
+          </a:p>
+        </p:txBody>
+      </p:sp>
+      <p:sp>
+        <p:nvSpPr>
+          <p:cNvPr id="10" name="TextBox 9">
+            <a:extLst>
+              <a:ext uri="{FF2B5EF4-FFF2-40B4-BE49-F238E27FC236}">
+                <a16:creationId xmlns:a16="http://schemas.microsoft.com/office/drawing/2014/main" id="{ACBC5EE2-E8A3-B76E-2A0C-30C9E610ED57}"/>
+              </a:ext>
+            </a:extLst>
+          </p:cNvPr>
+          <p:cNvSpPr txBox="1"/>
+          <p:nvPr/>
+        </p:nvSpPr>
+        <p:spPr>
+          <a:xfrm>
+            <a:off x="883193" y="1374963"/>
+            <a:ext cx="10891712" cy="4154984"/>
+          </a:xfrm>
+          <a:prstGeom prst="rect">
+            <a:avLst/>
+          </a:prstGeom>
+          <a:noFill/>
+        </p:spPr>
+        <p:txBody>
+          <a:bodyPr wrap="square">
+            <a:spAutoFit/>
+          </a:bodyPr>
+          <a:lstStyle/>
+          <a:p>
+            <a:r>
+              <a:rPr lang="en-US" sz="4400" dirty="0" err="1">
+                <a:solidFill>
+                  <a:schemeClr val="bg1"/>
+                </a:solidFill>
+              </a:rPr>
+              <a:t>CipherApp</a:t>
+            </a:r>
+            <a:r>
+              <a:rPr lang="en-US" sz="4400" dirty="0">
+                <a:solidFill>
+                  <a:schemeClr val="bg1"/>
+                </a:solidFill>
+              </a:rPr>
+              <a:t> </a:t>
+            </a:r>
+            <a:r>
+              <a:rPr lang="ru-RU" sz="4400" dirty="0">
+                <a:solidFill>
+                  <a:schemeClr val="bg1"/>
+                </a:solidFill>
+              </a:rPr>
+              <a:t>использует </a:t>
+            </a:r>
+            <a:r>
+              <a:rPr lang="en-US" sz="4400" dirty="0" err="1">
+                <a:solidFill>
+                  <a:schemeClr val="bg1"/>
+                </a:solidFill>
+              </a:rPr>
+              <a:t>CipherController</a:t>
+            </a:r>
+            <a:r>
+              <a:rPr lang="en-US" sz="4400" dirty="0">
+                <a:solidFill>
+                  <a:schemeClr val="bg1"/>
+                </a:solidFill>
+              </a:rPr>
+              <a:t> </a:t>
+            </a:r>
+            <a:r>
+              <a:rPr lang="ru-RU" sz="4400" dirty="0">
+                <a:solidFill>
+                  <a:schemeClr val="bg1"/>
+                </a:solidFill>
+              </a:rPr>
+              <a:t>и </a:t>
+            </a:r>
+            <a:r>
+              <a:rPr lang="en-US" sz="4400" dirty="0" err="1">
+                <a:solidFill>
+                  <a:schemeClr val="bg1"/>
+                </a:solidFill>
+              </a:rPr>
+              <a:t>TextModel</a:t>
+            </a:r>
+            <a:r>
+              <a:rPr lang="en-US" sz="4400" dirty="0">
+                <a:solidFill>
+                  <a:schemeClr val="bg1"/>
+                </a:solidFill>
+              </a:rPr>
+              <a:t>, </a:t>
+            </a:r>
+            <a:r>
+              <a:rPr lang="ru-RU" sz="4400" dirty="0">
+                <a:solidFill>
+                  <a:schemeClr val="bg1"/>
+                </a:solidFill>
+              </a:rPr>
+              <a:t>содержит </a:t>
+            </a:r>
+            <a:r>
+              <a:rPr lang="en-US" sz="4400" dirty="0" err="1">
+                <a:solidFill>
+                  <a:schemeClr val="bg1"/>
+                </a:solidFill>
+              </a:rPr>
+              <a:t>OptionsFrame</a:t>
+            </a:r>
+            <a:endParaRPr lang="ru-RU" sz="4400" dirty="0">
+              <a:solidFill>
+                <a:schemeClr val="bg1"/>
+              </a:solidFill>
+            </a:endParaRPr>
+          </a:p>
+          <a:p>
+            <a:r>
+              <a:rPr lang="en-US" sz="4400" dirty="0" err="1">
+                <a:solidFill>
+                  <a:schemeClr val="bg1"/>
+                </a:solidFill>
+              </a:rPr>
+              <a:t>CipherController</a:t>
+            </a:r>
+            <a:r>
+              <a:rPr lang="en-US" sz="4400" dirty="0">
+                <a:solidFill>
+                  <a:schemeClr val="bg1"/>
+                </a:solidFill>
+              </a:rPr>
+              <a:t> </a:t>
+            </a:r>
+            <a:r>
+              <a:rPr lang="ru-RU" sz="4400" dirty="0">
+                <a:solidFill>
+                  <a:schemeClr val="bg1"/>
+                </a:solidFill>
+              </a:rPr>
+              <a:t>работает с </a:t>
+            </a:r>
+            <a:r>
+              <a:rPr lang="en-US" sz="4400" dirty="0">
+                <a:solidFill>
+                  <a:schemeClr val="bg1"/>
+                </a:solidFill>
+              </a:rPr>
+              <a:t>Cipher </a:t>
+            </a:r>
+            <a:r>
+              <a:rPr lang="ru-RU" sz="4400" dirty="0">
+                <a:solidFill>
+                  <a:schemeClr val="bg1"/>
+                </a:solidFill>
+              </a:rPr>
+              <a:t>и </a:t>
+            </a:r>
+            <a:r>
+              <a:rPr lang="en-US" sz="4400" dirty="0" err="1">
+                <a:solidFill>
+                  <a:schemeClr val="bg1"/>
+                </a:solidFill>
+              </a:rPr>
+              <a:t>TextModel</a:t>
+            </a:r>
+            <a:endParaRPr lang="ru-RU" sz="4400" dirty="0">
+              <a:solidFill>
+                <a:schemeClr val="bg1"/>
+              </a:solidFill>
+            </a:endParaRPr>
+          </a:p>
+          <a:p>
+            <a:r>
+              <a:rPr lang="en-US" sz="4400" dirty="0" err="1">
+                <a:solidFill>
+                  <a:schemeClr val="bg1"/>
+                </a:solidFill>
+              </a:rPr>
+              <a:t>VernamCipher</a:t>
+            </a:r>
+            <a:r>
+              <a:rPr lang="en-US" sz="4400" dirty="0">
+                <a:solidFill>
+                  <a:schemeClr val="bg1"/>
+                </a:solidFill>
+              </a:rPr>
+              <a:t> </a:t>
+            </a:r>
+            <a:r>
+              <a:rPr lang="ru-RU" sz="4400" dirty="0">
+                <a:solidFill>
+                  <a:schemeClr val="bg1"/>
+                </a:solidFill>
+              </a:rPr>
+              <a:t>наследует </a:t>
+            </a:r>
+            <a:r>
+              <a:rPr lang="en-US" sz="4400" dirty="0">
+                <a:solidFill>
+                  <a:schemeClr val="bg1"/>
+                </a:solidFill>
+              </a:rPr>
+              <a:t>Cipher</a:t>
+            </a:r>
+            <a:endParaRPr lang="ru-RU" sz="4400" dirty="0">
+              <a:solidFill>
+                <a:schemeClr val="bg1"/>
+              </a:solidFill>
+            </a:endParaRPr>
+          </a:p>
+          <a:p>
+            <a:r>
+              <a:rPr lang="en-US" sz="4400" dirty="0" err="1">
+                <a:solidFill>
+                  <a:schemeClr val="bg1"/>
+                </a:solidFill>
+              </a:rPr>
+              <a:t>OptionsFrame</a:t>
+            </a:r>
+            <a:r>
+              <a:rPr lang="en-US" sz="4400" dirty="0">
+                <a:solidFill>
+                  <a:schemeClr val="bg1"/>
+                </a:solidFill>
+              </a:rPr>
+              <a:t> </a:t>
+            </a:r>
+            <a:r>
+              <a:rPr lang="ru-RU" sz="4400" dirty="0">
+                <a:solidFill>
+                  <a:schemeClr val="bg1"/>
+                </a:solidFill>
+              </a:rPr>
+              <a:t>отвечает только за интерфейс</a:t>
+            </a:r>
+          </a:p>
+        </p:txBody>
+      </p:sp>
+    </p:spTree>
+    <p:extLst>
+      <p:ext uri="{BB962C8B-B14F-4D97-AF65-F5344CB8AC3E}">
+        <p14:creationId xmlns:p14="http://schemas.microsoft.com/office/powerpoint/2010/main" val="3047764445"/>
+      </p:ext>
+    </p:extLst>
+  </p:cSld>
+  <p:clrMapOvr>
+    <a:masterClrMapping/>
+  </p:clrMapOvr>
+</p:sld>
+</file>
+
+<file path=ppt/slides/slide15.xml><?xml version="1.0" encoding="utf-8"?>
+<p:sld xmlns:a="http://schemas.openxmlformats.org/drawingml/2006/main" xmlns:r="http://schemas.openxmlformats.org/officeDocument/2006/relationships" xmlns:p="http://schemas.openxmlformats.org/presentationml/2006/main">
+  <p:cSld>
+    <p:spTree>
+      <p:nvGrpSpPr>
+        <p:cNvPr id="1" name="">
+          <a:extLst>
+            <a:ext uri="{FF2B5EF4-FFF2-40B4-BE49-F238E27FC236}">
               <a16:creationId xmlns:a16="http://schemas.microsoft.com/office/drawing/2014/main" id="{AE1642EC-B949-79A3-B5C5-2C35C061EFB3}"/>
             </a:ext>
           </a:extLst>
@@ -5246,7 +8577,7 @@
         <p:spPr>
           <a:xfrm>
             <a:off x="838200" y="1613039"/>
-            <a:ext cx="10515600" cy="4093428"/>
+            <a:ext cx="10515600" cy="2246769"/>
           </a:xfrm>
           <a:prstGeom prst="rect">
             <a:avLst/>
@@ -5281,7 +8612,7 @@
                   <a:schemeClr val="bg1"/>
                 </a:solidFill>
               </a:rPr>
-              <a:t>», предназначенный для шифрования и дешифрования данных с использованием симметричного алгоритма на основе операции XOR.В процессе работы были определены требования к программе и реализован алгоритм преобразования текста, основанный на посимвольной обработке и применении операции XOR. Программа позволяет выполнять шифрование и дешифрование с использованием одного и того же алгоритма, что упрощает работу с данными.</a:t>
+              <a:t>» для шифрования и дешифрования текста на основе операции XOR.</a:t>
             </a:r>
             <a:r>
               <a:rPr lang="en-US" sz="2000" dirty="0">
@@ -5297,7 +8628,7 @@
                   <a:schemeClr val="bg1"/>
                 </a:solidFill>
               </a:rPr>
-              <a:t>Пользователь может ввести исходный текст и задать ключ шифрования, включая возможность генерации случайного ключа. При выполнении операции каждый символ текста преобразуется, что обеспечивает получение зашифрованного результата и его последующее восстановление.</a:t>
+              <a:t>Реализован алгоритм посимвольного преобразования, позволяющий использовать один и тот же метод как для шифрования, так и для дешифрования. Пользователь может вводить текст и задавать ключ, включая его случайную генерацию.</a:t>
             </a:r>
             <a:r>
               <a:rPr lang="en-US" sz="2000" dirty="0">
@@ -5313,23 +8644,7 @@
                   <a:schemeClr val="bg1"/>
                 </a:solidFill>
               </a:rPr>
-              <a:t>Проведённое тестирование показало корректную работу всех функций программы. Все основные сценарии использования были успешно реализованы.</a:t>
-            </a:r>
-            <a:r>
-              <a:rPr lang="en-US" sz="2000" dirty="0">
-                <a:solidFill>
-                  <a:schemeClr val="bg1"/>
-                </a:solidFill>
-              </a:rPr>
-              <a:t> </a:t>
-            </a:r>
-            <a:r>
-              <a:rPr lang="ru-RU" sz="2000" dirty="0">
-                <a:solidFill>
-                  <a:schemeClr val="bg1"/>
-                </a:solidFill>
-              </a:rPr>
-              <a:t>Поставленные цель и задачи проекта достигнуты. Разработанное приложение функционирует стабильно и может применяться для базовой защиты текстовой информации.</a:t>
+              <a:t>Тестирование подтвердило корректную работу программы. Поставленные цели достигнуты, приложение работает стабильно и может использоваться для базовой защиты текстовой информации.</a:t>
             </a:r>
           </a:p>
         </p:txBody>
@@ -5347,7 +8662,7 @@
 </p:sld>
 </file>
 
-<file path=ppt/slides/slide12.xml><?xml version="1.0" encoding="utf-8"?>
+<file path=ppt/slides/slide16.xml><?xml version="1.0" encoding="utf-8"?>
 <p:sld xmlns:a="http://schemas.openxmlformats.org/drawingml/2006/main" xmlns:r="http://schemas.openxmlformats.org/officeDocument/2006/relationships" xmlns:p="http://schemas.openxmlformats.org/presentationml/2006/main">
   <p:cSld>
     <p:spTree>

--- a/proekt1.pptx
+++ b/proekt1.pptx
@@ -19,9 +19,9 @@
     <p:sldId id="276" r:id="rId10"/>
     <p:sldId id="277" r:id="rId11"/>
     <p:sldId id="281" r:id="rId12"/>
-    <p:sldId id="284" r:id="rId13"/>
-    <p:sldId id="282" r:id="rId14"/>
-    <p:sldId id="283" r:id="rId15"/>
+    <p:sldId id="282" r:id="rId13"/>
+    <p:sldId id="283" r:id="rId14"/>
+    <p:sldId id="284" r:id="rId15"/>
     <p:sldId id="269" r:id="rId16"/>
     <p:sldId id="270" r:id="rId17"/>
   </p:sldIdLst>
@@ -212,7 +212,7 @@
           <a:p>
             <a:fld id="{7EA1C4D5-F194-4005-B60F-B7FB925AC96C}" type="datetimeFigureOut">
               <a:rPr lang="ru-RU" smtClean="0"/>
-              <a:t>06.05.2026</a:t>
+              <a:t>07.05.2026</a:t>
             </a:fld>
             <a:endParaRPr lang="ru-RU"/>
           </a:p>
@@ -793,7 +793,7 @@
     </p:spTree>
     <p:extLst>
       <p:ext uri="{BB962C8B-B14F-4D97-AF65-F5344CB8AC3E}">
-        <p14:creationId xmlns:p14="http://schemas.microsoft.com/office/powerpoint/2010/main" val="2512215706"/>
+        <p14:creationId xmlns:p14="http://schemas.microsoft.com/office/powerpoint/2010/main" val="1971267516"/>
       </p:ext>
     </p:extLst>
   </p:cSld>
@@ -901,7 +901,7 @@
     </p:spTree>
     <p:extLst>
       <p:ext uri="{BB962C8B-B14F-4D97-AF65-F5344CB8AC3E}">
-        <p14:creationId xmlns:p14="http://schemas.microsoft.com/office/powerpoint/2010/main" val="1971267516"/>
+        <p14:creationId xmlns:p14="http://schemas.microsoft.com/office/powerpoint/2010/main" val="3961335182"/>
       </p:ext>
     </p:extLst>
   </p:cSld>
@@ -1009,7 +1009,7 @@
     </p:spTree>
     <p:extLst>
       <p:ext uri="{BB962C8B-B14F-4D97-AF65-F5344CB8AC3E}">
-        <p14:creationId xmlns:p14="http://schemas.microsoft.com/office/powerpoint/2010/main" val="3961335182"/>
+        <p14:creationId xmlns:p14="http://schemas.microsoft.com/office/powerpoint/2010/main" val="2512215706"/>
       </p:ext>
     </p:extLst>
   </p:cSld>
@@ -2006,7 +2006,7 @@
           <a:p>
             <a:fld id="{76A2016E-951E-4276-9CFA-C491F5BC6E95}" type="datetimeFigureOut">
               <a:rPr lang="ru-RU" smtClean="0"/>
-              <a:t>06.05.2026</a:t>
+              <a:t>07.05.2026</a:t>
             </a:fld>
             <a:endParaRPr lang="ru-RU"/>
           </a:p>
@@ -2204,7 +2204,7 @@
           <a:p>
             <a:fld id="{76A2016E-951E-4276-9CFA-C491F5BC6E95}" type="datetimeFigureOut">
               <a:rPr lang="ru-RU" smtClean="0"/>
-              <a:t>06.05.2026</a:t>
+              <a:t>07.05.2026</a:t>
             </a:fld>
             <a:endParaRPr lang="ru-RU"/>
           </a:p>
@@ -2412,7 +2412,7 @@
           <a:p>
             <a:fld id="{76A2016E-951E-4276-9CFA-C491F5BC6E95}" type="datetimeFigureOut">
               <a:rPr lang="ru-RU" smtClean="0"/>
-              <a:t>06.05.2026</a:t>
+              <a:t>07.05.2026</a:t>
             </a:fld>
             <a:endParaRPr lang="ru-RU"/>
           </a:p>
@@ -2610,7 +2610,7 @@
           <a:p>
             <a:fld id="{76A2016E-951E-4276-9CFA-C491F5BC6E95}" type="datetimeFigureOut">
               <a:rPr lang="ru-RU" smtClean="0"/>
-              <a:t>06.05.2026</a:t>
+              <a:t>07.05.2026</a:t>
             </a:fld>
             <a:endParaRPr lang="ru-RU"/>
           </a:p>
@@ -2885,7 +2885,7 @@
           <a:p>
             <a:fld id="{76A2016E-951E-4276-9CFA-C491F5BC6E95}" type="datetimeFigureOut">
               <a:rPr lang="ru-RU" smtClean="0"/>
-              <a:t>06.05.2026</a:t>
+              <a:t>07.05.2026</a:t>
             </a:fld>
             <a:endParaRPr lang="ru-RU"/>
           </a:p>
@@ -3150,7 +3150,7 @@
           <a:p>
             <a:fld id="{76A2016E-951E-4276-9CFA-C491F5BC6E95}" type="datetimeFigureOut">
               <a:rPr lang="ru-RU" smtClean="0"/>
-              <a:t>06.05.2026</a:t>
+              <a:t>07.05.2026</a:t>
             </a:fld>
             <a:endParaRPr lang="ru-RU"/>
           </a:p>
@@ -3562,7 +3562,7 @@
           <a:p>
             <a:fld id="{76A2016E-951E-4276-9CFA-C491F5BC6E95}" type="datetimeFigureOut">
               <a:rPr lang="ru-RU" smtClean="0"/>
-              <a:t>06.05.2026</a:t>
+              <a:t>07.05.2026</a:t>
             </a:fld>
             <a:endParaRPr lang="ru-RU"/>
           </a:p>
@@ -3703,7 +3703,7 @@
           <a:p>
             <a:fld id="{76A2016E-951E-4276-9CFA-C491F5BC6E95}" type="datetimeFigureOut">
               <a:rPr lang="ru-RU" smtClean="0"/>
-              <a:t>06.05.2026</a:t>
+              <a:t>07.05.2026</a:t>
             </a:fld>
             <a:endParaRPr lang="ru-RU"/>
           </a:p>
@@ -3816,7 +3816,7 @@
           <a:p>
             <a:fld id="{76A2016E-951E-4276-9CFA-C491F5BC6E95}" type="datetimeFigureOut">
               <a:rPr lang="ru-RU" smtClean="0"/>
-              <a:t>06.05.2026</a:t>
+              <a:t>07.05.2026</a:t>
             </a:fld>
             <a:endParaRPr lang="ru-RU"/>
           </a:p>
@@ -4127,7 +4127,7 @@
           <a:p>
             <a:fld id="{76A2016E-951E-4276-9CFA-C491F5BC6E95}" type="datetimeFigureOut">
               <a:rPr lang="ru-RU" smtClean="0"/>
-              <a:t>06.05.2026</a:t>
+              <a:t>07.05.2026</a:t>
             </a:fld>
             <a:endParaRPr lang="ru-RU"/>
           </a:p>
@@ -4415,7 +4415,7 @@
           <a:p>
             <a:fld id="{76A2016E-951E-4276-9CFA-C491F5BC6E95}" type="datetimeFigureOut">
               <a:rPr lang="ru-RU" smtClean="0"/>
-              <a:t>06.05.2026</a:t>
+              <a:t>07.05.2026</a:t>
             </a:fld>
             <a:endParaRPr lang="ru-RU"/>
           </a:p>
@@ -4656,7 +4656,7 @@
           <a:p>
             <a:fld id="{76A2016E-951E-4276-9CFA-C491F5BC6E95}" type="datetimeFigureOut">
               <a:rPr lang="ru-RU" smtClean="0"/>
-              <a:t>06.05.2026</a:t>
+              <a:t>07.05.2026</a:t>
             </a:fld>
             <a:endParaRPr lang="ru-RU"/>
           </a:p>
@@ -5939,7 +5939,7 @@
         </p:nvSpPr>
         <p:spPr>
           <a:xfrm>
-            <a:off x="838200" y="469994"/>
+            <a:off x="883192" y="449660"/>
             <a:ext cx="10515600" cy="358775"/>
           </a:xfrm>
           <a:prstGeom prst="rect">
@@ -5972,12 +5972,12 @@
           <a:p>
             <a:pPr algn="ctr"/>
             <a:r>
-              <a:rPr lang="ru-RU" sz="4800" dirty="0">
-                <a:solidFill>
-                  <a:schemeClr val="bg1"/>
-                </a:solidFill>
-              </a:rPr>
-              <a:t>Структура программы</a:t>
+              <a:rPr lang="ru-RU" sz="7200" b="1" dirty="0">
+                <a:solidFill>
+                  <a:schemeClr val="bg1"/>
+                </a:solidFill>
+              </a:rPr>
+              <a:t>Основные классы</a:t>
             </a:r>
           </a:p>
         </p:txBody>
@@ -6037,6 +6037,868 @@
           </a:p>
         </p:txBody>
       </p:sp>
+      <p:sp>
+        <p:nvSpPr>
+          <p:cNvPr id="10" name="TextBox 9">
+            <a:extLst>
+              <a:ext uri="{FF2B5EF4-FFF2-40B4-BE49-F238E27FC236}">
+                <a16:creationId xmlns:a16="http://schemas.microsoft.com/office/drawing/2014/main" id="{ACBC5EE2-E8A3-B76E-2A0C-30C9E610ED57}"/>
+              </a:ext>
+            </a:extLst>
+          </p:cNvPr>
+          <p:cNvSpPr txBox="1"/>
+          <p:nvPr/>
+        </p:nvSpPr>
+        <p:spPr>
+          <a:xfrm>
+            <a:off x="2904498" y="1145361"/>
+            <a:ext cx="6472988" cy="5262979"/>
+          </a:xfrm>
+          <a:prstGeom prst="rect">
+            <a:avLst/>
+          </a:prstGeom>
+          <a:noFill/>
+        </p:spPr>
+        <p:txBody>
+          <a:bodyPr wrap="square">
+            <a:spAutoFit/>
+          </a:bodyPr>
+          <a:lstStyle/>
+          <a:p>
+            <a:r>
+              <a:rPr lang="en-US" sz="2800" dirty="0">
+                <a:solidFill>
+                  <a:schemeClr val="bg1"/>
+                </a:solidFill>
+              </a:rPr>
+              <a:t>Cipher — </a:t>
+            </a:r>
+            <a:r>
+              <a:rPr lang="ru-RU" sz="2800" dirty="0">
+                <a:solidFill>
+                  <a:schemeClr val="bg1"/>
+                </a:solidFill>
+              </a:rPr>
+              <a:t>абстрактный класс, задаёт интерфейс метода </a:t>
+            </a:r>
+            <a:r>
+              <a:rPr lang="en-US" sz="2800" dirty="0">
+                <a:solidFill>
+                  <a:schemeClr val="bg1"/>
+                </a:solidFill>
+              </a:rPr>
+              <a:t>process()</a:t>
+            </a:r>
+            <a:endParaRPr lang="ru-RU" sz="2800" dirty="0">
+              <a:solidFill>
+                <a:schemeClr val="bg1"/>
+              </a:solidFill>
+            </a:endParaRPr>
+          </a:p>
+          <a:p>
+            <a:r>
+              <a:rPr lang="en-US" sz="2800" dirty="0" err="1">
+                <a:solidFill>
+                  <a:schemeClr val="bg1"/>
+                </a:solidFill>
+              </a:rPr>
+              <a:t>VernamCipher</a:t>
+            </a:r>
+            <a:r>
+              <a:rPr lang="en-US" sz="2800" dirty="0">
+                <a:solidFill>
+                  <a:schemeClr val="bg1"/>
+                </a:solidFill>
+              </a:rPr>
+              <a:t> — </a:t>
+            </a:r>
+            <a:r>
+              <a:rPr lang="ru-RU" sz="2800" dirty="0">
+                <a:solidFill>
+                  <a:schemeClr val="bg1"/>
+                </a:solidFill>
+              </a:rPr>
+              <a:t>реализует алгоритм шифрования (</a:t>
+            </a:r>
+            <a:r>
+              <a:rPr lang="en-US" sz="2800" dirty="0">
+                <a:solidFill>
+                  <a:schemeClr val="bg1"/>
+                </a:solidFill>
+              </a:rPr>
+              <a:t>XOR/</a:t>
+            </a:r>
+            <a:r>
+              <a:rPr lang="ru-RU" sz="2800" dirty="0">
+                <a:solidFill>
+                  <a:schemeClr val="bg1"/>
+                </a:solidFill>
+              </a:rPr>
+              <a:t>Вернам)</a:t>
+            </a:r>
+          </a:p>
+          <a:p>
+            <a:r>
+              <a:rPr lang="en-US" sz="2800" dirty="0" err="1">
+                <a:solidFill>
+                  <a:schemeClr val="bg1"/>
+                </a:solidFill>
+              </a:rPr>
+              <a:t>TextModel</a:t>
+            </a:r>
+            <a:r>
+              <a:rPr lang="en-US" sz="2800" dirty="0">
+                <a:solidFill>
+                  <a:schemeClr val="bg1"/>
+                </a:solidFill>
+              </a:rPr>
+              <a:t> — </a:t>
+            </a:r>
+            <a:r>
+              <a:rPr lang="ru-RU" sz="2800" dirty="0">
+                <a:solidFill>
+                  <a:schemeClr val="bg1"/>
+                </a:solidFill>
+              </a:rPr>
+              <a:t>хранит текст (</a:t>
+            </a:r>
+            <a:r>
+              <a:rPr lang="en-US" sz="2800" dirty="0" err="1">
+                <a:solidFill>
+                  <a:schemeClr val="bg1"/>
+                </a:solidFill>
+              </a:rPr>
+              <a:t>set_text</a:t>
+            </a:r>
+            <a:r>
+              <a:rPr lang="en-US" sz="2800" dirty="0">
+                <a:solidFill>
+                  <a:schemeClr val="bg1"/>
+                </a:solidFill>
+              </a:rPr>
+              <a:t>, </a:t>
+            </a:r>
+            <a:r>
+              <a:rPr lang="en-US" sz="2800" dirty="0" err="1">
+                <a:solidFill>
+                  <a:schemeClr val="bg1"/>
+                </a:solidFill>
+              </a:rPr>
+              <a:t>get_text</a:t>
+            </a:r>
+            <a:r>
+              <a:rPr lang="en-US" sz="2800" dirty="0">
+                <a:solidFill>
+                  <a:schemeClr val="bg1"/>
+                </a:solidFill>
+              </a:rPr>
+              <a:t>)</a:t>
+            </a:r>
+            <a:endParaRPr lang="ru-RU" sz="2800" dirty="0">
+              <a:solidFill>
+                <a:schemeClr val="bg1"/>
+              </a:solidFill>
+            </a:endParaRPr>
+          </a:p>
+          <a:p>
+            <a:r>
+              <a:rPr lang="en-US" sz="2800" dirty="0" err="1">
+                <a:solidFill>
+                  <a:schemeClr val="bg1"/>
+                </a:solidFill>
+              </a:rPr>
+              <a:t>CipherController</a:t>
+            </a:r>
+            <a:r>
+              <a:rPr lang="en-US" sz="2800" dirty="0">
+                <a:solidFill>
+                  <a:schemeClr val="bg1"/>
+                </a:solidFill>
+              </a:rPr>
+              <a:t> — </a:t>
+            </a:r>
+            <a:r>
+              <a:rPr lang="ru-RU" sz="2800" dirty="0">
+                <a:solidFill>
+                  <a:schemeClr val="bg1"/>
+                </a:solidFill>
+              </a:rPr>
+              <a:t>связывает модель и алгоритм (</a:t>
+            </a:r>
+            <a:r>
+              <a:rPr lang="en-US" sz="2800" dirty="0">
+                <a:solidFill>
+                  <a:schemeClr val="bg1"/>
+                </a:solidFill>
+              </a:rPr>
+              <a:t>encrypt)</a:t>
+            </a:r>
+            <a:endParaRPr lang="ru-RU" sz="2800" dirty="0">
+              <a:solidFill>
+                <a:schemeClr val="bg1"/>
+              </a:solidFill>
+            </a:endParaRPr>
+          </a:p>
+          <a:p>
+            <a:r>
+              <a:rPr lang="en-US" sz="2800" dirty="0" err="1">
+                <a:solidFill>
+                  <a:schemeClr val="bg1"/>
+                </a:solidFill>
+              </a:rPr>
+              <a:t>OptionsFrame</a:t>
+            </a:r>
+            <a:r>
+              <a:rPr lang="en-US" sz="2800" dirty="0">
+                <a:solidFill>
+                  <a:schemeClr val="bg1"/>
+                </a:solidFill>
+              </a:rPr>
+              <a:t> — </a:t>
+            </a:r>
+            <a:r>
+              <a:rPr lang="ru-RU" sz="2800" dirty="0">
+                <a:solidFill>
+                  <a:schemeClr val="bg1"/>
+                </a:solidFill>
+              </a:rPr>
+              <a:t>отвечает за ввод и генерацию ключа</a:t>
+            </a:r>
+          </a:p>
+          <a:p>
+            <a:r>
+              <a:rPr lang="en-US" sz="2800" dirty="0" err="1">
+                <a:solidFill>
+                  <a:schemeClr val="bg1"/>
+                </a:solidFill>
+              </a:rPr>
+              <a:t>CipherApp</a:t>
+            </a:r>
+            <a:r>
+              <a:rPr lang="en-US" sz="2800" dirty="0">
+                <a:solidFill>
+                  <a:schemeClr val="bg1"/>
+                </a:solidFill>
+              </a:rPr>
+              <a:t> — </a:t>
+            </a:r>
+            <a:r>
+              <a:rPr lang="ru-RU" sz="2800" dirty="0">
+                <a:solidFill>
+                  <a:schemeClr val="bg1"/>
+                </a:solidFill>
+              </a:rPr>
+              <a:t>главный класс, объединяет все компоненты</a:t>
+            </a:r>
+          </a:p>
+        </p:txBody>
+      </p:sp>
+    </p:spTree>
+    <p:extLst>
+      <p:ext uri="{BB962C8B-B14F-4D97-AF65-F5344CB8AC3E}">
+        <p14:creationId xmlns:p14="http://schemas.microsoft.com/office/powerpoint/2010/main" val="2603616649"/>
+      </p:ext>
+    </p:extLst>
+  </p:cSld>
+  <p:clrMapOvr>
+    <a:masterClrMapping/>
+  </p:clrMapOvr>
+</p:sld>
+</file>
+
+<file path=ppt/slides/slide13.xml><?xml version="1.0" encoding="utf-8"?>
+<p:sld xmlns:a="http://schemas.openxmlformats.org/drawingml/2006/main" xmlns:r="http://schemas.openxmlformats.org/officeDocument/2006/relationships" xmlns:p="http://schemas.openxmlformats.org/presentationml/2006/main">
+  <p:cSld>
+    <p:spTree>
+      <p:nvGrpSpPr>
+        <p:cNvPr id="1" name="">
+          <a:extLst>
+            <a:ext uri="{FF2B5EF4-FFF2-40B4-BE49-F238E27FC236}">
+              <a16:creationId xmlns:a16="http://schemas.microsoft.com/office/drawing/2014/main" id="{6B1EA241-3A0B-F48D-DF24-41203B41C8FD}"/>
+            </a:ext>
+          </a:extLst>
+        </p:cNvPr>
+        <p:cNvGrpSpPr/>
+        <p:nvPr/>
+      </p:nvGrpSpPr>
+      <p:grpSpPr>
+        <a:xfrm>
+          <a:off x="0" y="0"/>
+          <a:ext cx="0" cy="0"/>
+          <a:chOff x="0" y="0"/>
+          <a:chExt cx="0" cy="0"/>
+        </a:xfrm>
+      </p:grpSpPr>
+      <p:pic>
+        <p:nvPicPr>
+          <p:cNvPr id="6" name="Объект 5">
+            <a:extLst>
+              <a:ext uri="{FF2B5EF4-FFF2-40B4-BE49-F238E27FC236}">
+                <a16:creationId xmlns:a16="http://schemas.microsoft.com/office/drawing/2014/main" id="{678B5A6C-C803-EEE4-2B91-BA56A4CFAD53}"/>
+              </a:ext>
+            </a:extLst>
+          </p:cNvPr>
+          <p:cNvPicPr>
+            <a:picLocks noGrp="1"/>
+          </p:cNvPicPr>
+          <p:nvPr>
+            <p:ph idx="1"/>
+          </p:nvPr>
+        </p:nvPicPr>
+        <p:blipFill>
+          <a:blip r:embed="rId3">
+            <a:extLst>
+              <a:ext uri="{28A0092B-C50C-407E-A947-70E740481C1C}">
+                <a14:useLocalDpi xmlns:a14="http://schemas.microsoft.com/office/drawing/2010/main" val="0"/>
+              </a:ext>
+            </a:extLst>
+          </a:blip>
+          <a:stretch>
+            <a:fillRect/>
+          </a:stretch>
+        </p:blipFill>
+        <p:spPr>
+          <a:xfrm>
+            <a:off x="0" y="0"/>
+            <a:ext cx="12192000" cy="6934200"/>
+          </a:xfrm>
+        </p:spPr>
+      </p:pic>
+      <p:sp>
+        <p:nvSpPr>
+          <p:cNvPr id="3" name="Заголовок 1">
+            <a:extLst>
+              <a:ext uri="{FF2B5EF4-FFF2-40B4-BE49-F238E27FC236}">
+                <a16:creationId xmlns:a16="http://schemas.microsoft.com/office/drawing/2014/main" id="{6212C54A-A273-C375-0141-AEA49448614B}"/>
+              </a:ext>
+            </a:extLst>
+          </p:cNvPr>
+          <p:cNvSpPr txBox="1">
+            <a:spLocks/>
+          </p:cNvSpPr>
+          <p:nvPr/>
+        </p:nvSpPr>
+        <p:spPr>
+          <a:xfrm>
+            <a:off x="838200" y="469994"/>
+            <a:ext cx="10515600" cy="358775"/>
+          </a:xfrm>
+          <a:prstGeom prst="rect">
+            <a:avLst/>
+          </a:prstGeom>
+        </p:spPr>
+        <p:txBody>
+          <a:bodyPr vert="horz" lIns="91440" tIns="45720" rIns="91440" bIns="45720" rtlCol="0" anchor="ctr">
+            <a:noAutofit/>
+          </a:bodyPr>
+          <a:lstStyle>
+            <a:lvl1pPr algn="l" defTabSz="914400" rtl="0" eaLnBrk="1" latinLnBrk="0" hangingPunct="1">
+              <a:lnSpc>
+                <a:spcPct val="90000"/>
+              </a:lnSpc>
+              <a:spcBef>
+                <a:spcPct val="0"/>
+              </a:spcBef>
+              <a:buNone/>
+              <a:defRPr sz="4400" kern="1200">
+                <a:solidFill>
+                  <a:schemeClr val="tx1"/>
+                </a:solidFill>
+                <a:latin typeface="+mj-lt"/>
+                <a:ea typeface="+mj-ea"/>
+                <a:cs typeface="+mj-cs"/>
+              </a:defRPr>
+            </a:lvl1pPr>
+          </a:lstStyle>
+          <a:p>
+            <a:pPr algn="ctr"/>
+            <a:r>
+              <a:rPr lang="ru-RU" sz="7200" dirty="0">
+                <a:solidFill>
+                  <a:schemeClr val="bg1"/>
+                </a:solidFill>
+              </a:rPr>
+              <a:t>Связи между классами</a:t>
+            </a:r>
+          </a:p>
+        </p:txBody>
+      </p:sp>
+      <p:sp>
+        <p:nvSpPr>
+          <p:cNvPr id="8" name="Заголовок 4">
+            <a:extLst>
+              <a:ext uri="{FF2B5EF4-FFF2-40B4-BE49-F238E27FC236}">
+                <a16:creationId xmlns:a16="http://schemas.microsoft.com/office/drawing/2014/main" id="{C302C663-4600-B640-F601-07992A726ED0}"/>
+              </a:ext>
+            </a:extLst>
+          </p:cNvPr>
+          <p:cNvSpPr txBox="1">
+            <a:spLocks/>
+          </p:cNvSpPr>
+          <p:nvPr/>
+        </p:nvSpPr>
+        <p:spPr>
+          <a:xfrm>
+            <a:off x="883192" y="1910831"/>
+            <a:ext cx="5981194" cy="2960138"/>
+          </a:xfrm>
+          <a:prstGeom prst="rect">
+            <a:avLst/>
+          </a:prstGeom>
+        </p:spPr>
+        <p:txBody>
+          <a:bodyPr vert="horz" lIns="91440" tIns="45720" rIns="91440" bIns="45720" rtlCol="0" anchor="ctr">
+            <a:noAutofit/>
+          </a:bodyPr>
+          <a:lstStyle>
+            <a:lvl1pPr algn="l" defTabSz="914400" rtl="0" eaLnBrk="1" latinLnBrk="0" hangingPunct="1">
+              <a:lnSpc>
+                <a:spcPct val="90000"/>
+              </a:lnSpc>
+              <a:spcBef>
+                <a:spcPct val="0"/>
+              </a:spcBef>
+              <a:buNone/>
+              <a:defRPr sz="4400" kern="1200">
+                <a:solidFill>
+                  <a:schemeClr val="tx1"/>
+                </a:solidFill>
+                <a:latin typeface="+mj-lt"/>
+                <a:ea typeface="+mj-ea"/>
+                <a:cs typeface="+mj-cs"/>
+              </a:defRPr>
+            </a:lvl1pPr>
+          </a:lstStyle>
+          <a:p>
+            <a:endParaRPr lang="ru-RU" sz="2800" dirty="0">
+              <a:solidFill>
+                <a:schemeClr val="bg1"/>
+              </a:solidFill>
+            </a:endParaRPr>
+          </a:p>
+        </p:txBody>
+      </p:sp>
+      <p:sp>
+        <p:nvSpPr>
+          <p:cNvPr id="10" name="TextBox 9">
+            <a:extLst>
+              <a:ext uri="{FF2B5EF4-FFF2-40B4-BE49-F238E27FC236}">
+                <a16:creationId xmlns:a16="http://schemas.microsoft.com/office/drawing/2014/main" id="{ACBC5EE2-E8A3-B76E-2A0C-30C9E610ED57}"/>
+              </a:ext>
+            </a:extLst>
+          </p:cNvPr>
+          <p:cNvSpPr txBox="1"/>
+          <p:nvPr/>
+        </p:nvSpPr>
+        <p:spPr>
+          <a:xfrm>
+            <a:off x="883193" y="1374963"/>
+            <a:ext cx="10891712" cy="2246769"/>
+          </a:xfrm>
+          <a:prstGeom prst="rect">
+            <a:avLst/>
+          </a:prstGeom>
+          <a:noFill/>
+        </p:spPr>
+        <p:txBody>
+          <a:bodyPr wrap="square">
+            <a:spAutoFit/>
+          </a:bodyPr>
+          <a:lstStyle/>
+          <a:p>
+            <a:r>
+              <a:rPr lang="en-US" sz="2800" dirty="0" err="1">
+                <a:solidFill>
+                  <a:schemeClr val="bg1"/>
+                </a:solidFill>
+              </a:rPr>
+              <a:t>CipherApp</a:t>
+            </a:r>
+            <a:r>
+              <a:rPr lang="en-US" sz="2800" dirty="0">
+                <a:solidFill>
+                  <a:schemeClr val="bg1"/>
+                </a:solidFill>
+              </a:rPr>
+              <a:t> </a:t>
+            </a:r>
+            <a:r>
+              <a:rPr lang="ru-RU" sz="2800" dirty="0">
+                <a:solidFill>
+                  <a:schemeClr val="bg1"/>
+                </a:solidFill>
+              </a:rPr>
+              <a:t>использует </a:t>
+            </a:r>
+            <a:r>
+              <a:rPr lang="en-US" sz="2800" dirty="0" err="1">
+                <a:solidFill>
+                  <a:schemeClr val="bg1"/>
+                </a:solidFill>
+              </a:rPr>
+              <a:t>CipherController</a:t>
+            </a:r>
+            <a:r>
+              <a:rPr lang="en-US" sz="2800" dirty="0">
+                <a:solidFill>
+                  <a:schemeClr val="bg1"/>
+                </a:solidFill>
+              </a:rPr>
+              <a:t> </a:t>
+            </a:r>
+            <a:r>
+              <a:rPr lang="ru-RU" sz="2800" dirty="0">
+                <a:solidFill>
+                  <a:schemeClr val="bg1"/>
+                </a:solidFill>
+              </a:rPr>
+              <a:t>и </a:t>
+            </a:r>
+            <a:r>
+              <a:rPr lang="en-US" sz="2800" dirty="0" err="1">
+                <a:solidFill>
+                  <a:schemeClr val="bg1"/>
+                </a:solidFill>
+              </a:rPr>
+              <a:t>TextModel</a:t>
+            </a:r>
+            <a:r>
+              <a:rPr lang="en-US" sz="2800" dirty="0">
+                <a:solidFill>
+                  <a:schemeClr val="bg1"/>
+                </a:solidFill>
+              </a:rPr>
+              <a:t>, </a:t>
+            </a:r>
+            <a:r>
+              <a:rPr lang="ru-RU" sz="2800" dirty="0">
+                <a:solidFill>
+                  <a:schemeClr val="bg1"/>
+                </a:solidFill>
+              </a:rPr>
+              <a:t>содержит </a:t>
+            </a:r>
+            <a:r>
+              <a:rPr lang="en-US" sz="2800" dirty="0" err="1">
+                <a:solidFill>
+                  <a:schemeClr val="bg1"/>
+                </a:solidFill>
+              </a:rPr>
+              <a:t>OptionsFrame</a:t>
+            </a:r>
+            <a:endParaRPr lang="ru-RU" sz="2800" dirty="0">
+              <a:solidFill>
+                <a:schemeClr val="bg1"/>
+              </a:solidFill>
+            </a:endParaRPr>
+          </a:p>
+          <a:p>
+            <a:r>
+              <a:rPr lang="en-US" sz="2800" dirty="0" err="1">
+                <a:solidFill>
+                  <a:schemeClr val="bg1"/>
+                </a:solidFill>
+              </a:rPr>
+              <a:t>CipherController</a:t>
+            </a:r>
+            <a:r>
+              <a:rPr lang="en-US" sz="2800" dirty="0">
+                <a:solidFill>
+                  <a:schemeClr val="bg1"/>
+                </a:solidFill>
+              </a:rPr>
+              <a:t> </a:t>
+            </a:r>
+            <a:r>
+              <a:rPr lang="ru-RU" sz="2800" dirty="0">
+                <a:solidFill>
+                  <a:schemeClr val="bg1"/>
+                </a:solidFill>
+              </a:rPr>
+              <a:t>работает с </a:t>
+            </a:r>
+            <a:r>
+              <a:rPr lang="en-US" sz="2800" dirty="0">
+                <a:solidFill>
+                  <a:schemeClr val="bg1"/>
+                </a:solidFill>
+              </a:rPr>
+              <a:t>Cipher </a:t>
+            </a:r>
+            <a:r>
+              <a:rPr lang="ru-RU" sz="2800" dirty="0">
+                <a:solidFill>
+                  <a:schemeClr val="bg1"/>
+                </a:solidFill>
+              </a:rPr>
+              <a:t>и </a:t>
+            </a:r>
+            <a:r>
+              <a:rPr lang="en-US" sz="2800" dirty="0" err="1">
+                <a:solidFill>
+                  <a:schemeClr val="bg1"/>
+                </a:solidFill>
+              </a:rPr>
+              <a:t>TextModel</a:t>
+            </a:r>
+            <a:endParaRPr lang="ru-RU" sz="2800" dirty="0">
+              <a:solidFill>
+                <a:schemeClr val="bg1"/>
+              </a:solidFill>
+            </a:endParaRPr>
+          </a:p>
+          <a:p>
+            <a:r>
+              <a:rPr lang="en-US" sz="2800" dirty="0" err="1">
+                <a:solidFill>
+                  <a:schemeClr val="bg1"/>
+                </a:solidFill>
+              </a:rPr>
+              <a:t>VernamCipher</a:t>
+            </a:r>
+            <a:r>
+              <a:rPr lang="en-US" sz="2800" dirty="0">
+                <a:solidFill>
+                  <a:schemeClr val="bg1"/>
+                </a:solidFill>
+              </a:rPr>
+              <a:t> </a:t>
+            </a:r>
+            <a:r>
+              <a:rPr lang="ru-RU" sz="2800" dirty="0">
+                <a:solidFill>
+                  <a:schemeClr val="bg1"/>
+                </a:solidFill>
+              </a:rPr>
+              <a:t>наследует </a:t>
+            </a:r>
+            <a:r>
+              <a:rPr lang="en-US" sz="2800" dirty="0">
+                <a:solidFill>
+                  <a:schemeClr val="bg1"/>
+                </a:solidFill>
+              </a:rPr>
+              <a:t>Cipher</a:t>
+            </a:r>
+            <a:endParaRPr lang="ru-RU" sz="2800" dirty="0">
+              <a:solidFill>
+                <a:schemeClr val="bg1"/>
+              </a:solidFill>
+            </a:endParaRPr>
+          </a:p>
+          <a:p>
+            <a:r>
+              <a:rPr lang="en-US" sz="2800" dirty="0" err="1">
+                <a:solidFill>
+                  <a:schemeClr val="bg1"/>
+                </a:solidFill>
+              </a:rPr>
+              <a:t>OptionsFrame</a:t>
+            </a:r>
+            <a:r>
+              <a:rPr lang="en-US" sz="2800" dirty="0">
+                <a:solidFill>
+                  <a:schemeClr val="bg1"/>
+                </a:solidFill>
+              </a:rPr>
+              <a:t> </a:t>
+            </a:r>
+            <a:r>
+              <a:rPr lang="ru-RU" sz="2800" dirty="0">
+                <a:solidFill>
+                  <a:schemeClr val="bg1"/>
+                </a:solidFill>
+              </a:rPr>
+              <a:t>отвечает только за интерфейс</a:t>
+            </a:r>
+          </a:p>
+        </p:txBody>
+      </p:sp>
+    </p:spTree>
+    <p:extLst>
+      <p:ext uri="{BB962C8B-B14F-4D97-AF65-F5344CB8AC3E}">
+        <p14:creationId xmlns:p14="http://schemas.microsoft.com/office/powerpoint/2010/main" val="3047764445"/>
+      </p:ext>
+    </p:extLst>
+  </p:cSld>
+  <p:clrMapOvr>
+    <a:masterClrMapping/>
+  </p:clrMapOvr>
+</p:sld>
+</file>
+
+<file path=ppt/slides/slide14.xml><?xml version="1.0" encoding="utf-8"?>
+<p:sld xmlns:a="http://schemas.openxmlformats.org/drawingml/2006/main" xmlns:r="http://schemas.openxmlformats.org/officeDocument/2006/relationships" xmlns:p="http://schemas.openxmlformats.org/presentationml/2006/main">
+  <p:cSld>
+    <p:spTree>
+      <p:nvGrpSpPr>
+        <p:cNvPr id="1" name="">
+          <a:extLst>
+            <a:ext uri="{FF2B5EF4-FFF2-40B4-BE49-F238E27FC236}">
+              <a16:creationId xmlns:a16="http://schemas.microsoft.com/office/drawing/2014/main" id="{6B1EA241-3A0B-F48D-DF24-41203B41C8FD}"/>
+            </a:ext>
+          </a:extLst>
+        </p:cNvPr>
+        <p:cNvGrpSpPr/>
+        <p:nvPr/>
+      </p:nvGrpSpPr>
+      <p:grpSpPr>
+        <a:xfrm>
+          <a:off x="0" y="0"/>
+          <a:ext cx="0" cy="0"/>
+          <a:chOff x="0" y="0"/>
+          <a:chExt cx="0" cy="0"/>
+        </a:xfrm>
+      </p:grpSpPr>
+      <p:pic>
+        <p:nvPicPr>
+          <p:cNvPr id="6" name="Объект 5">
+            <a:extLst>
+              <a:ext uri="{FF2B5EF4-FFF2-40B4-BE49-F238E27FC236}">
+                <a16:creationId xmlns:a16="http://schemas.microsoft.com/office/drawing/2014/main" id="{678B5A6C-C803-EEE4-2B91-BA56A4CFAD53}"/>
+              </a:ext>
+            </a:extLst>
+          </p:cNvPr>
+          <p:cNvPicPr>
+            <a:picLocks noGrp="1"/>
+          </p:cNvPicPr>
+          <p:nvPr>
+            <p:ph idx="1"/>
+          </p:nvPr>
+        </p:nvPicPr>
+        <p:blipFill>
+          <a:blip r:embed="rId3">
+            <a:extLst>
+              <a:ext uri="{28A0092B-C50C-407E-A947-70E740481C1C}">
+                <a14:useLocalDpi xmlns:a14="http://schemas.microsoft.com/office/drawing/2010/main" val="0"/>
+              </a:ext>
+            </a:extLst>
+          </a:blip>
+          <a:stretch>
+            <a:fillRect/>
+          </a:stretch>
+        </p:blipFill>
+        <p:spPr>
+          <a:xfrm>
+            <a:off x="0" y="0"/>
+            <a:ext cx="12192000" cy="6934200"/>
+          </a:xfrm>
+        </p:spPr>
+      </p:pic>
+      <p:sp>
+        <p:nvSpPr>
+          <p:cNvPr id="3" name="Заголовок 1">
+            <a:extLst>
+              <a:ext uri="{FF2B5EF4-FFF2-40B4-BE49-F238E27FC236}">
+                <a16:creationId xmlns:a16="http://schemas.microsoft.com/office/drawing/2014/main" id="{6212C54A-A273-C375-0141-AEA49448614B}"/>
+              </a:ext>
+            </a:extLst>
+          </p:cNvPr>
+          <p:cNvSpPr txBox="1">
+            <a:spLocks/>
+          </p:cNvSpPr>
+          <p:nvPr/>
+        </p:nvSpPr>
+        <p:spPr>
+          <a:xfrm>
+            <a:off x="838200" y="265633"/>
+            <a:ext cx="10515600" cy="358775"/>
+          </a:xfrm>
+          <a:prstGeom prst="rect">
+            <a:avLst/>
+          </a:prstGeom>
+        </p:spPr>
+        <p:txBody>
+          <a:bodyPr vert="horz" lIns="91440" tIns="45720" rIns="91440" bIns="45720" rtlCol="0" anchor="ctr">
+            <a:noAutofit/>
+          </a:bodyPr>
+          <a:lstStyle>
+            <a:lvl1pPr algn="l" defTabSz="914400" rtl="0" eaLnBrk="1" latinLnBrk="0" hangingPunct="1">
+              <a:lnSpc>
+                <a:spcPct val="90000"/>
+              </a:lnSpc>
+              <a:spcBef>
+                <a:spcPct val="0"/>
+              </a:spcBef>
+              <a:buNone/>
+              <a:defRPr sz="4400" kern="1200">
+                <a:solidFill>
+                  <a:schemeClr val="tx1"/>
+                </a:solidFill>
+                <a:latin typeface="+mj-lt"/>
+                <a:ea typeface="+mj-ea"/>
+                <a:cs typeface="+mj-cs"/>
+              </a:defRPr>
+            </a:lvl1pPr>
+          </a:lstStyle>
+          <a:p>
+            <a:pPr algn="ctr"/>
+            <a:r>
+              <a:rPr lang="ru-RU" sz="4800" dirty="0">
+                <a:solidFill>
+                  <a:schemeClr val="bg1"/>
+                </a:solidFill>
+              </a:rPr>
+              <a:t>Структура программы</a:t>
+            </a:r>
+          </a:p>
+        </p:txBody>
+      </p:sp>
+      <p:sp>
+        <p:nvSpPr>
+          <p:cNvPr id="8" name="Заголовок 4">
+            <a:extLst>
+              <a:ext uri="{FF2B5EF4-FFF2-40B4-BE49-F238E27FC236}">
+                <a16:creationId xmlns:a16="http://schemas.microsoft.com/office/drawing/2014/main" id="{C302C663-4600-B640-F601-07992A726ED0}"/>
+              </a:ext>
+            </a:extLst>
+          </p:cNvPr>
+          <p:cNvSpPr txBox="1">
+            <a:spLocks/>
+          </p:cNvSpPr>
+          <p:nvPr/>
+        </p:nvSpPr>
+        <p:spPr>
+          <a:xfrm>
+            <a:off x="883192" y="1910831"/>
+            <a:ext cx="5981194" cy="2960138"/>
+          </a:xfrm>
+          <a:prstGeom prst="rect">
+            <a:avLst/>
+          </a:prstGeom>
+        </p:spPr>
+        <p:txBody>
+          <a:bodyPr vert="horz" lIns="91440" tIns="45720" rIns="91440" bIns="45720" rtlCol="0" anchor="ctr">
+            <a:noAutofit/>
+          </a:bodyPr>
+          <a:lstStyle>
+            <a:lvl1pPr algn="l" defTabSz="914400" rtl="0" eaLnBrk="1" latinLnBrk="0" hangingPunct="1">
+              <a:lnSpc>
+                <a:spcPct val="90000"/>
+              </a:lnSpc>
+              <a:spcBef>
+                <a:spcPct val="0"/>
+              </a:spcBef>
+              <a:buNone/>
+              <a:defRPr sz="4400" kern="1200">
+                <a:solidFill>
+                  <a:schemeClr val="tx1"/>
+                </a:solidFill>
+                <a:latin typeface="+mj-lt"/>
+                <a:ea typeface="+mj-ea"/>
+                <a:cs typeface="+mj-cs"/>
+              </a:defRPr>
+            </a:lvl1pPr>
+          </a:lstStyle>
+          <a:p>
+            <a:endParaRPr lang="ru-RU" sz="2800" dirty="0">
+              <a:solidFill>
+                <a:schemeClr val="bg1"/>
+              </a:solidFill>
+            </a:endParaRPr>
+          </a:p>
+        </p:txBody>
+      </p:sp>
       <p:graphicFrame>
         <p:nvGraphicFramePr>
           <p:cNvPr id="2" name="Таблица 1">
@@ -6052,13 +6914,13 @@
           <p:nvPr>
             <p:extLst>
               <p:ext uri="{D42A27DB-BD31-4B8C-83A1-F6EECF244321}">
-                <p14:modId xmlns:p14="http://schemas.microsoft.com/office/powerpoint/2010/main" val="1897251301"/>
+                <p14:modId xmlns:p14="http://schemas.microsoft.com/office/powerpoint/2010/main" val="2800981180"/>
               </p:ext>
             </p:extLst>
           </p:nvPr>
         </p:nvGraphicFramePr>
         <p:xfrm>
-          <a:off x="2032000" y="927923"/>
+          <a:off x="2032000" y="814594"/>
           <a:ext cx="2475832" cy="1280160"/>
         </p:xfrm>
         <a:graphic>
@@ -6188,13 +7050,13 @@
           <p:nvPr>
             <p:extLst>
               <p:ext uri="{D42A27DB-BD31-4B8C-83A1-F6EECF244321}">
-                <p14:modId xmlns:p14="http://schemas.microsoft.com/office/powerpoint/2010/main" val="2004377738"/>
+                <p14:modId xmlns:p14="http://schemas.microsoft.com/office/powerpoint/2010/main" val="282057567"/>
               </p:ext>
             </p:extLst>
           </p:nvPr>
         </p:nvGraphicFramePr>
         <p:xfrm>
-          <a:off x="5271746" y="1058838"/>
+          <a:off x="2032000" y="2741097"/>
           <a:ext cx="2475832" cy="1018329"/>
         </p:xfrm>
         <a:graphic>
@@ -6321,15 +7183,15 @@
           </p:cNvPr>
           <p:cNvCxnSpPr>
             <a:cxnSpLocks/>
-            <a:stCxn id="2" idx="3"/>
-            <a:endCxn id="4" idx="1"/>
+            <a:stCxn id="2" idx="2"/>
+            <a:endCxn id="4" idx="0"/>
           </p:cNvCxnSpPr>
           <p:nvPr/>
         </p:nvCxnSpPr>
         <p:spPr>
-          <a:xfrm flipV="1">
-            <a:off x="4507832" y="1568002"/>
-            <a:ext cx="763914" cy="1"/>
+          <a:xfrm>
+            <a:off x="3269916" y="2094754"/>
+            <a:ext cx="0" cy="646343"/>
           </a:xfrm>
           <a:prstGeom prst="straightConnector1">
             <a:avLst/>
@@ -6368,13 +7230,13 @@
           <p:nvPr>
             <p:extLst>
               <p:ext uri="{D42A27DB-BD31-4B8C-83A1-F6EECF244321}">
-                <p14:modId xmlns:p14="http://schemas.microsoft.com/office/powerpoint/2010/main" val="1976503812"/>
+                <p14:modId xmlns:p14="http://schemas.microsoft.com/office/powerpoint/2010/main" val="1790902482"/>
               </p:ext>
             </p:extLst>
           </p:nvPr>
         </p:nvGraphicFramePr>
         <p:xfrm>
-          <a:off x="2032000" y="2780981"/>
+          <a:off x="8740173" y="1304519"/>
           <a:ext cx="2475832" cy="1149244"/>
         </p:xfrm>
         <a:graphic>
@@ -6500,13 +7362,13 @@
           <p:nvPr>
             <p:extLst>
               <p:ext uri="{D42A27DB-BD31-4B8C-83A1-F6EECF244321}">
-                <p14:modId xmlns:p14="http://schemas.microsoft.com/office/powerpoint/2010/main" val="1763512986"/>
+                <p14:modId xmlns:p14="http://schemas.microsoft.com/office/powerpoint/2010/main" val="1213258468"/>
               </p:ext>
             </p:extLst>
           </p:nvPr>
         </p:nvGraphicFramePr>
         <p:xfrm>
-          <a:off x="2032000" y="2502848"/>
+          <a:off x="8740173" y="1026386"/>
           <a:ext cx="2475832" cy="756498"/>
         </p:xfrm>
         <a:graphic>
@@ -6601,13 +7463,15 @@
           </p:cNvPr>
           <p:cNvCxnSpPr>
             <a:cxnSpLocks/>
+            <a:stCxn id="4" idx="2"/>
+            <a:endCxn id="23" idx="1"/>
           </p:cNvCxnSpPr>
           <p:nvPr/>
         </p:nvCxnSpPr>
         <p:spPr>
-          <a:xfrm flipV="1">
-            <a:off x="4507832" y="3257284"/>
-            <a:ext cx="763914" cy="1"/>
+          <a:xfrm>
+            <a:off x="3269916" y="3759426"/>
+            <a:ext cx="1756509" cy="983759"/>
           </a:xfrm>
           <a:prstGeom prst="straightConnector1">
             <a:avLst/>
@@ -6646,13 +7510,13 @@
           <p:nvPr>
             <p:extLst>
               <p:ext uri="{D42A27DB-BD31-4B8C-83A1-F6EECF244321}">
-                <p14:modId xmlns:p14="http://schemas.microsoft.com/office/powerpoint/2010/main" val="2663386434"/>
+                <p14:modId xmlns:p14="http://schemas.microsoft.com/office/powerpoint/2010/main" val="4232356916"/>
               </p:ext>
             </p:extLst>
           </p:nvPr>
         </p:nvGraphicFramePr>
         <p:xfrm>
-          <a:off x="5271746" y="3033392"/>
+          <a:off x="5026425" y="1432610"/>
           <a:ext cx="2475832" cy="1018328"/>
         </p:xfrm>
         <a:graphic>
@@ -6739,13 +7603,13 @@
           <p:nvPr>
             <p:extLst>
               <p:ext uri="{D42A27DB-BD31-4B8C-83A1-F6EECF244321}">
-                <p14:modId xmlns:p14="http://schemas.microsoft.com/office/powerpoint/2010/main" val="760336020"/>
+                <p14:modId xmlns:p14="http://schemas.microsoft.com/office/powerpoint/2010/main" val="535280740"/>
               </p:ext>
             </p:extLst>
           </p:nvPr>
         </p:nvGraphicFramePr>
         <p:xfrm>
-          <a:off x="5271746" y="2524228"/>
+          <a:off x="5026425" y="923446"/>
           <a:ext cx="2475832" cy="1018329"/>
         </p:xfrm>
         <a:graphic>
@@ -6879,13 +7743,13 @@
           <p:nvPr>
             <p:extLst>
               <p:ext uri="{D42A27DB-BD31-4B8C-83A1-F6EECF244321}">
-                <p14:modId xmlns:p14="http://schemas.microsoft.com/office/powerpoint/2010/main" val="174791311"/>
+                <p14:modId xmlns:p14="http://schemas.microsoft.com/office/powerpoint/2010/main" val="3510520290"/>
               </p:ext>
             </p:extLst>
           </p:nvPr>
         </p:nvGraphicFramePr>
         <p:xfrm>
-          <a:off x="8740173" y="3042889"/>
+          <a:off x="8740173" y="3210481"/>
           <a:ext cx="2475832" cy="1018328"/>
         </p:xfrm>
         <a:graphic>
@@ -6984,13 +7848,13 @@
           <p:nvPr>
             <p:extLst>
               <p:ext uri="{D42A27DB-BD31-4B8C-83A1-F6EECF244321}">
-                <p14:modId xmlns:p14="http://schemas.microsoft.com/office/powerpoint/2010/main" val="2056447407"/>
+                <p14:modId xmlns:p14="http://schemas.microsoft.com/office/powerpoint/2010/main" val="201422188"/>
               </p:ext>
             </p:extLst>
           </p:nvPr>
         </p:nvGraphicFramePr>
         <p:xfrm>
-          <a:off x="8740173" y="2533725"/>
+          <a:off x="8740173" y="2701317"/>
           <a:ext cx="2475832" cy="1018329"/>
         </p:xfrm>
         <a:graphic>
@@ -7111,13 +7975,15 @@
           </p:cNvPr>
           <p:cNvCxnSpPr>
             <a:cxnSpLocks/>
+            <a:stCxn id="14" idx="1"/>
+            <a:endCxn id="17" idx="3"/>
           </p:cNvCxnSpPr>
           <p:nvPr/>
         </p:nvCxnSpPr>
         <p:spPr>
-          <a:xfrm flipV="1">
-            <a:off x="7764178" y="3257284"/>
-            <a:ext cx="940462" cy="15037"/>
+          <a:xfrm flipH="1">
+            <a:off x="7502257" y="1404635"/>
+            <a:ext cx="1237916" cy="27975"/>
           </a:xfrm>
           <a:prstGeom prst="straightConnector1">
             <a:avLst/>
@@ -7156,13 +8022,13 @@
           <p:nvPr>
             <p:extLst>
               <p:ext uri="{D42A27DB-BD31-4B8C-83A1-F6EECF244321}">
-                <p14:modId xmlns:p14="http://schemas.microsoft.com/office/powerpoint/2010/main" val="7761754"/>
+                <p14:modId xmlns:p14="http://schemas.microsoft.com/office/powerpoint/2010/main" val="1039031711"/>
               </p:ext>
             </p:extLst>
           </p:nvPr>
         </p:nvGraphicFramePr>
         <p:xfrm>
-          <a:off x="1935426" y="5647235"/>
+          <a:off x="5026425" y="5269517"/>
           <a:ext cx="2475832" cy="1149244"/>
         </p:xfrm>
         <a:graphic>
@@ -7288,13 +8154,13 @@
           <p:nvPr>
             <p:extLst>
               <p:ext uri="{D42A27DB-BD31-4B8C-83A1-F6EECF244321}">
-                <p14:modId xmlns:p14="http://schemas.microsoft.com/office/powerpoint/2010/main" val="2241496038"/>
+                <p14:modId xmlns:p14="http://schemas.microsoft.com/office/powerpoint/2010/main" val="1248102666"/>
               </p:ext>
             </p:extLst>
           </p:nvPr>
         </p:nvGraphicFramePr>
         <p:xfrm>
-          <a:off x="1935426" y="4029446"/>
+          <a:off x="5026425" y="3651728"/>
           <a:ext cx="2475832" cy="2182914"/>
         </p:xfrm>
         <a:graphic>
@@ -7555,13 +8421,144 @@
           </p:cNvPr>
           <p:cNvCxnSpPr>
             <a:cxnSpLocks/>
+            <a:stCxn id="18" idx="2"/>
+            <a:endCxn id="22" idx="3"/>
           </p:cNvCxnSpPr>
           <p:nvPr/>
         </p:nvCxnSpPr>
         <p:spPr>
           <a:xfrm flipH="1">
-            <a:off x="4411258" y="4061217"/>
-            <a:ext cx="4328915" cy="1661745"/>
+            <a:off x="7502257" y="4228809"/>
+            <a:ext cx="2475832" cy="1615330"/>
+          </a:xfrm>
+          <a:prstGeom prst="straightConnector1">
+            <a:avLst/>
+          </a:prstGeom>
+          <a:ln w="57150">
+            <a:tailEnd type="triangle"/>
+          </a:ln>
+        </p:spPr>
+        <p:style>
+          <a:lnRef idx="1">
+            <a:schemeClr val="accent1"/>
+          </a:lnRef>
+          <a:fillRef idx="0">
+            <a:schemeClr val="accent1"/>
+          </a:fillRef>
+          <a:effectRef idx="0">
+            <a:schemeClr val="accent1"/>
+          </a:effectRef>
+          <a:fontRef idx="minor">
+            <a:schemeClr val="tx1"/>
+          </a:fontRef>
+        </p:style>
+      </p:cxnSp>
+      <p:cxnSp>
+        <p:nvCxnSpPr>
+          <p:cNvPr id="5" name="Прямая со стрелкой 4">
+            <a:extLst>
+              <a:ext uri="{FF2B5EF4-FFF2-40B4-BE49-F238E27FC236}">
+                <a16:creationId xmlns:a16="http://schemas.microsoft.com/office/drawing/2014/main" id="{4F925A2E-90AD-48E7-E453-EF7B1CD687E5}"/>
+              </a:ext>
+            </a:extLst>
+          </p:cNvPr>
+          <p:cNvCxnSpPr>
+            <a:cxnSpLocks/>
+            <a:stCxn id="2" idx="3"/>
+            <a:endCxn id="17" idx="1"/>
+          </p:cNvCxnSpPr>
+          <p:nvPr/>
+        </p:nvCxnSpPr>
+        <p:spPr>
+          <a:xfrm flipV="1">
+            <a:off x="4507832" y="1432610"/>
+            <a:ext cx="518593" cy="22064"/>
+          </a:xfrm>
+          <a:prstGeom prst="straightConnector1">
+            <a:avLst/>
+          </a:prstGeom>
+          <a:ln w="57150">
+            <a:tailEnd type="triangle"/>
+          </a:ln>
+        </p:spPr>
+        <p:style>
+          <a:lnRef idx="1">
+            <a:schemeClr val="accent1"/>
+          </a:lnRef>
+          <a:fillRef idx="0">
+            <a:schemeClr val="accent1"/>
+          </a:fillRef>
+          <a:effectRef idx="0">
+            <a:schemeClr val="accent1"/>
+          </a:effectRef>
+          <a:fontRef idx="minor">
+            <a:schemeClr val="tx1"/>
+          </a:fontRef>
+        </p:style>
+      </p:cxnSp>
+      <p:cxnSp>
+        <p:nvCxnSpPr>
+          <p:cNvPr id="32" name="Прямая со стрелкой 31">
+            <a:extLst>
+              <a:ext uri="{FF2B5EF4-FFF2-40B4-BE49-F238E27FC236}">
+                <a16:creationId xmlns:a16="http://schemas.microsoft.com/office/drawing/2014/main" id="{C92D559E-F166-F4B1-5A23-FC6382EDC613}"/>
+              </a:ext>
+            </a:extLst>
+          </p:cNvPr>
+          <p:cNvCxnSpPr>
+            <a:cxnSpLocks/>
+            <a:stCxn id="16" idx="2"/>
+            <a:endCxn id="23" idx="0"/>
+          </p:cNvCxnSpPr>
+          <p:nvPr/>
+        </p:nvCxnSpPr>
+        <p:spPr>
+          <a:xfrm>
+            <a:off x="6264341" y="2450938"/>
+            <a:ext cx="0" cy="1200790"/>
+          </a:xfrm>
+          <a:prstGeom prst="straightConnector1">
+            <a:avLst/>
+          </a:prstGeom>
+          <a:ln w="57150">
+            <a:tailEnd type="triangle"/>
+          </a:ln>
+        </p:spPr>
+        <p:style>
+          <a:lnRef idx="1">
+            <a:schemeClr val="accent1"/>
+          </a:lnRef>
+          <a:fillRef idx="0">
+            <a:schemeClr val="accent1"/>
+          </a:fillRef>
+          <a:effectRef idx="0">
+            <a:schemeClr val="accent1"/>
+          </a:effectRef>
+          <a:fontRef idx="minor">
+            <a:schemeClr val="tx1"/>
+          </a:fontRef>
+        </p:style>
+      </p:cxnSp>
+      <p:cxnSp>
+        <p:nvCxnSpPr>
+          <p:cNvPr id="53" name="Прямая со стрелкой 52">
+            <a:extLst>
+              <a:ext uri="{FF2B5EF4-FFF2-40B4-BE49-F238E27FC236}">
+                <a16:creationId xmlns:a16="http://schemas.microsoft.com/office/drawing/2014/main" id="{910F91C0-B83E-2051-1B4D-78079F0F7D1D}"/>
+              </a:ext>
+            </a:extLst>
+          </p:cNvPr>
+          <p:cNvCxnSpPr>
+            <a:cxnSpLocks/>
+            <a:stCxn id="13" idx="1"/>
+            <a:endCxn id="23" idx="3"/>
+          </p:cNvCxnSpPr>
+          <p:nvPr/>
+        </p:nvCxnSpPr>
+        <p:spPr>
+          <a:xfrm flipH="1">
+            <a:off x="7502257" y="1879141"/>
+            <a:ext cx="1237916" cy="2864044"/>
           </a:xfrm>
           <a:prstGeom prst="straightConnector1">
             <a:avLst/>
@@ -7589,868 +8586,6 @@
     <p:extLst>
       <p:ext uri="{BB962C8B-B14F-4D97-AF65-F5344CB8AC3E}">
         <p14:creationId xmlns:p14="http://schemas.microsoft.com/office/powerpoint/2010/main" val="131092587"/>
-      </p:ext>
-    </p:extLst>
-  </p:cSld>
-  <p:clrMapOvr>
-    <a:masterClrMapping/>
-  </p:clrMapOvr>
-</p:sld>
-</file>
-
-<file path=ppt/slides/slide13.xml><?xml version="1.0" encoding="utf-8"?>
-<p:sld xmlns:a="http://schemas.openxmlformats.org/drawingml/2006/main" xmlns:r="http://schemas.openxmlformats.org/officeDocument/2006/relationships" xmlns:p="http://schemas.openxmlformats.org/presentationml/2006/main">
-  <p:cSld>
-    <p:spTree>
-      <p:nvGrpSpPr>
-        <p:cNvPr id="1" name="">
-          <a:extLst>
-            <a:ext uri="{FF2B5EF4-FFF2-40B4-BE49-F238E27FC236}">
-              <a16:creationId xmlns:a16="http://schemas.microsoft.com/office/drawing/2014/main" id="{6B1EA241-3A0B-F48D-DF24-41203B41C8FD}"/>
-            </a:ext>
-          </a:extLst>
-        </p:cNvPr>
-        <p:cNvGrpSpPr/>
-        <p:nvPr/>
-      </p:nvGrpSpPr>
-      <p:grpSpPr>
-        <a:xfrm>
-          <a:off x="0" y="0"/>
-          <a:ext cx="0" cy="0"/>
-          <a:chOff x="0" y="0"/>
-          <a:chExt cx="0" cy="0"/>
-        </a:xfrm>
-      </p:grpSpPr>
-      <p:pic>
-        <p:nvPicPr>
-          <p:cNvPr id="6" name="Объект 5">
-            <a:extLst>
-              <a:ext uri="{FF2B5EF4-FFF2-40B4-BE49-F238E27FC236}">
-                <a16:creationId xmlns:a16="http://schemas.microsoft.com/office/drawing/2014/main" id="{678B5A6C-C803-EEE4-2B91-BA56A4CFAD53}"/>
-              </a:ext>
-            </a:extLst>
-          </p:cNvPr>
-          <p:cNvPicPr>
-            <a:picLocks noGrp="1"/>
-          </p:cNvPicPr>
-          <p:nvPr>
-            <p:ph idx="1"/>
-          </p:nvPr>
-        </p:nvPicPr>
-        <p:blipFill>
-          <a:blip r:embed="rId3">
-            <a:extLst>
-              <a:ext uri="{28A0092B-C50C-407E-A947-70E740481C1C}">
-                <a14:useLocalDpi xmlns:a14="http://schemas.microsoft.com/office/drawing/2010/main" val="0"/>
-              </a:ext>
-            </a:extLst>
-          </a:blip>
-          <a:stretch>
-            <a:fillRect/>
-          </a:stretch>
-        </p:blipFill>
-        <p:spPr>
-          <a:xfrm>
-            <a:off x="0" y="0"/>
-            <a:ext cx="12192000" cy="6934200"/>
-          </a:xfrm>
-        </p:spPr>
-      </p:pic>
-      <p:sp>
-        <p:nvSpPr>
-          <p:cNvPr id="3" name="Заголовок 1">
-            <a:extLst>
-              <a:ext uri="{FF2B5EF4-FFF2-40B4-BE49-F238E27FC236}">
-                <a16:creationId xmlns:a16="http://schemas.microsoft.com/office/drawing/2014/main" id="{6212C54A-A273-C375-0141-AEA49448614B}"/>
-              </a:ext>
-            </a:extLst>
-          </p:cNvPr>
-          <p:cNvSpPr txBox="1">
-            <a:spLocks/>
-          </p:cNvSpPr>
-          <p:nvPr/>
-        </p:nvSpPr>
-        <p:spPr>
-          <a:xfrm>
-            <a:off x="883192" y="449660"/>
-            <a:ext cx="10515600" cy="358775"/>
-          </a:xfrm>
-          <a:prstGeom prst="rect">
-            <a:avLst/>
-          </a:prstGeom>
-        </p:spPr>
-        <p:txBody>
-          <a:bodyPr vert="horz" lIns="91440" tIns="45720" rIns="91440" bIns="45720" rtlCol="0" anchor="ctr">
-            <a:noAutofit/>
-          </a:bodyPr>
-          <a:lstStyle>
-            <a:lvl1pPr algn="l" defTabSz="914400" rtl="0" eaLnBrk="1" latinLnBrk="0" hangingPunct="1">
-              <a:lnSpc>
-                <a:spcPct val="90000"/>
-              </a:lnSpc>
-              <a:spcBef>
-                <a:spcPct val="0"/>
-              </a:spcBef>
-              <a:buNone/>
-              <a:defRPr sz="4400" kern="1200">
-                <a:solidFill>
-                  <a:schemeClr val="tx1"/>
-                </a:solidFill>
-                <a:latin typeface="+mj-lt"/>
-                <a:ea typeface="+mj-ea"/>
-                <a:cs typeface="+mj-cs"/>
-              </a:defRPr>
-            </a:lvl1pPr>
-          </a:lstStyle>
-          <a:p>
-            <a:pPr algn="ctr"/>
-            <a:r>
-              <a:rPr lang="ru-RU" sz="7200" b="1" dirty="0">
-                <a:solidFill>
-                  <a:schemeClr val="bg1"/>
-                </a:solidFill>
-              </a:rPr>
-              <a:t>Основные классы</a:t>
-            </a:r>
-          </a:p>
-        </p:txBody>
-      </p:sp>
-      <p:sp>
-        <p:nvSpPr>
-          <p:cNvPr id="8" name="Заголовок 4">
-            <a:extLst>
-              <a:ext uri="{FF2B5EF4-FFF2-40B4-BE49-F238E27FC236}">
-                <a16:creationId xmlns:a16="http://schemas.microsoft.com/office/drawing/2014/main" id="{C302C663-4600-B640-F601-07992A726ED0}"/>
-              </a:ext>
-            </a:extLst>
-          </p:cNvPr>
-          <p:cNvSpPr txBox="1">
-            <a:spLocks/>
-          </p:cNvSpPr>
-          <p:nvPr/>
-        </p:nvSpPr>
-        <p:spPr>
-          <a:xfrm>
-            <a:off x="883192" y="1910831"/>
-            <a:ext cx="5981194" cy="2960138"/>
-          </a:xfrm>
-          <a:prstGeom prst="rect">
-            <a:avLst/>
-          </a:prstGeom>
-        </p:spPr>
-        <p:txBody>
-          <a:bodyPr vert="horz" lIns="91440" tIns="45720" rIns="91440" bIns="45720" rtlCol="0" anchor="ctr">
-            <a:noAutofit/>
-          </a:bodyPr>
-          <a:lstStyle>
-            <a:lvl1pPr algn="l" defTabSz="914400" rtl="0" eaLnBrk="1" latinLnBrk="0" hangingPunct="1">
-              <a:lnSpc>
-                <a:spcPct val="90000"/>
-              </a:lnSpc>
-              <a:spcBef>
-                <a:spcPct val="0"/>
-              </a:spcBef>
-              <a:buNone/>
-              <a:defRPr sz="4400" kern="1200">
-                <a:solidFill>
-                  <a:schemeClr val="tx1"/>
-                </a:solidFill>
-                <a:latin typeface="+mj-lt"/>
-                <a:ea typeface="+mj-ea"/>
-                <a:cs typeface="+mj-cs"/>
-              </a:defRPr>
-            </a:lvl1pPr>
-          </a:lstStyle>
-          <a:p>
-            <a:endParaRPr lang="ru-RU" sz="2800" dirty="0">
-              <a:solidFill>
-                <a:schemeClr val="bg1"/>
-              </a:solidFill>
-            </a:endParaRPr>
-          </a:p>
-        </p:txBody>
-      </p:sp>
-      <p:sp>
-        <p:nvSpPr>
-          <p:cNvPr id="10" name="TextBox 9">
-            <a:extLst>
-              <a:ext uri="{FF2B5EF4-FFF2-40B4-BE49-F238E27FC236}">
-                <a16:creationId xmlns:a16="http://schemas.microsoft.com/office/drawing/2014/main" id="{ACBC5EE2-E8A3-B76E-2A0C-30C9E610ED57}"/>
-              </a:ext>
-            </a:extLst>
-          </p:cNvPr>
-          <p:cNvSpPr txBox="1"/>
-          <p:nvPr/>
-        </p:nvSpPr>
-        <p:spPr>
-          <a:xfrm>
-            <a:off x="2904498" y="1145361"/>
-            <a:ext cx="6472988" cy="5262979"/>
-          </a:xfrm>
-          <a:prstGeom prst="rect">
-            <a:avLst/>
-          </a:prstGeom>
-          <a:noFill/>
-        </p:spPr>
-        <p:txBody>
-          <a:bodyPr wrap="square">
-            <a:spAutoFit/>
-          </a:bodyPr>
-          <a:lstStyle/>
-          <a:p>
-            <a:r>
-              <a:rPr lang="en-US" sz="2800" dirty="0">
-                <a:solidFill>
-                  <a:schemeClr val="bg1"/>
-                </a:solidFill>
-              </a:rPr>
-              <a:t>Cipher — </a:t>
-            </a:r>
-            <a:r>
-              <a:rPr lang="ru-RU" sz="2800" dirty="0">
-                <a:solidFill>
-                  <a:schemeClr val="bg1"/>
-                </a:solidFill>
-              </a:rPr>
-              <a:t>абстрактный класс, задаёт интерфейс метода </a:t>
-            </a:r>
-            <a:r>
-              <a:rPr lang="en-US" sz="2800" dirty="0">
-                <a:solidFill>
-                  <a:schemeClr val="bg1"/>
-                </a:solidFill>
-              </a:rPr>
-              <a:t>process()</a:t>
-            </a:r>
-            <a:endParaRPr lang="ru-RU" sz="2800" dirty="0">
-              <a:solidFill>
-                <a:schemeClr val="bg1"/>
-              </a:solidFill>
-            </a:endParaRPr>
-          </a:p>
-          <a:p>
-            <a:r>
-              <a:rPr lang="en-US" sz="2800" dirty="0" err="1">
-                <a:solidFill>
-                  <a:schemeClr val="bg1"/>
-                </a:solidFill>
-              </a:rPr>
-              <a:t>VernamCipher</a:t>
-            </a:r>
-            <a:r>
-              <a:rPr lang="en-US" sz="2800" dirty="0">
-                <a:solidFill>
-                  <a:schemeClr val="bg1"/>
-                </a:solidFill>
-              </a:rPr>
-              <a:t> — </a:t>
-            </a:r>
-            <a:r>
-              <a:rPr lang="ru-RU" sz="2800" dirty="0">
-                <a:solidFill>
-                  <a:schemeClr val="bg1"/>
-                </a:solidFill>
-              </a:rPr>
-              <a:t>реализует алгоритм шифрования (</a:t>
-            </a:r>
-            <a:r>
-              <a:rPr lang="en-US" sz="2800" dirty="0">
-                <a:solidFill>
-                  <a:schemeClr val="bg1"/>
-                </a:solidFill>
-              </a:rPr>
-              <a:t>XOR/</a:t>
-            </a:r>
-            <a:r>
-              <a:rPr lang="ru-RU" sz="2800" dirty="0">
-                <a:solidFill>
-                  <a:schemeClr val="bg1"/>
-                </a:solidFill>
-              </a:rPr>
-              <a:t>Вернам)</a:t>
-            </a:r>
-          </a:p>
-          <a:p>
-            <a:r>
-              <a:rPr lang="en-US" sz="2800" dirty="0" err="1">
-                <a:solidFill>
-                  <a:schemeClr val="bg1"/>
-                </a:solidFill>
-              </a:rPr>
-              <a:t>TextModel</a:t>
-            </a:r>
-            <a:r>
-              <a:rPr lang="en-US" sz="2800" dirty="0">
-                <a:solidFill>
-                  <a:schemeClr val="bg1"/>
-                </a:solidFill>
-              </a:rPr>
-              <a:t> — </a:t>
-            </a:r>
-            <a:r>
-              <a:rPr lang="ru-RU" sz="2800" dirty="0">
-                <a:solidFill>
-                  <a:schemeClr val="bg1"/>
-                </a:solidFill>
-              </a:rPr>
-              <a:t>хранит текст (</a:t>
-            </a:r>
-            <a:r>
-              <a:rPr lang="en-US" sz="2800" dirty="0" err="1">
-                <a:solidFill>
-                  <a:schemeClr val="bg1"/>
-                </a:solidFill>
-              </a:rPr>
-              <a:t>set_text</a:t>
-            </a:r>
-            <a:r>
-              <a:rPr lang="en-US" sz="2800" dirty="0">
-                <a:solidFill>
-                  <a:schemeClr val="bg1"/>
-                </a:solidFill>
-              </a:rPr>
-              <a:t>, </a:t>
-            </a:r>
-            <a:r>
-              <a:rPr lang="en-US" sz="2800" dirty="0" err="1">
-                <a:solidFill>
-                  <a:schemeClr val="bg1"/>
-                </a:solidFill>
-              </a:rPr>
-              <a:t>get_text</a:t>
-            </a:r>
-            <a:r>
-              <a:rPr lang="en-US" sz="2800" dirty="0">
-                <a:solidFill>
-                  <a:schemeClr val="bg1"/>
-                </a:solidFill>
-              </a:rPr>
-              <a:t>)</a:t>
-            </a:r>
-            <a:endParaRPr lang="ru-RU" sz="2800" dirty="0">
-              <a:solidFill>
-                <a:schemeClr val="bg1"/>
-              </a:solidFill>
-            </a:endParaRPr>
-          </a:p>
-          <a:p>
-            <a:r>
-              <a:rPr lang="en-US" sz="2800" dirty="0" err="1">
-                <a:solidFill>
-                  <a:schemeClr val="bg1"/>
-                </a:solidFill>
-              </a:rPr>
-              <a:t>CipherController</a:t>
-            </a:r>
-            <a:r>
-              <a:rPr lang="en-US" sz="2800" dirty="0">
-                <a:solidFill>
-                  <a:schemeClr val="bg1"/>
-                </a:solidFill>
-              </a:rPr>
-              <a:t> — </a:t>
-            </a:r>
-            <a:r>
-              <a:rPr lang="ru-RU" sz="2800" dirty="0">
-                <a:solidFill>
-                  <a:schemeClr val="bg1"/>
-                </a:solidFill>
-              </a:rPr>
-              <a:t>связывает модель и алгоритм (</a:t>
-            </a:r>
-            <a:r>
-              <a:rPr lang="en-US" sz="2800" dirty="0">
-                <a:solidFill>
-                  <a:schemeClr val="bg1"/>
-                </a:solidFill>
-              </a:rPr>
-              <a:t>encrypt)</a:t>
-            </a:r>
-            <a:endParaRPr lang="ru-RU" sz="2800" dirty="0">
-              <a:solidFill>
-                <a:schemeClr val="bg1"/>
-              </a:solidFill>
-            </a:endParaRPr>
-          </a:p>
-          <a:p>
-            <a:r>
-              <a:rPr lang="en-US" sz="2800" dirty="0" err="1">
-                <a:solidFill>
-                  <a:schemeClr val="bg1"/>
-                </a:solidFill>
-              </a:rPr>
-              <a:t>OptionsFrame</a:t>
-            </a:r>
-            <a:r>
-              <a:rPr lang="en-US" sz="2800" dirty="0">
-                <a:solidFill>
-                  <a:schemeClr val="bg1"/>
-                </a:solidFill>
-              </a:rPr>
-              <a:t> — </a:t>
-            </a:r>
-            <a:r>
-              <a:rPr lang="ru-RU" sz="2800" dirty="0">
-                <a:solidFill>
-                  <a:schemeClr val="bg1"/>
-                </a:solidFill>
-              </a:rPr>
-              <a:t>отвечает за ввод и генерацию ключа</a:t>
-            </a:r>
-          </a:p>
-          <a:p>
-            <a:r>
-              <a:rPr lang="en-US" sz="2800" dirty="0" err="1">
-                <a:solidFill>
-                  <a:schemeClr val="bg1"/>
-                </a:solidFill>
-              </a:rPr>
-              <a:t>CipherApp</a:t>
-            </a:r>
-            <a:r>
-              <a:rPr lang="en-US" sz="2800" dirty="0">
-                <a:solidFill>
-                  <a:schemeClr val="bg1"/>
-                </a:solidFill>
-              </a:rPr>
-              <a:t> — </a:t>
-            </a:r>
-            <a:r>
-              <a:rPr lang="ru-RU" sz="2800" dirty="0">
-                <a:solidFill>
-                  <a:schemeClr val="bg1"/>
-                </a:solidFill>
-              </a:rPr>
-              <a:t>главный класс, объединяет все компоненты</a:t>
-            </a:r>
-          </a:p>
-        </p:txBody>
-      </p:sp>
-    </p:spTree>
-    <p:extLst>
-      <p:ext uri="{BB962C8B-B14F-4D97-AF65-F5344CB8AC3E}">
-        <p14:creationId xmlns:p14="http://schemas.microsoft.com/office/powerpoint/2010/main" val="2603616649"/>
-      </p:ext>
-    </p:extLst>
-  </p:cSld>
-  <p:clrMapOvr>
-    <a:masterClrMapping/>
-  </p:clrMapOvr>
-</p:sld>
-</file>
-
-<file path=ppt/slides/slide14.xml><?xml version="1.0" encoding="utf-8"?>
-<p:sld xmlns:a="http://schemas.openxmlformats.org/drawingml/2006/main" xmlns:r="http://schemas.openxmlformats.org/officeDocument/2006/relationships" xmlns:p="http://schemas.openxmlformats.org/presentationml/2006/main">
-  <p:cSld>
-    <p:spTree>
-      <p:nvGrpSpPr>
-        <p:cNvPr id="1" name="">
-          <a:extLst>
-            <a:ext uri="{FF2B5EF4-FFF2-40B4-BE49-F238E27FC236}">
-              <a16:creationId xmlns:a16="http://schemas.microsoft.com/office/drawing/2014/main" id="{6B1EA241-3A0B-F48D-DF24-41203B41C8FD}"/>
-            </a:ext>
-          </a:extLst>
-        </p:cNvPr>
-        <p:cNvGrpSpPr/>
-        <p:nvPr/>
-      </p:nvGrpSpPr>
-      <p:grpSpPr>
-        <a:xfrm>
-          <a:off x="0" y="0"/>
-          <a:ext cx="0" cy="0"/>
-          <a:chOff x="0" y="0"/>
-          <a:chExt cx="0" cy="0"/>
-        </a:xfrm>
-      </p:grpSpPr>
-      <p:pic>
-        <p:nvPicPr>
-          <p:cNvPr id="6" name="Объект 5">
-            <a:extLst>
-              <a:ext uri="{FF2B5EF4-FFF2-40B4-BE49-F238E27FC236}">
-                <a16:creationId xmlns:a16="http://schemas.microsoft.com/office/drawing/2014/main" id="{678B5A6C-C803-EEE4-2B91-BA56A4CFAD53}"/>
-              </a:ext>
-            </a:extLst>
-          </p:cNvPr>
-          <p:cNvPicPr>
-            <a:picLocks noGrp="1"/>
-          </p:cNvPicPr>
-          <p:nvPr>
-            <p:ph idx="1"/>
-          </p:nvPr>
-        </p:nvPicPr>
-        <p:blipFill>
-          <a:blip r:embed="rId3">
-            <a:extLst>
-              <a:ext uri="{28A0092B-C50C-407E-A947-70E740481C1C}">
-                <a14:useLocalDpi xmlns:a14="http://schemas.microsoft.com/office/drawing/2010/main" val="0"/>
-              </a:ext>
-            </a:extLst>
-          </a:blip>
-          <a:stretch>
-            <a:fillRect/>
-          </a:stretch>
-        </p:blipFill>
-        <p:spPr>
-          <a:xfrm>
-            <a:off x="0" y="0"/>
-            <a:ext cx="12192000" cy="6934200"/>
-          </a:xfrm>
-        </p:spPr>
-      </p:pic>
-      <p:sp>
-        <p:nvSpPr>
-          <p:cNvPr id="3" name="Заголовок 1">
-            <a:extLst>
-              <a:ext uri="{FF2B5EF4-FFF2-40B4-BE49-F238E27FC236}">
-                <a16:creationId xmlns:a16="http://schemas.microsoft.com/office/drawing/2014/main" id="{6212C54A-A273-C375-0141-AEA49448614B}"/>
-              </a:ext>
-            </a:extLst>
-          </p:cNvPr>
-          <p:cNvSpPr txBox="1">
-            <a:spLocks/>
-          </p:cNvSpPr>
-          <p:nvPr/>
-        </p:nvSpPr>
-        <p:spPr>
-          <a:xfrm>
-            <a:off x="838200" y="469994"/>
-            <a:ext cx="10515600" cy="358775"/>
-          </a:xfrm>
-          <a:prstGeom prst="rect">
-            <a:avLst/>
-          </a:prstGeom>
-        </p:spPr>
-        <p:txBody>
-          <a:bodyPr vert="horz" lIns="91440" tIns="45720" rIns="91440" bIns="45720" rtlCol="0" anchor="ctr">
-            <a:noAutofit/>
-          </a:bodyPr>
-          <a:lstStyle>
-            <a:lvl1pPr algn="l" defTabSz="914400" rtl="0" eaLnBrk="1" latinLnBrk="0" hangingPunct="1">
-              <a:lnSpc>
-                <a:spcPct val="90000"/>
-              </a:lnSpc>
-              <a:spcBef>
-                <a:spcPct val="0"/>
-              </a:spcBef>
-              <a:buNone/>
-              <a:defRPr sz="4400" kern="1200">
-                <a:solidFill>
-                  <a:schemeClr val="tx1"/>
-                </a:solidFill>
-                <a:latin typeface="+mj-lt"/>
-                <a:ea typeface="+mj-ea"/>
-                <a:cs typeface="+mj-cs"/>
-              </a:defRPr>
-            </a:lvl1pPr>
-          </a:lstStyle>
-          <a:p>
-            <a:pPr algn="ctr"/>
-            <a:r>
-              <a:rPr lang="ru-RU" sz="7200" dirty="0">
-                <a:solidFill>
-                  <a:schemeClr val="bg1"/>
-                </a:solidFill>
-              </a:rPr>
-              <a:t>Связи между классами</a:t>
-            </a:r>
-          </a:p>
-        </p:txBody>
-      </p:sp>
-      <p:sp>
-        <p:nvSpPr>
-          <p:cNvPr id="8" name="Заголовок 4">
-            <a:extLst>
-              <a:ext uri="{FF2B5EF4-FFF2-40B4-BE49-F238E27FC236}">
-                <a16:creationId xmlns:a16="http://schemas.microsoft.com/office/drawing/2014/main" id="{C302C663-4600-B640-F601-07992A726ED0}"/>
-              </a:ext>
-            </a:extLst>
-          </p:cNvPr>
-          <p:cNvSpPr txBox="1">
-            <a:spLocks/>
-          </p:cNvSpPr>
-          <p:nvPr/>
-        </p:nvSpPr>
-        <p:spPr>
-          <a:xfrm>
-            <a:off x="883192" y="1910831"/>
-            <a:ext cx="5981194" cy="2960138"/>
-          </a:xfrm>
-          <a:prstGeom prst="rect">
-            <a:avLst/>
-          </a:prstGeom>
-        </p:spPr>
-        <p:txBody>
-          <a:bodyPr vert="horz" lIns="91440" tIns="45720" rIns="91440" bIns="45720" rtlCol="0" anchor="ctr">
-            <a:noAutofit/>
-          </a:bodyPr>
-          <a:lstStyle>
-            <a:lvl1pPr algn="l" defTabSz="914400" rtl="0" eaLnBrk="1" latinLnBrk="0" hangingPunct="1">
-              <a:lnSpc>
-                <a:spcPct val="90000"/>
-              </a:lnSpc>
-              <a:spcBef>
-                <a:spcPct val="0"/>
-              </a:spcBef>
-              <a:buNone/>
-              <a:defRPr sz="4400" kern="1200">
-                <a:solidFill>
-                  <a:schemeClr val="tx1"/>
-                </a:solidFill>
-                <a:latin typeface="+mj-lt"/>
-                <a:ea typeface="+mj-ea"/>
-                <a:cs typeface="+mj-cs"/>
-              </a:defRPr>
-            </a:lvl1pPr>
-          </a:lstStyle>
-          <a:p>
-            <a:endParaRPr lang="ru-RU" sz="2800" dirty="0">
-              <a:solidFill>
-                <a:schemeClr val="bg1"/>
-              </a:solidFill>
-            </a:endParaRPr>
-          </a:p>
-        </p:txBody>
-      </p:sp>
-      <p:sp>
-        <p:nvSpPr>
-          <p:cNvPr id="10" name="TextBox 9">
-            <a:extLst>
-              <a:ext uri="{FF2B5EF4-FFF2-40B4-BE49-F238E27FC236}">
-                <a16:creationId xmlns:a16="http://schemas.microsoft.com/office/drawing/2014/main" id="{ACBC5EE2-E8A3-B76E-2A0C-30C9E610ED57}"/>
-              </a:ext>
-            </a:extLst>
-          </p:cNvPr>
-          <p:cNvSpPr txBox="1"/>
-          <p:nvPr/>
-        </p:nvSpPr>
-        <p:spPr>
-          <a:xfrm>
-            <a:off x="883193" y="1374963"/>
-            <a:ext cx="10891712" cy="4154984"/>
-          </a:xfrm>
-          <a:prstGeom prst="rect">
-            <a:avLst/>
-          </a:prstGeom>
-          <a:noFill/>
-        </p:spPr>
-        <p:txBody>
-          <a:bodyPr wrap="square">
-            <a:spAutoFit/>
-          </a:bodyPr>
-          <a:lstStyle/>
-          <a:p>
-            <a:r>
-              <a:rPr lang="en-US" sz="4400" dirty="0" err="1">
-                <a:solidFill>
-                  <a:schemeClr val="bg1"/>
-                </a:solidFill>
-              </a:rPr>
-              <a:t>CipherApp</a:t>
-            </a:r>
-            <a:r>
-              <a:rPr lang="en-US" sz="4400" dirty="0">
-                <a:solidFill>
-                  <a:schemeClr val="bg1"/>
-                </a:solidFill>
-              </a:rPr>
-              <a:t> </a:t>
-            </a:r>
-            <a:r>
-              <a:rPr lang="ru-RU" sz="4400" dirty="0">
-                <a:solidFill>
-                  <a:schemeClr val="bg1"/>
-                </a:solidFill>
-              </a:rPr>
-              <a:t>использует </a:t>
-            </a:r>
-            <a:r>
-              <a:rPr lang="en-US" sz="4400" dirty="0" err="1">
-                <a:solidFill>
-                  <a:schemeClr val="bg1"/>
-                </a:solidFill>
-              </a:rPr>
-              <a:t>CipherController</a:t>
-            </a:r>
-            <a:r>
-              <a:rPr lang="en-US" sz="4400" dirty="0">
-                <a:solidFill>
-                  <a:schemeClr val="bg1"/>
-                </a:solidFill>
-              </a:rPr>
-              <a:t> </a:t>
-            </a:r>
-            <a:r>
-              <a:rPr lang="ru-RU" sz="4400" dirty="0">
-                <a:solidFill>
-                  <a:schemeClr val="bg1"/>
-                </a:solidFill>
-              </a:rPr>
-              <a:t>и </a:t>
-            </a:r>
-            <a:r>
-              <a:rPr lang="en-US" sz="4400" dirty="0" err="1">
-                <a:solidFill>
-                  <a:schemeClr val="bg1"/>
-                </a:solidFill>
-              </a:rPr>
-              <a:t>TextModel</a:t>
-            </a:r>
-            <a:r>
-              <a:rPr lang="en-US" sz="4400" dirty="0">
-                <a:solidFill>
-                  <a:schemeClr val="bg1"/>
-                </a:solidFill>
-              </a:rPr>
-              <a:t>, </a:t>
-            </a:r>
-            <a:r>
-              <a:rPr lang="ru-RU" sz="4400" dirty="0">
-                <a:solidFill>
-                  <a:schemeClr val="bg1"/>
-                </a:solidFill>
-              </a:rPr>
-              <a:t>содержит </a:t>
-            </a:r>
-            <a:r>
-              <a:rPr lang="en-US" sz="4400" dirty="0" err="1">
-                <a:solidFill>
-                  <a:schemeClr val="bg1"/>
-                </a:solidFill>
-              </a:rPr>
-              <a:t>OptionsFrame</a:t>
-            </a:r>
-            <a:endParaRPr lang="ru-RU" sz="4400" dirty="0">
-              <a:solidFill>
-                <a:schemeClr val="bg1"/>
-              </a:solidFill>
-            </a:endParaRPr>
-          </a:p>
-          <a:p>
-            <a:r>
-              <a:rPr lang="en-US" sz="4400" dirty="0" err="1">
-                <a:solidFill>
-                  <a:schemeClr val="bg1"/>
-                </a:solidFill>
-              </a:rPr>
-              <a:t>CipherController</a:t>
-            </a:r>
-            <a:r>
-              <a:rPr lang="en-US" sz="4400" dirty="0">
-                <a:solidFill>
-                  <a:schemeClr val="bg1"/>
-                </a:solidFill>
-              </a:rPr>
-              <a:t> </a:t>
-            </a:r>
-            <a:r>
-              <a:rPr lang="ru-RU" sz="4400" dirty="0">
-                <a:solidFill>
-                  <a:schemeClr val="bg1"/>
-                </a:solidFill>
-              </a:rPr>
-              <a:t>работает с </a:t>
-            </a:r>
-            <a:r>
-              <a:rPr lang="en-US" sz="4400" dirty="0">
-                <a:solidFill>
-                  <a:schemeClr val="bg1"/>
-                </a:solidFill>
-              </a:rPr>
-              <a:t>Cipher </a:t>
-            </a:r>
-            <a:r>
-              <a:rPr lang="ru-RU" sz="4400" dirty="0">
-                <a:solidFill>
-                  <a:schemeClr val="bg1"/>
-                </a:solidFill>
-              </a:rPr>
-              <a:t>и </a:t>
-            </a:r>
-            <a:r>
-              <a:rPr lang="en-US" sz="4400" dirty="0" err="1">
-                <a:solidFill>
-                  <a:schemeClr val="bg1"/>
-                </a:solidFill>
-              </a:rPr>
-              <a:t>TextModel</a:t>
-            </a:r>
-            <a:endParaRPr lang="ru-RU" sz="4400" dirty="0">
-              <a:solidFill>
-                <a:schemeClr val="bg1"/>
-              </a:solidFill>
-            </a:endParaRPr>
-          </a:p>
-          <a:p>
-            <a:r>
-              <a:rPr lang="en-US" sz="4400" dirty="0" err="1">
-                <a:solidFill>
-                  <a:schemeClr val="bg1"/>
-                </a:solidFill>
-              </a:rPr>
-              <a:t>VernamCipher</a:t>
-            </a:r>
-            <a:r>
-              <a:rPr lang="en-US" sz="4400" dirty="0">
-                <a:solidFill>
-                  <a:schemeClr val="bg1"/>
-                </a:solidFill>
-              </a:rPr>
-              <a:t> </a:t>
-            </a:r>
-            <a:r>
-              <a:rPr lang="ru-RU" sz="4400" dirty="0">
-                <a:solidFill>
-                  <a:schemeClr val="bg1"/>
-                </a:solidFill>
-              </a:rPr>
-              <a:t>наследует </a:t>
-            </a:r>
-            <a:r>
-              <a:rPr lang="en-US" sz="4400" dirty="0">
-                <a:solidFill>
-                  <a:schemeClr val="bg1"/>
-                </a:solidFill>
-              </a:rPr>
-              <a:t>Cipher</a:t>
-            </a:r>
-            <a:endParaRPr lang="ru-RU" sz="4400" dirty="0">
-              <a:solidFill>
-                <a:schemeClr val="bg1"/>
-              </a:solidFill>
-            </a:endParaRPr>
-          </a:p>
-          <a:p>
-            <a:r>
-              <a:rPr lang="en-US" sz="4400" dirty="0" err="1">
-                <a:solidFill>
-                  <a:schemeClr val="bg1"/>
-                </a:solidFill>
-              </a:rPr>
-              <a:t>OptionsFrame</a:t>
-            </a:r>
-            <a:r>
-              <a:rPr lang="en-US" sz="4400" dirty="0">
-                <a:solidFill>
-                  <a:schemeClr val="bg1"/>
-                </a:solidFill>
-              </a:rPr>
-              <a:t> </a:t>
-            </a:r>
-            <a:r>
-              <a:rPr lang="ru-RU" sz="4400" dirty="0">
-                <a:solidFill>
-                  <a:schemeClr val="bg1"/>
-                </a:solidFill>
-              </a:rPr>
-              <a:t>отвечает только за интерфейс</a:t>
-            </a:r>
-          </a:p>
-        </p:txBody>
-      </p:sp>
-    </p:spTree>
-    <p:extLst>
-      <p:ext uri="{BB962C8B-B14F-4D97-AF65-F5344CB8AC3E}">
-        <p14:creationId xmlns:p14="http://schemas.microsoft.com/office/powerpoint/2010/main" val="3047764445"/>
       </p:ext>
     </p:extLst>
   </p:cSld>
